--- a/docs/pptx/carbo/jx-carbo-linsubhr-sens-aki2.pptx
+++ b/docs/pptx/carbo/jx-carbo-linsubhr-sens-aki2.pptx
@@ -5339,7 +5339,7 @@
           <p:spPr>
             <a:xfrm>
               <a:off x="817517" y="1896563"/>
-              <a:ext cx="6169365" cy="82021"/>
+              <a:ext cx="6833128" cy="82021"/>
             </a:xfrm>
             <a:prstGeom prst="rect">
               <a:avLst/>
@@ -5371,7 +5371,7 @@
                   <a:latin typeface="Helvetica"/>
                   <a:cs typeface="Helvetica"/>
                 </a:rPr>
-                <a:t>subHR per 0.1 ratio decline: 1.20 (1.02-1.41), p = 0.029  |  per IQR decline (Δ = 0.28): 1.66 (1.05-2.61)  |  IQR: [0.70, 0.98]</a:t>
+                <a:t>subHR per 0.1 ratio decline: 1.20 (1.02-1.41), p_Bonf = 0.174 (n = 6)  |  per IQR decline (Δ = 0.28): 1.66 (1.05-2.61)  |  IQR: [0.70, 0.98]</a:t>
               </a:r>
             </a:p>
           </p:txBody>

--- a/docs/pptx/carbo/jx-carbo-linsubhr-sens-aki2.pptx
+++ b/docs/pptx/carbo/jx-carbo-linsubhr-sens-aki2.pptx
@@ -5062,8 +5062,8 @@
           </p:nvSpPr>
           <p:spPr>
             <a:xfrm>
-              <a:off x="2155289" y="5785772"/>
-              <a:ext cx="155356" cy="80101"/>
+              <a:off x="2152181" y="5785772"/>
+              <a:ext cx="161574" cy="80101"/>
             </a:xfrm>
             <a:prstGeom prst="rect">
               <a:avLst/>
@@ -5095,7 +5095,7 @@
                   <a:latin typeface="Helvetica"/>
                   <a:cs typeface="Helvetica"/>
                 </a:rPr>
-                <a:t>0.6</a:t>
+                <a:t>-40</a:t>
               </a:r>
             </a:p>
           </p:txBody>
@@ -5108,8 +5108,8 @@
           </p:nvSpPr>
           <p:spPr>
             <a:xfrm>
-              <a:off x="3887213" y="5785772"/>
-              <a:ext cx="155356" cy="80101"/>
+              <a:off x="3884104" y="5785772"/>
+              <a:ext cx="161574" cy="80101"/>
             </a:xfrm>
             <a:prstGeom prst="rect">
               <a:avLst/>
@@ -5141,7 +5141,7 @@
                   <a:latin typeface="Helvetica"/>
                   <a:cs typeface="Helvetica"/>
                 </a:rPr>
-                <a:t>0.8</a:t>
+                <a:t>-20</a:t>
               </a:r>
             </a:p>
           </p:txBody>
@@ -5154,8 +5154,8 @@
           </p:nvSpPr>
           <p:spPr>
             <a:xfrm>
-              <a:off x="5619136" y="5785772"/>
-              <a:ext cx="155356" cy="80101"/>
+              <a:off x="5665725" y="5785772"/>
+              <a:ext cx="62179" cy="80101"/>
             </a:xfrm>
             <a:prstGeom prst="rect">
               <a:avLst/>
@@ -5187,7 +5187,7 @@
                   <a:latin typeface="Helvetica"/>
                   <a:cs typeface="Helvetica"/>
                 </a:rPr>
-                <a:t>1.0</a:t>
+                <a:t>0</a:t>
               </a:r>
             </a:p>
           </p:txBody>
@@ -5200,8 +5200,8 @@
           </p:nvSpPr>
           <p:spPr>
             <a:xfrm>
-              <a:off x="7351060" y="5785772"/>
-              <a:ext cx="155356" cy="80101"/>
+              <a:off x="7366559" y="5785772"/>
+              <a:ext cx="124358" cy="80101"/>
             </a:xfrm>
             <a:prstGeom prst="rect">
               <a:avLst/>
@@ -5233,7 +5233,7 @@
                   <a:latin typeface="Helvetica"/>
                   <a:cs typeface="Helvetica"/>
                 </a:rPr>
-                <a:t>1.2</a:t>
+                <a:t>20</a:t>
               </a:r>
             </a:p>
           </p:txBody>
@@ -5246,8 +5246,8 @@
           </p:nvSpPr>
           <p:spPr>
             <a:xfrm>
-              <a:off x="2691419" y="5925448"/>
-              <a:ext cx="4051889" cy="100218"/>
+              <a:off x="1561815" y="5925448"/>
+              <a:ext cx="6311097" cy="100218"/>
             </a:xfrm>
             <a:prstGeom prst="rect">
               <a:avLst/>
@@ -5279,7 +5279,7 @@
                   <a:latin typeface="Helvetica"/>
                   <a:cs typeface="Helvetica"/>
                 </a:rPr>
-                <a:t>Sensitivity eGFR Ratio (CKD-EPI 2012 CysC / CKD-EPI 2021 Cr)</a:t>
+                <a:t>Sensitivity eGFR Difference (%): 100 × (CKD-EPI 2012 CysC − CKD-EPI 2021 Cr) / CKD-EPI 2021 Cr</a:t>
               </a:r>
             </a:p>
           </p:txBody>
@@ -5339,7 +5339,7 @@
           <p:spPr>
             <a:xfrm>
               <a:off x="817517" y="1896563"/>
-              <a:ext cx="6833128" cy="82021"/>
+              <a:ext cx="6959864" cy="82021"/>
             </a:xfrm>
             <a:prstGeom prst="rect">
               <a:avLst/>
@@ -5371,7 +5371,7 @@
                   <a:latin typeface="Helvetica"/>
                   <a:cs typeface="Helvetica"/>
                 </a:rPr>
-                <a:t>subHR per 0.1 ratio decline: 1.20 (1.02-1.41), p_Bonf = 0.174 (n = 6)  |  per IQR decline (Δ = 0.28): 1.66 (1.05-2.61)  |  IQR: [0.70, 0.98]</a:t>
+                <a:t>subHR per 10 % decline: 1.20 (1.02-1.41), p_Bonf = 0.174 (n = 6)  |  per IQR decline (Δ = 28.0 %): 1.66 (1.05-2.61)  |  IQR: [-30.0, -2.0] %</a:t>
               </a:r>
             </a:p>
           </p:txBody>

--- a/docs/pptx/carbo/jx-carbo-linsubhr-sens-aki2.pptx
+++ b/docs/pptx/carbo/jx-carbo-linsubhr-sens-aki2.pptx
@@ -2265,34 +2265,26 @@
         </p:sp>
         <p:sp>
           <p:nvSpPr>
-            <p:cNvPr id="4" name="pl4"/>
+            <p:cNvPr id="4" name="rc4"/>
             <p:cNvSpPr/>
             <p:nvPr/>
           </p:nvSpPr>
           <p:spPr>
             <a:xfrm>
-              <a:off x="817517" y="5142518"/>
-              <a:ext cx="7799693" cy="0"/>
+              <a:off x="457200" y="1600200"/>
+              <a:ext cx="8229600" cy="4525962"/>
             </a:xfrm>
-            <a:custGeom>
+            <a:prstGeom prst="rect">
               <a:avLst/>
-              <a:pathLst>
-                <a:path w="7799693" h="0">
-                  <a:moveTo>
-                    <a:pt x="0" y="0"/>
-                  </a:moveTo>
-                  <a:lnTo>
-                    <a:pt x="7799693" y="0"/>
-                  </a:lnTo>
-                  <a:lnTo>
-                    <a:pt x="7799693" y="0"/>
-                  </a:lnTo>
-                </a:path>
-              </a:pathLst>
-            </a:custGeom>
-            <a:ln w="6775" cap="flat">
+            </a:prstGeom>
+            <a:solidFill>
+              <a:srgbClr val="FFFFFF">
+                <a:alpha val="100000"/>
+              </a:srgbClr>
+            </a:solidFill>
+            <a:ln w="13550" cap="rnd">
               <a:solidFill>
-                <a:srgbClr val="EBEBEB">
+                <a:srgbClr val="FFFFFF">
                   <a:alpha val="100000"/>
                 </a:srgbClr>
               </a:solidFill>
@@ -2314,21 +2306,21 @@
           </p:nvSpPr>
           <p:spPr>
             <a:xfrm>
-              <a:off x="817517" y="4313054"/>
-              <a:ext cx="7799693" cy="0"/>
+              <a:off x="887106" y="3250627"/>
+              <a:ext cx="7660515" cy="0"/>
             </a:xfrm>
             <a:custGeom>
               <a:avLst/>
               <a:pathLst>
-                <a:path w="7799693" h="0">
+                <a:path w="7660515" h="0">
                   <a:moveTo>
                     <a:pt x="0" y="0"/>
                   </a:moveTo>
                   <a:lnTo>
-                    <a:pt x="7799693" y="0"/>
-                  </a:lnTo>
-                  <a:lnTo>
-                    <a:pt x="7799693" y="0"/>
+                    <a:pt x="7660515" y="0"/>
+                  </a:lnTo>
+                  <a:lnTo>
+                    <a:pt x="7660515" y="0"/>
                   </a:lnTo>
                 </a:path>
               </a:pathLst>
@@ -2357,21 +2349,21 @@
           </p:nvSpPr>
           <p:spPr>
             <a:xfrm>
-              <a:off x="817517" y="3483591"/>
-              <a:ext cx="7799693" cy="0"/>
+              <a:off x="887106" y="2951293"/>
+              <a:ext cx="7660515" cy="0"/>
             </a:xfrm>
             <a:custGeom>
               <a:avLst/>
               <a:pathLst>
-                <a:path w="7799693" h="0">
+                <a:path w="7660515" h="0">
                   <a:moveTo>
                     <a:pt x="0" y="0"/>
                   </a:moveTo>
                   <a:lnTo>
-                    <a:pt x="7799693" y="0"/>
-                  </a:lnTo>
-                  <a:lnTo>
-                    <a:pt x="7799693" y="0"/>
+                    <a:pt x="7660515" y="0"/>
+                  </a:lnTo>
+                  <a:lnTo>
+                    <a:pt x="7660515" y="0"/>
                   </a:lnTo>
                 </a:path>
               </a:pathLst>
@@ -2400,21 +2392,21 @@
           </p:nvSpPr>
           <p:spPr>
             <a:xfrm>
-              <a:off x="817517" y="2654127"/>
-              <a:ext cx="7799693" cy="0"/>
+              <a:off x="887106" y="2651959"/>
+              <a:ext cx="7660515" cy="0"/>
             </a:xfrm>
             <a:custGeom>
               <a:avLst/>
               <a:pathLst>
-                <a:path w="7799693" h="0">
+                <a:path w="7660515" h="0">
                   <a:moveTo>
                     <a:pt x="0" y="0"/>
                   </a:moveTo>
                   <a:lnTo>
-                    <a:pt x="7799693" y="0"/>
-                  </a:lnTo>
-                  <a:lnTo>
-                    <a:pt x="7799693" y="0"/>
+                    <a:pt x="7660515" y="0"/>
+                  </a:lnTo>
+                  <a:lnTo>
+                    <a:pt x="7660515" y="0"/>
                   </a:lnTo>
                 </a:path>
               </a:pathLst>
@@ -2443,21 +2435,21 @@
           </p:nvSpPr>
           <p:spPr>
             <a:xfrm>
-              <a:off x="1367006" y="2073503"/>
-              <a:ext cx="0" cy="3649639"/>
+              <a:off x="887106" y="2352625"/>
+              <a:ext cx="7660515" cy="0"/>
             </a:xfrm>
             <a:custGeom>
               <a:avLst/>
               <a:pathLst>
-                <a:path w="0" h="3649639">
+                <a:path w="7660515" h="0">
                   <a:moveTo>
-                    <a:pt x="0" y="3649639"/>
+                    <a:pt x="0" y="0"/>
                   </a:moveTo>
                   <a:lnTo>
-                    <a:pt x="0" y="0"/>
-                  </a:lnTo>
-                  <a:lnTo>
-                    <a:pt x="0" y="0"/>
+                    <a:pt x="7660515" y="0"/>
+                  </a:lnTo>
+                  <a:lnTo>
+                    <a:pt x="7660515" y="0"/>
                   </a:lnTo>
                 </a:path>
               </a:pathLst>
@@ -2486,15 +2478,15 @@
           </p:nvSpPr>
           <p:spPr>
             <a:xfrm>
-              <a:off x="3098929" y="2073503"/>
-              <a:ext cx="0" cy="3649639"/>
+              <a:off x="1426790" y="2143092"/>
+              <a:ext cx="0" cy="1317069"/>
             </a:xfrm>
             <a:custGeom>
               <a:avLst/>
               <a:pathLst>
-                <a:path w="0" h="3649639">
+                <a:path w="0" h="1317069">
                   <a:moveTo>
-                    <a:pt x="0" y="3649639"/>
+                    <a:pt x="0" y="1317069"/>
                   </a:moveTo>
                   <a:lnTo>
                     <a:pt x="0" y="0"/>
@@ -2529,15 +2521,15 @@
           </p:nvSpPr>
           <p:spPr>
             <a:xfrm>
-              <a:off x="4830853" y="2073503"/>
-              <a:ext cx="0" cy="3649639"/>
+              <a:off x="3127809" y="2143092"/>
+              <a:ext cx="0" cy="1317069"/>
             </a:xfrm>
             <a:custGeom>
               <a:avLst/>
               <a:pathLst>
-                <a:path w="0" h="3649639">
+                <a:path w="0" h="1317069">
                   <a:moveTo>
-                    <a:pt x="0" y="3649639"/>
+                    <a:pt x="0" y="1317069"/>
                   </a:moveTo>
                   <a:lnTo>
                     <a:pt x="0" y="0"/>
@@ -2572,15 +2564,15 @@
           </p:nvSpPr>
           <p:spPr>
             <a:xfrm>
-              <a:off x="6562776" y="2073503"/>
-              <a:ext cx="0" cy="3649639"/>
+              <a:off x="4828828" y="2143092"/>
+              <a:ext cx="0" cy="1317069"/>
             </a:xfrm>
             <a:custGeom>
               <a:avLst/>
               <a:pathLst>
-                <a:path w="0" h="3649639">
+                <a:path w="0" h="1317069">
                   <a:moveTo>
-                    <a:pt x="0" y="3649639"/>
+                    <a:pt x="0" y="1317069"/>
                   </a:moveTo>
                   <a:lnTo>
                     <a:pt x="0" y="0"/>
@@ -2615,15 +2607,15 @@
           </p:nvSpPr>
           <p:spPr>
             <a:xfrm>
-              <a:off x="8294700" y="2073503"/>
-              <a:ext cx="0" cy="3649639"/>
+              <a:off x="6529847" y="2143092"/>
+              <a:ext cx="0" cy="1317069"/>
             </a:xfrm>
             <a:custGeom>
               <a:avLst/>
               <a:pathLst>
-                <a:path w="0" h="3649639">
+                <a:path w="0" h="1317069">
                   <a:moveTo>
-                    <a:pt x="0" y="3649639"/>
+                    <a:pt x="0" y="1317069"/>
                   </a:moveTo>
                   <a:lnTo>
                     <a:pt x="0" y="0"/>
@@ -2658,26 +2650,26 @@
           </p:nvSpPr>
           <p:spPr>
             <a:xfrm>
-              <a:off x="817517" y="5557249"/>
-              <a:ext cx="7799693" cy="0"/>
+              <a:off x="8230866" y="2143092"/>
+              <a:ext cx="0" cy="1317069"/>
             </a:xfrm>
             <a:custGeom>
               <a:avLst/>
               <a:pathLst>
-                <a:path w="7799693" h="0">
+                <a:path w="0" h="1317069">
                   <a:moveTo>
+                    <a:pt x="0" y="1317069"/>
+                  </a:moveTo>
+                  <a:lnTo>
                     <a:pt x="0" y="0"/>
-                  </a:moveTo>
-                  <a:lnTo>
-                    <a:pt x="7799693" y="0"/>
-                  </a:lnTo>
-                  <a:lnTo>
-                    <a:pt x="7799693" y="0"/>
+                  </a:lnTo>
+                  <a:lnTo>
+                    <a:pt x="0" y="0"/>
                   </a:lnTo>
                 </a:path>
               </a:pathLst>
             </a:custGeom>
-            <a:ln w="13550" cap="flat">
+            <a:ln w="6775" cap="flat">
               <a:solidFill>
                 <a:srgbClr val="EBEBEB">
                   <a:alpha val="100000"/>
@@ -2701,21 +2693,21 @@
           </p:nvSpPr>
           <p:spPr>
             <a:xfrm>
-              <a:off x="817517" y="4727786"/>
-              <a:ext cx="7799693" cy="0"/>
+              <a:off x="887106" y="3400294"/>
+              <a:ext cx="7660515" cy="0"/>
             </a:xfrm>
             <a:custGeom>
               <a:avLst/>
               <a:pathLst>
-                <a:path w="7799693" h="0">
+                <a:path w="7660515" h="0">
                   <a:moveTo>
                     <a:pt x="0" y="0"/>
                   </a:moveTo>
                   <a:lnTo>
-                    <a:pt x="7799693" y="0"/>
-                  </a:lnTo>
-                  <a:lnTo>
-                    <a:pt x="7799693" y="0"/>
+                    <a:pt x="7660515" y="0"/>
+                  </a:lnTo>
+                  <a:lnTo>
+                    <a:pt x="7660515" y="0"/>
                   </a:lnTo>
                 </a:path>
               </a:pathLst>
@@ -2744,21 +2736,21 @@
           </p:nvSpPr>
           <p:spPr>
             <a:xfrm>
-              <a:off x="817517" y="3898322"/>
-              <a:ext cx="7799693" cy="0"/>
+              <a:off x="887106" y="3100960"/>
+              <a:ext cx="7660515" cy="0"/>
             </a:xfrm>
             <a:custGeom>
               <a:avLst/>
               <a:pathLst>
-                <a:path w="7799693" h="0">
+                <a:path w="7660515" h="0">
                   <a:moveTo>
                     <a:pt x="0" y="0"/>
                   </a:moveTo>
                   <a:lnTo>
-                    <a:pt x="7799693" y="0"/>
-                  </a:lnTo>
-                  <a:lnTo>
-                    <a:pt x="7799693" y="0"/>
+                    <a:pt x="7660515" y="0"/>
+                  </a:lnTo>
+                  <a:lnTo>
+                    <a:pt x="7660515" y="0"/>
                   </a:lnTo>
                 </a:path>
               </a:pathLst>
@@ -2787,21 +2779,21 @@
           </p:nvSpPr>
           <p:spPr>
             <a:xfrm>
-              <a:off x="817517" y="3068859"/>
-              <a:ext cx="7799693" cy="0"/>
+              <a:off x="887106" y="2801626"/>
+              <a:ext cx="7660515" cy="0"/>
             </a:xfrm>
             <a:custGeom>
               <a:avLst/>
               <a:pathLst>
-                <a:path w="7799693" h="0">
+                <a:path w="7660515" h="0">
                   <a:moveTo>
                     <a:pt x="0" y="0"/>
                   </a:moveTo>
                   <a:lnTo>
-                    <a:pt x="7799693" y="0"/>
-                  </a:lnTo>
-                  <a:lnTo>
-                    <a:pt x="7799693" y="0"/>
+                    <a:pt x="7660515" y="0"/>
+                  </a:lnTo>
+                  <a:lnTo>
+                    <a:pt x="7660515" y="0"/>
                   </a:lnTo>
                 </a:path>
               </a:pathLst>
@@ -2830,21 +2822,21 @@
           </p:nvSpPr>
           <p:spPr>
             <a:xfrm>
-              <a:off x="817517" y="2239395"/>
-              <a:ext cx="7799693" cy="0"/>
+              <a:off x="887106" y="2502292"/>
+              <a:ext cx="7660515" cy="0"/>
             </a:xfrm>
             <a:custGeom>
               <a:avLst/>
               <a:pathLst>
-                <a:path w="7799693" h="0">
+                <a:path w="7660515" h="0">
                   <a:moveTo>
                     <a:pt x="0" y="0"/>
                   </a:moveTo>
                   <a:lnTo>
-                    <a:pt x="7799693" y="0"/>
-                  </a:lnTo>
-                  <a:lnTo>
-                    <a:pt x="7799693" y="0"/>
+                    <a:pt x="7660515" y="0"/>
+                  </a:lnTo>
+                  <a:lnTo>
+                    <a:pt x="7660515" y="0"/>
                   </a:lnTo>
                 </a:path>
               </a:pathLst>
@@ -2873,21 +2865,21 @@
           </p:nvSpPr>
           <p:spPr>
             <a:xfrm>
-              <a:off x="2232968" y="2073503"/>
-              <a:ext cx="0" cy="3649639"/>
+              <a:off x="887106" y="2202958"/>
+              <a:ext cx="7660515" cy="0"/>
             </a:xfrm>
             <a:custGeom>
               <a:avLst/>
               <a:pathLst>
-                <a:path w="0" h="3649639">
+                <a:path w="7660515" h="0">
                   <a:moveTo>
-                    <a:pt x="0" y="3649639"/>
+                    <a:pt x="0" y="0"/>
                   </a:moveTo>
                   <a:lnTo>
-                    <a:pt x="0" y="0"/>
-                  </a:lnTo>
-                  <a:lnTo>
-                    <a:pt x="0" y="0"/>
+                    <a:pt x="7660515" y="0"/>
+                  </a:lnTo>
+                  <a:lnTo>
+                    <a:pt x="7660515" y="0"/>
                   </a:lnTo>
                 </a:path>
               </a:pathLst>
@@ -2916,15 +2908,15 @@
           </p:nvSpPr>
           <p:spPr>
             <a:xfrm>
-              <a:off x="3964891" y="2073503"/>
-              <a:ext cx="0" cy="3649639"/>
+              <a:off x="2277299" y="2143092"/>
+              <a:ext cx="0" cy="1317069"/>
             </a:xfrm>
             <a:custGeom>
               <a:avLst/>
               <a:pathLst>
-                <a:path w="0" h="3649639">
+                <a:path w="0" h="1317069">
                   <a:moveTo>
-                    <a:pt x="0" y="3649639"/>
+                    <a:pt x="0" y="1317069"/>
                   </a:moveTo>
                   <a:lnTo>
                     <a:pt x="0" y="0"/>
@@ -2959,15 +2951,15 @@
           </p:nvSpPr>
           <p:spPr>
             <a:xfrm>
-              <a:off x="5696815" y="2073503"/>
-              <a:ext cx="0" cy="3649639"/>
+              <a:off x="3978318" y="2143092"/>
+              <a:ext cx="0" cy="1317069"/>
             </a:xfrm>
             <a:custGeom>
               <a:avLst/>
               <a:pathLst>
-                <a:path w="0" h="3649639">
+                <a:path w="0" h="1317069">
                   <a:moveTo>
-                    <a:pt x="0" y="3649639"/>
+                    <a:pt x="0" y="1317069"/>
                   </a:moveTo>
                   <a:lnTo>
                     <a:pt x="0" y="0"/>
@@ -3002,15 +2994,15 @@
           </p:nvSpPr>
           <p:spPr>
             <a:xfrm>
-              <a:off x="7428738" y="2073503"/>
-              <a:ext cx="0" cy="3649639"/>
+              <a:off x="5679337" y="2143092"/>
+              <a:ext cx="0" cy="1317069"/>
             </a:xfrm>
             <a:custGeom>
               <a:avLst/>
               <a:pathLst>
-                <a:path w="0" h="3649639">
+                <a:path w="0" h="1317069">
                   <a:moveTo>
-                    <a:pt x="0" y="3649639"/>
+                    <a:pt x="0" y="1317069"/>
                   </a:moveTo>
                   <a:lnTo>
                     <a:pt x="0" y="0"/>
@@ -3039,618 +3031,661 @@
         </p:sp>
         <p:sp>
           <p:nvSpPr>
-            <p:cNvPr id="22" name="pg22"/>
+            <p:cNvPr id="22" name="pl22"/>
             <p:cNvSpPr/>
             <p:nvPr/>
           </p:nvSpPr>
           <p:spPr>
             <a:xfrm>
-              <a:off x="1172049" y="2713362"/>
-              <a:ext cx="7090630" cy="2672115"/>
+              <a:off x="7380356" y="2143092"/>
+              <a:ext cx="0" cy="1317069"/>
             </a:xfrm>
             <a:custGeom>
               <a:avLst/>
               <a:pathLst>
-                <a:path w="7090630" h="2672115">
+                <a:path w="0" h="1317069">
+                  <a:moveTo>
+                    <a:pt x="0" y="1317069"/>
+                  </a:moveTo>
+                  <a:lnTo>
+                    <a:pt x="0" y="0"/>
+                  </a:lnTo>
+                  <a:lnTo>
+                    <a:pt x="0" y="0"/>
+                  </a:lnTo>
+                </a:path>
+              </a:pathLst>
+            </a:custGeom>
+            <a:ln w="13550" cap="flat">
+              <a:solidFill>
+                <a:srgbClr val="EBEBEB">
+                  <a:alpha val="100000"/>
+                </a:srgbClr>
+              </a:solidFill>
+              <a:prstDash val="solid"/>
+              <a:round/>
+            </a:ln>
+          </p:spPr>
+          <p:txBody>
+            <a:bodyPr/>
+            <a:lstStyle/>
+            <a:p/>
+          </p:txBody>
+        </p:sp>
+        <p:sp>
+          <p:nvSpPr>
+            <p:cNvPr id="23" name="pg23"/>
+            <p:cNvSpPr/>
+            <p:nvPr/>
+          </p:nvSpPr>
+          <p:spPr>
+            <a:xfrm>
+              <a:off x="1235312" y="2374002"/>
+              <a:ext cx="6964104" cy="964303"/>
+            </a:xfrm>
+            <a:custGeom>
+              <a:avLst/>
+              <a:pathLst>
+                <a:path w="6964104" h="964303">
                   <a:moveTo>
                     <a:pt x="0" y="0"/>
                   </a:moveTo>
                   <a:lnTo>
-                    <a:pt x="71622" y="79495"/>
-                  </a:lnTo>
-                  <a:lnTo>
-                    <a:pt x="143245" y="156768"/>
-                  </a:lnTo>
-                  <a:lnTo>
-                    <a:pt x="214867" y="231881"/>
-                  </a:lnTo>
-                  <a:lnTo>
-                    <a:pt x="286490" y="304894"/>
-                  </a:lnTo>
-                  <a:lnTo>
-                    <a:pt x="358112" y="375867"/>
-                  </a:lnTo>
-                  <a:lnTo>
-                    <a:pt x="429735" y="444856"/>
-                  </a:lnTo>
-                  <a:lnTo>
-                    <a:pt x="501357" y="511916"/>
-                  </a:lnTo>
-                  <a:lnTo>
-                    <a:pt x="572980" y="577101"/>
-                  </a:lnTo>
-                  <a:lnTo>
-                    <a:pt x="644602" y="640465"/>
-                  </a:lnTo>
-                  <a:lnTo>
-                    <a:pt x="716225" y="702057"/>
-                  </a:lnTo>
-                  <a:lnTo>
-                    <a:pt x="787847" y="761928"/>
-                  </a:lnTo>
-                  <a:lnTo>
-                    <a:pt x="859470" y="820125"/>
-                  </a:lnTo>
-                  <a:lnTo>
-                    <a:pt x="931092" y="876695"/>
-                  </a:lnTo>
-                  <a:lnTo>
-                    <a:pt x="1002715" y="931684"/>
-                  </a:lnTo>
-                  <a:lnTo>
-                    <a:pt x="1074337" y="985136"/>
-                  </a:lnTo>
-                  <a:lnTo>
-                    <a:pt x="1145960" y="1037094"/>
-                  </a:lnTo>
-                  <a:lnTo>
-                    <a:pt x="1217582" y="1087599"/>
-                  </a:lnTo>
-                  <a:lnTo>
-                    <a:pt x="1289205" y="1136692"/>
-                  </a:lnTo>
-                  <a:lnTo>
-                    <a:pt x="1360827" y="1184414"/>
-                  </a:lnTo>
-                  <a:lnTo>
-                    <a:pt x="1432450" y="1230801"/>
-                  </a:lnTo>
-                  <a:lnTo>
-                    <a:pt x="1504073" y="1275892"/>
-                  </a:lnTo>
-                  <a:lnTo>
-                    <a:pt x="1575695" y="1319722"/>
-                  </a:lnTo>
-                  <a:lnTo>
-                    <a:pt x="1647318" y="1362327"/>
-                  </a:lnTo>
-                  <a:lnTo>
-                    <a:pt x="1718940" y="1403741"/>
-                  </a:lnTo>
-                  <a:lnTo>
-                    <a:pt x="1790563" y="1443997"/>
-                  </a:lnTo>
-                  <a:lnTo>
-                    <a:pt x="1862185" y="1483128"/>
-                  </a:lnTo>
-                  <a:lnTo>
-                    <a:pt x="1933808" y="1521166"/>
-                  </a:lnTo>
-                  <a:lnTo>
-                    <a:pt x="2005430" y="1558140"/>
-                  </a:lnTo>
-                  <a:lnTo>
-                    <a:pt x="2077053" y="1594080"/>
-                  </a:lnTo>
-                  <a:lnTo>
-                    <a:pt x="2148675" y="1629016"/>
-                  </a:lnTo>
-                  <a:lnTo>
-                    <a:pt x="2220298" y="1662976"/>
-                  </a:lnTo>
-                  <a:lnTo>
-                    <a:pt x="2291920" y="1695986"/>
-                  </a:lnTo>
-                  <a:lnTo>
-                    <a:pt x="2363543" y="1728073"/>
-                  </a:lnTo>
-                  <a:lnTo>
-                    <a:pt x="2435165" y="1759263"/>
-                  </a:lnTo>
-                  <a:lnTo>
-                    <a:pt x="2506788" y="1789582"/>
-                  </a:lnTo>
-                  <a:lnTo>
-                    <a:pt x="2578410" y="1819053"/>
-                  </a:lnTo>
-                  <a:lnTo>
-                    <a:pt x="2650033" y="1847700"/>
-                  </a:lnTo>
-                  <a:lnTo>
-                    <a:pt x="2721655" y="1875546"/>
-                  </a:lnTo>
-                  <a:lnTo>
-                    <a:pt x="2793278" y="1902614"/>
-                  </a:lnTo>
-                  <a:lnTo>
-                    <a:pt x="2864901" y="1928926"/>
-                  </a:lnTo>
-                  <a:lnTo>
-                    <a:pt x="2936523" y="1954502"/>
-                  </a:lnTo>
-                  <a:lnTo>
-                    <a:pt x="3008146" y="1979363"/>
-                  </a:lnTo>
-                  <a:lnTo>
-                    <a:pt x="3079768" y="2003529"/>
-                  </a:lnTo>
-                  <a:lnTo>
-                    <a:pt x="3151391" y="2015110"/>
-                  </a:lnTo>
-                  <a:lnTo>
-                    <a:pt x="3223013" y="2016380"/>
-                  </a:lnTo>
-                  <a:lnTo>
-                    <a:pt x="3294636" y="2017649"/>
-                  </a:lnTo>
-                  <a:lnTo>
-                    <a:pt x="3366258" y="2018916"/>
-                  </a:lnTo>
-                  <a:lnTo>
-                    <a:pt x="3437881" y="2020181"/>
-                  </a:lnTo>
-                  <a:lnTo>
-                    <a:pt x="3509503" y="2021444"/>
-                  </a:lnTo>
-                  <a:lnTo>
-                    <a:pt x="3581126" y="2022705"/>
-                  </a:lnTo>
-                  <a:lnTo>
-                    <a:pt x="3652748" y="2023964"/>
-                  </a:lnTo>
-                  <a:lnTo>
-                    <a:pt x="3724371" y="2025221"/>
-                  </a:lnTo>
-                  <a:lnTo>
-                    <a:pt x="3795993" y="2026476"/>
-                  </a:lnTo>
-                  <a:lnTo>
-                    <a:pt x="3867616" y="2027730"/>
-                  </a:lnTo>
-                  <a:lnTo>
-                    <a:pt x="3939238" y="2028981"/>
-                  </a:lnTo>
-                  <a:lnTo>
-                    <a:pt x="4010861" y="2030230"/>
-                  </a:lnTo>
-                  <a:lnTo>
-                    <a:pt x="4082483" y="2031478"/>
-                  </a:lnTo>
-                  <a:lnTo>
-                    <a:pt x="4154106" y="2032724"/>
-                  </a:lnTo>
-                  <a:lnTo>
-                    <a:pt x="4225729" y="2033967"/>
-                  </a:lnTo>
-                  <a:lnTo>
-                    <a:pt x="4297351" y="2035209"/>
-                  </a:lnTo>
-                  <a:lnTo>
-                    <a:pt x="4368974" y="2036449"/>
-                  </a:lnTo>
-                  <a:lnTo>
-                    <a:pt x="4440596" y="2037687"/>
-                  </a:lnTo>
-                  <a:lnTo>
-                    <a:pt x="4512219" y="2038923"/>
-                  </a:lnTo>
-                  <a:lnTo>
-                    <a:pt x="4583841" y="2040158"/>
-                  </a:lnTo>
-                  <a:lnTo>
-                    <a:pt x="4655464" y="2041390"/>
-                  </a:lnTo>
-                  <a:lnTo>
-                    <a:pt x="4727086" y="2042620"/>
-                  </a:lnTo>
-                  <a:lnTo>
-                    <a:pt x="4798709" y="2043849"/>
-                  </a:lnTo>
-                  <a:lnTo>
-                    <a:pt x="4870331" y="2045076"/>
-                  </a:lnTo>
-                  <a:lnTo>
-                    <a:pt x="4941954" y="2046300"/>
-                  </a:lnTo>
-                  <a:lnTo>
-                    <a:pt x="5013576" y="2047523"/>
-                  </a:lnTo>
-                  <a:lnTo>
-                    <a:pt x="5085199" y="2048744"/>
-                  </a:lnTo>
-                  <a:lnTo>
-                    <a:pt x="5156821" y="2049963"/>
-                  </a:lnTo>
-                  <a:lnTo>
-                    <a:pt x="5228444" y="2051181"/>
-                  </a:lnTo>
-                  <a:lnTo>
-                    <a:pt x="5300066" y="2052396"/>
-                  </a:lnTo>
-                  <a:lnTo>
-                    <a:pt x="5371689" y="2053610"/>
-                  </a:lnTo>
-                  <a:lnTo>
-                    <a:pt x="5443311" y="2054821"/>
-                  </a:lnTo>
-                  <a:lnTo>
-                    <a:pt x="5514934" y="2056031"/>
-                  </a:lnTo>
-                  <a:lnTo>
-                    <a:pt x="5586557" y="2057239"/>
-                  </a:lnTo>
-                  <a:lnTo>
-                    <a:pt x="5658179" y="2058445"/>
-                  </a:lnTo>
-                  <a:lnTo>
-                    <a:pt x="5729802" y="2059650"/>
-                  </a:lnTo>
-                  <a:lnTo>
-                    <a:pt x="5801424" y="2060852"/>
-                  </a:lnTo>
-                  <a:lnTo>
-                    <a:pt x="5873047" y="2062053"/>
-                  </a:lnTo>
-                  <a:lnTo>
-                    <a:pt x="5944669" y="2063251"/>
-                  </a:lnTo>
-                  <a:lnTo>
-                    <a:pt x="6016292" y="2064448"/>
-                  </a:lnTo>
-                  <a:lnTo>
-                    <a:pt x="6087914" y="2065643"/>
-                  </a:lnTo>
-                  <a:lnTo>
-                    <a:pt x="6159537" y="2066837"/>
-                  </a:lnTo>
-                  <a:lnTo>
-                    <a:pt x="6231159" y="2068028"/>
-                  </a:lnTo>
-                  <a:lnTo>
-                    <a:pt x="6302782" y="2069218"/>
-                  </a:lnTo>
-                  <a:lnTo>
-                    <a:pt x="6374404" y="2070406"/>
-                  </a:lnTo>
-                  <a:lnTo>
-                    <a:pt x="6446027" y="2071591"/>
-                  </a:lnTo>
-                  <a:lnTo>
-                    <a:pt x="6517649" y="2072776"/>
-                  </a:lnTo>
-                  <a:lnTo>
-                    <a:pt x="6589272" y="2073958"/>
-                  </a:lnTo>
-                  <a:lnTo>
-                    <a:pt x="6660894" y="2075138"/>
-                  </a:lnTo>
-                  <a:lnTo>
-                    <a:pt x="6732517" y="2076317"/>
-                  </a:lnTo>
-                  <a:lnTo>
-                    <a:pt x="6804139" y="2077494"/>
-                  </a:lnTo>
-                  <a:lnTo>
-                    <a:pt x="6875762" y="2078669"/>
-                  </a:lnTo>
-                  <a:lnTo>
-                    <a:pt x="6947385" y="2079842"/>
-                  </a:lnTo>
-                  <a:lnTo>
-                    <a:pt x="7019007" y="2081014"/>
-                  </a:lnTo>
-                  <a:lnTo>
-                    <a:pt x="7090630" y="2082184"/>
-                  </a:lnTo>
-                  <a:lnTo>
-                    <a:pt x="7090630" y="2672115"/>
-                  </a:lnTo>
-                  <a:lnTo>
-                    <a:pt x="7019007" y="2667176"/>
-                  </a:lnTo>
-                  <a:lnTo>
-                    <a:pt x="6947385" y="2662094"/>
-                  </a:lnTo>
-                  <a:lnTo>
-                    <a:pt x="6875762" y="2656866"/>
-                  </a:lnTo>
-                  <a:lnTo>
-                    <a:pt x="6804139" y="2651488"/>
-                  </a:lnTo>
-                  <a:lnTo>
-                    <a:pt x="6732517" y="2645955"/>
-                  </a:lnTo>
-                  <a:lnTo>
-                    <a:pt x="6660894" y="2640263"/>
-                  </a:lnTo>
-                  <a:lnTo>
-                    <a:pt x="6589272" y="2634408"/>
-                  </a:lnTo>
-                  <a:lnTo>
-                    <a:pt x="6517649" y="2628384"/>
-                  </a:lnTo>
-                  <a:lnTo>
-                    <a:pt x="6446027" y="2622187"/>
-                  </a:lnTo>
-                  <a:lnTo>
-                    <a:pt x="6374404" y="2615811"/>
-                  </a:lnTo>
-                  <a:lnTo>
-                    <a:pt x="6302782" y="2609253"/>
-                  </a:lnTo>
-                  <a:lnTo>
-                    <a:pt x="6231159" y="2602505"/>
-                  </a:lnTo>
-                  <a:lnTo>
-                    <a:pt x="6159537" y="2595564"/>
-                  </a:lnTo>
-                  <a:lnTo>
-                    <a:pt x="6087914" y="2588423"/>
-                  </a:lnTo>
-                  <a:lnTo>
-                    <a:pt x="6016292" y="2581077"/>
-                  </a:lnTo>
-                  <a:lnTo>
-                    <a:pt x="5944669" y="2573519"/>
-                  </a:lnTo>
-                  <a:lnTo>
-                    <a:pt x="5873047" y="2565744"/>
-                  </a:lnTo>
-                  <a:lnTo>
-                    <a:pt x="5801424" y="2557746"/>
-                  </a:lnTo>
-                  <a:lnTo>
-                    <a:pt x="5729802" y="2549517"/>
-                  </a:lnTo>
-                  <a:lnTo>
-                    <a:pt x="5658179" y="2541052"/>
-                  </a:lnTo>
-                  <a:lnTo>
-                    <a:pt x="5586557" y="2532343"/>
-                  </a:lnTo>
-                  <a:lnTo>
-                    <a:pt x="5514934" y="2523384"/>
-                  </a:lnTo>
-                  <a:lnTo>
-                    <a:pt x="5443311" y="2514168"/>
-                  </a:lnTo>
-                  <a:lnTo>
-                    <a:pt x="5371689" y="2504686"/>
-                  </a:lnTo>
-                  <a:lnTo>
-                    <a:pt x="5300066" y="2494932"/>
-                  </a:lnTo>
-                  <a:lnTo>
-                    <a:pt x="5228444" y="2484897"/>
-                  </a:lnTo>
-                  <a:lnTo>
-                    <a:pt x="5156821" y="2474574"/>
-                  </a:lnTo>
-                  <a:lnTo>
-                    <a:pt x="5085199" y="2463953"/>
-                  </a:lnTo>
-                  <a:lnTo>
-                    <a:pt x="5013576" y="2453028"/>
-                  </a:lnTo>
-                  <a:lnTo>
-                    <a:pt x="4941954" y="2441788"/>
-                  </a:lnTo>
-                  <a:lnTo>
-                    <a:pt x="4870331" y="2430225"/>
-                  </a:lnTo>
-                  <a:lnTo>
-                    <a:pt x="4798709" y="2418329"/>
-                  </a:lnTo>
-                  <a:lnTo>
-                    <a:pt x="4727086" y="2406091"/>
-                  </a:lnTo>
-                  <a:lnTo>
-                    <a:pt x="4655464" y="2393502"/>
-                  </a:lnTo>
-                  <a:lnTo>
-                    <a:pt x="4583841" y="2380550"/>
-                  </a:lnTo>
-                  <a:lnTo>
-                    <a:pt x="4512219" y="2367226"/>
-                  </a:lnTo>
-                  <a:lnTo>
-                    <a:pt x="4440596" y="2353519"/>
-                  </a:lnTo>
-                  <a:lnTo>
-                    <a:pt x="4368974" y="2339417"/>
-                  </a:lnTo>
-                  <a:lnTo>
-                    <a:pt x="4297351" y="2324910"/>
-                  </a:lnTo>
-                  <a:lnTo>
-                    <a:pt x="4225729" y="2309986"/>
-                  </a:lnTo>
-                  <a:lnTo>
-                    <a:pt x="4154106" y="2294633"/>
-                  </a:lnTo>
-                  <a:lnTo>
-                    <a:pt x="4082483" y="2278838"/>
-                  </a:lnTo>
-                  <a:lnTo>
-                    <a:pt x="4010861" y="2262589"/>
-                  </a:lnTo>
-                  <a:lnTo>
-                    <a:pt x="3939238" y="2245873"/>
-                  </a:lnTo>
-                  <a:lnTo>
-                    <a:pt x="3867616" y="2228676"/>
-                  </a:lnTo>
-                  <a:lnTo>
-                    <a:pt x="3795993" y="2210984"/>
-                  </a:lnTo>
-                  <a:lnTo>
-                    <a:pt x="3724371" y="2192784"/>
-                  </a:lnTo>
-                  <a:lnTo>
-                    <a:pt x="3652748" y="2174060"/>
-                  </a:lnTo>
-                  <a:lnTo>
-                    <a:pt x="3581126" y="2154798"/>
-                  </a:lnTo>
-                  <a:lnTo>
-                    <a:pt x="3509503" y="2134982"/>
-                  </a:lnTo>
-                  <a:lnTo>
-                    <a:pt x="3437881" y="2114596"/>
-                  </a:lnTo>
-                  <a:lnTo>
-                    <a:pt x="3366258" y="2093624"/>
-                  </a:lnTo>
-                  <a:lnTo>
-                    <a:pt x="3294636" y="2072049"/>
-                  </a:lnTo>
-                  <a:lnTo>
-                    <a:pt x="3223013" y="2049853"/>
-                  </a:lnTo>
-                  <a:lnTo>
-                    <a:pt x="3151391" y="2027019"/>
-                  </a:lnTo>
-                  <a:lnTo>
-                    <a:pt x="3079768" y="2013837"/>
-                  </a:lnTo>
-                  <a:lnTo>
-                    <a:pt x="3008146" y="2012562"/>
-                  </a:lnTo>
-                  <a:lnTo>
-                    <a:pt x="2936523" y="2011286"/>
-                  </a:lnTo>
-                  <a:lnTo>
-                    <a:pt x="2864901" y="2010007"/>
-                  </a:lnTo>
-                  <a:lnTo>
-                    <a:pt x="2793278" y="2008727"/>
-                  </a:lnTo>
-                  <a:lnTo>
-                    <a:pt x="2721655" y="2007444"/>
-                  </a:lnTo>
-                  <a:lnTo>
-                    <a:pt x="2650033" y="2006160"/>
-                  </a:lnTo>
-                  <a:lnTo>
-                    <a:pt x="2578410" y="2004873"/>
-                  </a:lnTo>
-                  <a:lnTo>
-                    <a:pt x="2506788" y="2003585"/>
-                  </a:lnTo>
-                  <a:lnTo>
-                    <a:pt x="2435165" y="2002294"/>
-                  </a:lnTo>
-                  <a:lnTo>
-                    <a:pt x="2363543" y="2001002"/>
-                  </a:lnTo>
-                  <a:lnTo>
-                    <a:pt x="2291920" y="1999708"/>
-                  </a:lnTo>
-                  <a:lnTo>
-                    <a:pt x="2220298" y="1998411"/>
-                  </a:lnTo>
-                  <a:lnTo>
-                    <a:pt x="2148675" y="1997113"/>
-                  </a:lnTo>
-                  <a:lnTo>
-                    <a:pt x="2077053" y="1995813"/>
-                  </a:lnTo>
-                  <a:lnTo>
-                    <a:pt x="2005430" y="1994510"/>
-                  </a:lnTo>
-                  <a:lnTo>
-                    <a:pt x="1933808" y="1993206"/>
-                  </a:lnTo>
-                  <a:lnTo>
-                    <a:pt x="1862185" y="1991900"/>
-                  </a:lnTo>
-                  <a:lnTo>
-                    <a:pt x="1790563" y="1990591"/>
-                  </a:lnTo>
-                  <a:lnTo>
-                    <a:pt x="1718940" y="1989281"/>
-                  </a:lnTo>
-                  <a:lnTo>
-                    <a:pt x="1647318" y="1987969"/>
-                  </a:lnTo>
-                  <a:lnTo>
-                    <a:pt x="1575695" y="1986654"/>
-                  </a:lnTo>
-                  <a:lnTo>
-                    <a:pt x="1504073" y="1985338"/>
-                  </a:lnTo>
-                  <a:lnTo>
-                    <a:pt x="1432450" y="1984020"/>
-                  </a:lnTo>
-                  <a:lnTo>
-                    <a:pt x="1360827" y="1982699"/>
-                  </a:lnTo>
-                  <a:lnTo>
-                    <a:pt x="1289205" y="1981377"/>
-                  </a:lnTo>
-                  <a:lnTo>
-                    <a:pt x="1217582" y="1980052"/>
-                  </a:lnTo>
-                  <a:lnTo>
-                    <a:pt x="1145960" y="1978726"/>
-                  </a:lnTo>
-                  <a:lnTo>
-                    <a:pt x="1074337" y="1977397"/>
-                  </a:lnTo>
-                  <a:lnTo>
-                    <a:pt x="1002715" y="1976067"/>
-                  </a:lnTo>
-                  <a:lnTo>
-                    <a:pt x="931092" y="1974734"/>
-                  </a:lnTo>
-                  <a:lnTo>
-                    <a:pt x="859470" y="1973399"/>
-                  </a:lnTo>
-                  <a:lnTo>
-                    <a:pt x="787847" y="1972062"/>
-                  </a:lnTo>
-                  <a:lnTo>
-                    <a:pt x="716225" y="1970724"/>
-                  </a:lnTo>
-                  <a:lnTo>
-                    <a:pt x="644602" y="1969383"/>
-                  </a:lnTo>
-                  <a:lnTo>
-                    <a:pt x="572980" y="1968040"/>
-                  </a:lnTo>
-                  <a:lnTo>
-                    <a:pt x="501357" y="1966695"/>
-                  </a:lnTo>
-                  <a:lnTo>
-                    <a:pt x="429735" y="1965348"/>
-                  </a:lnTo>
-                  <a:lnTo>
-                    <a:pt x="358112" y="1963999"/>
-                  </a:lnTo>
-                  <a:lnTo>
-                    <a:pt x="286490" y="1962648"/>
-                  </a:lnTo>
-                  <a:lnTo>
-                    <a:pt x="214867" y="1961294"/>
-                  </a:lnTo>
-                  <a:lnTo>
-                    <a:pt x="143245" y="1959939"/>
-                  </a:lnTo>
-                  <a:lnTo>
-                    <a:pt x="71622" y="1958582"/>
-                  </a:lnTo>
-                  <a:lnTo>
-                    <a:pt x="0" y="1957222"/>
+                    <a:pt x="70344" y="28687"/>
+                  </a:lnTo>
+                  <a:lnTo>
+                    <a:pt x="140688" y="56574"/>
+                  </a:lnTo>
+                  <a:lnTo>
+                    <a:pt x="211033" y="83680"/>
+                  </a:lnTo>
+                  <a:lnTo>
+                    <a:pt x="281377" y="110029"/>
+                  </a:lnTo>
+                  <a:lnTo>
+                    <a:pt x="351722" y="135641"/>
+                  </a:lnTo>
+                  <a:lnTo>
+                    <a:pt x="422066" y="160538"/>
+                  </a:lnTo>
+                  <a:lnTo>
+                    <a:pt x="492411" y="184738"/>
+                  </a:lnTo>
+                  <a:lnTo>
+                    <a:pt x="562755" y="208262"/>
+                  </a:lnTo>
+                  <a:lnTo>
+                    <a:pt x="633100" y="231128"/>
+                  </a:lnTo>
+                  <a:lnTo>
+                    <a:pt x="703444" y="253356"/>
+                  </a:lnTo>
+                  <a:lnTo>
+                    <a:pt x="773789" y="274961"/>
+                  </a:lnTo>
+                  <a:lnTo>
+                    <a:pt x="844133" y="295963"/>
+                  </a:lnTo>
+                  <a:lnTo>
+                    <a:pt x="914478" y="316378"/>
+                  </a:lnTo>
+                  <a:lnTo>
+                    <a:pt x="984822" y="336223"/>
+                  </a:lnTo>
+                  <a:lnTo>
+                    <a:pt x="1055167" y="355512"/>
+                  </a:lnTo>
+                  <a:lnTo>
+                    <a:pt x="1125511" y="374262"/>
+                  </a:lnTo>
+                  <a:lnTo>
+                    <a:pt x="1195856" y="392489"/>
+                  </a:lnTo>
+                  <a:lnTo>
+                    <a:pt x="1266200" y="410205"/>
+                  </a:lnTo>
+                  <a:lnTo>
+                    <a:pt x="1336545" y="427427"/>
+                  </a:lnTo>
+                  <a:lnTo>
+                    <a:pt x="1406889" y="444167"/>
+                  </a:lnTo>
+                  <a:lnTo>
+                    <a:pt x="1477234" y="460439"/>
+                  </a:lnTo>
+                  <a:lnTo>
+                    <a:pt x="1547578" y="476256"/>
+                  </a:lnTo>
+                  <a:lnTo>
+                    <a:pt x="1617923" y="491631"/>
+                  </a:lnTo>
+                  <a:lnTo>
+                    <a:pt x="1688267" y="506577"/>
+                  </a:lnTo>
+                  <a:lnTo>
+                    <a:pt x="1758612" y="521104"/>
+                  </a:lnTo>
+                  <a:lnTo>
+                    <a:pt x="1828956" y="535226"/>
+                  </a:lnTo>
+                  <a:lnTo>
+                    <a:pt x="1899301" y="548953"/>
+                  </a:lnTo>
+                  <a:lnTo>
+                    <a:pt x="1969645" y="562296"/>
+                  </a:lnTo>
+                  <a:lnTo>
+                    <a:pt x="2039990" y="575266"/>
+                  </a:lnTo>
+                  <a:lnTo>
+                    <a:pt x="2110334" y="587873"/>
+                  </a:lnTo>
+                  <a:lnTo>
+                    <a:pt x="2180679" y="600128"/>
+                  </a:lnTo>
+                  <a:lnTo>
+                    <a:pt x="2251023" y="612041"/>
+                  </a:lnTo>
+                  <a:lnTo>
+                    <a:pt x="2321368" y="623621"/>
+                  </a:lnTo>
+                  <a:lnTo>
+                    <a:pt x="2391712" y="634876"/>
+                  </a:lnTo>
+                  <a:lnTo>
+                    <a:pt x="2462057" y="645818"/>
+                  </a:lnTo>
+                  <a:lnTo>
+                    <a:pt x="2532401" y="656453"/>
+                  </a:lnTo>
+                  <a:lnTo>
+                    <a:pt x="2602746" y="666791"/>
+                  </a:lnTo>
+                  <a:lnTo>
+                    <a:pt x="2673090" y="676840"/>
+                  </a:lnTo>
+                  <a:lnTo>
+                    <a:pt x="2743435" y="686608"/>
+                  </a:lnTo>
+                  <a:lnTo>
+                    <a:pt x="2813779" y="696104"/>
+                  </a:lnTo>
+                  <a:lnTo>
+                    <a:pt x="2884124" y="705333"/>
+                  </a:lnTo>
+                  <a:lnTo>
+                    <a:pt x="2954468" y="714305"/>
+                  </a:lnTo>
+                  <a:lnTo>
+                    <a:pt x="3024813" y="723026"/>
+                  </a:lnTo>
+                  <a:lnTo>
+                    <a:pt x="3095157" y="727205"/>
+                  </a:lnTo>
+                  <a:lnTo>
+                    <a:pt x="3165502" y="727664"/>
+                  </a:lnTo>
+                  <a:lnTo>
+                    <a:pt x="3235846" y="728122"/>
+                  </a:lnTo>
+                  <a:lnTo>
+                    <a:pt x="3306191" y="728579"/>
+                  </a:lnTo>
+                  <a:lnTo>
+                    <a:pt x="3376535" y="729035"/>
+                  </a:lnTo>
+                  <a:lnTo>
+                    <a:pt x="3446880" y="729491"/>
+                  </a:lnTo>
+                  <a:lnTo>
+                    <a:pt x="3517224" y="729946"/>
+                  </a:lnTo>
+                  <a:lnTo>
+                    <a:pt x="3587569" y="730401"/>
+                  </a:lnTo>
+                  <a:lnTo>
+                    <a:pt x="3657913" y="730854"/>
+                  </a:lnTo>
+                  <a:lnTo>
+                    <a:pt x="3728257" y="731307"/>
+                  </a:lnTo>
+                  <a:lnTo>
+                    <a:pt x="3798602" y="731760"/>
+                  </a:lnTo>
+                  <a:lnTo>
+                    <a:pt x="3868946" y="732211"/>
+                  </a:lnTo>
+                  <a:lnTo>
+                    <a:pt x="3939291" y="732662"/>
+                  </a:lnTo>
+                  <a:lnTo>
+                    <a:pt x="4009635" y="733112"/>
+                  </a:lnTo>
+                  <a:lnTo>
+                    <a:pt x="4079980" y="733562"/>
+                  </a:lnTo>
+                  <a:lnTo>
+                    <a:pt x="4150324" y="734011"/>
+                  </a:lnTo>
+                  <a:lnTo>
+                    <a:pt x="4220669" y="734459"/>
+                  </a:lnTo>
+                  <a:lnTo>
+                    <a:pt x="4291013" y="734906"/>
+                  </a:lnTo>
+                  <a:lnTo>
+                    <a:pt x="4361358" y="735353"/>
+                  </a:lnTo>
+                  <a:lnTo>
+                    <a:pt x="4431702" y="735799"/>
+                  </a:lnTo>
+                  <a:lnTo>
+                    <a:pt x="4502047" y="736245"/>
+                  </a:lnTo>
+                  <a:lnTo>
+                    <a:pt x="4572391" y="736689"/>
+                  </a:lnTo>
+                  <a:lnTo>
+                    <a:pt x="4642736" y="737133"/>
+                  </a:lnTo>
+                  <a:lnTo>
+                    <a:pt x="4713080" y="737577"/>
+                  </a:lnTo>
+                  <a:lnTo>
+                    <a:pt x="4783425" y="738019"/>
+                  </a:lnTo>
+                  <a:lnTo>
+                    <a:pt x="4853769" y="738461"/>
+                  </a:lnTo>
+                  <a:lnTo>
+                    <a:pt x="4924114" y="738903"/>
+                  </a:lnTo>
+                  <a:lnTo>
+                    <a:pt x="4994458" y="739343"/>
+                  </a:lnTo>
+                  <a:lnTo>
+                    <a:pt x="5064803" y="739783"/>
+                  </a:lnTo>
+                  <a:lnTo>
+                    <a:pt x="5135147" y="740223"/>
+                  </a:lnTo>
+                  <a:lnTo>
+                    <a:pt x="5205492" y="740661"/>
+                  </a:lnTo>
+                  <a:lnTo>
+                    <a:pt x="5275836" y="741099"/>
+                  </a:lnTo>
+                  <a:lnTo>
+                    <a:pt x="5346181" y="741536"/>
+                  </a:lnTo>
+                  <a:lnTo>
+                    <a:pt x="5416525" y="741973"/>
+                  </a:lnTo>
+                  <a:lnTo>
+                    <a:pt x="5486870" y="742409"/>
+                  </a:lnTo>
+                  <a:lnTo>
+                    <a:pt x="5557214" y="742844"/>
+                  </a:lnTo>
+                  <a:lnTo>
+                    <a:pt x="5627559" y="743279"/>
+                  </a:lnTo>
+                  <a:lnTo>
+                    <a:pt x="5697903" y="743713"/>
+                  </a:lnTo>
+                  <a:lnTo>
+                    <a:pt x="5768248" y="744146"/>
+                  </a:lnTo>
+                  <a:lnTo>
+                    <a:pt x="5838592" y="744579"/>
+                  </a:lnTo>
+                  <a:lnTo>
+                    <a:pt x="5908937" y="745011"/>
+                  </a:lnTo>
+                  <a:lnTo>
+                    <a:pt x="5979281" y="745442"/>
+                  </a:lnTo>
+                  <a:lnTo>
+                    <a:pt x="6049626" y="745872"/>
+                  </a:lnTo>
+                  <a:lnTo>
+                    <a:pt x="6119970" y="746302"/>
+                  </a:lnTo>
+                  <a:lnTo>
+                    <a:pt x="6190315" y="746732"/>
+                  </a:lnTo>
+                  <a:lnTo>
+                    <a:pt x="6260659" y="747160"/>
+                  </a:lnTo>
+                  <a:lnTo>
+                    <a:pt x="6331004" y="747588"/>
+                  </a:lnTo>
+                  <a:lnTo>
+                    <a:pt x="6401348" y="748016"/>
+                  </a:lnTo>
+                  <a:lnTo>
+                    <a:pt x="6471693" y="748442"/>
+                  </a:lnTo>
+                  <a:lnTo>
+                    <a:pt x="6542037" y="748868"/>
+                  </a:lnTo>
+                  <a:lnTo>
+                    <a:pt x="6612382" y="749294"/>
+                  </a:lnTo>
+                  <a:lnTo>
+                    <a:pt x="6682726" y="749718"/>
+                  </a:lnTo>
+                  <a:lnTo>
+                    <a:pt x="6753071" y="750142"/>
+                  </a:lnTo>
+                  <a:lnTo>
+                    <a:pt x="6823415" y="750566"/>
+                  </a:lnTo>
+                  <a:lnTo>
+                    <a:pt x="6893760" y="750989"/>
+                  </a:lnTo>
+                  <a:lnTo>
+                    <a:pt x="6964104" y="751411"/>
+                  </a:lnTo>
+                  <a:lnTo>
+                    <a:pt x="6964104" y="964303"/>
+                  </a:lnTo>
+                  <a:lnTo>
+                    <a:pt x="6893760" y="962521"/>
+                  </a:lnTo>
+                  <a:lnTo>
+                    <a:pt x="6823415" y="960687"/>
+                  </a:lnTo>
+                  <a:lnTo>
+                    <a:pt x="6753071" y="958800"/>
+                  </a:lnTo>
+                  <a:lnTo>
+                    <a:pt x="6682726" y="956859"/>
+                  </a:lnTo>
+                  <a:lnTo>
+                    <a:pt x="6612382" y="954863"/>
+                  </a:lnTo>
+                  <a:lnTo>
+                    <a:pt x="6542037" y="952809"/>
+                  </a:lnTo>
+                  <a:lnTo>
+                    <a:pt x="6471693" y="950696"/>
+                  </a:lnTo>
+                  <a:lnTo>
+                    <a:pt x="6401348" y="948522"/>
+                  </a:lnTo>
+                  <a:lnTo>
+                    <a:pt x="6331004" y="946285"/>
+                  </a:lnTo>
+                  <a:lnTo>
+                    <a:pt x="6260659" y="943984"/>
+                  </a:lnTo>
+                  <a:lnTo>
+                    <a:pt x="6190315" y="941618"/>
+                  </a:lnTo>
+                  <a:lnTo>
+                    <a:pt x="6119970" y="939183"/>
+                  </a:lnTo>
+                  <a:lnTo>
+                    <a:pt x="6049626" y="936678"/>
+                  </a:lnTo>
+                  <a:lnTo>
+                    <a:pt x="5979281" y="934101"/>
+                  </a:lnTo>
+                  <a:lnTo>
+                    <a:pt x="5908937" y="931450"/>
+                  </a:lnTo>
+                  <a:lnTo>
+                    <a:pt x="5838592" y="928722"/>
+                  </a:lnTo>
+                  <a:lnTo>
+                    <a:pt x="5768248" y="925916"/>
+                  </a:lnTo>
+                  <a:lnTo>
+                    <a:pt x="5697903" y="923030"/>
+                  </a:lnTo>
+                  <a:lnTo>
+                    <a:pt x="5627559" y="920060"/>
+                  </a:lnTo>
+                  <a:lnTo>
+                    <a:pt x="5557214" y="917006"/>
+                  </a:lnTo>
+                  <a:lnTo>
+                    <a:pt x="5486870" y="913863"/>
+                  </a:lnTo>
+                  <a:lnTo>
+                    <a:pt x="5416525" y="910630"/>
+                  </a:lnTo>
+                  <a:lnTo>
+                    <a:pt x="5346181" y="907304"/>
+                  </a:lnTo>
+                  <a:lnTo>
+                    <a:pt x="5275836" y="903882"/>
+                  </a:lnTo>
+                  <a:lnTo>
+                    <a:pt x="5205492" y="900362"/>
+                  </a:lnTo>
+                  <a:lnTo>
+                    <a:pt x="5135147" y="896741"/>
+                  </a:lnTo>
+                  <a:lnTo>
+                    <a:pt x="5064803" y="893015"/>
+                  </a:lnTo>
+                  <a:lnTo>
+                    <a:pt x="4994458" y="889182"/>
+                  </a:lnTo>
+                  <a:lnTo>
+                    <a:pt x="4924114" y="885240"/>
+                  </a:lnTo>
+                  <a:lnTo>
+                    <a:pt x="4853769" y="881183"/>
+                  </a:lnTo>
+                  <a:lnTo>
+                    <a:pt x="4783425" y="877011"/>
+                  </a:lnTo>
+                  <a:lnTo>
+                    <a:pt x="4713080" y="872718"/>
+                  </a:lnTo>
+                  <a:lnTo>
+                    <a:pt x="4642736" y="868301"/>
+                  </a:lnTo>
+                  <a:lnTo>
+                    <a:pt x="4572391" y="863758"/>
+                  </a:lnTo>
+                  <a:lnTo>
+                    <a:pt x="4502047" y="859084"/>
+                  </a:lnTo>
+                  <a:lnTo>
+                    <a:pt x="4431702" y="854276"/>
+                  </a:lnTo>
+                  <a:lnTo>
+                    <a:pt x="4361358" y="849329"/>
+                  </a:lnTo>
+                  <a:lnTo>
+                    <a:pt x="4291013" y="844240"/>
+                  </a:lnTo>
+                  <a:lnTo>
+                    <a:pt x="4220669" y="839005"/>
+                  </a:lnTo>
+                  <a:lnTo>
+                    <a:pt x="4150324" y="833619"/>
+                  </a:lnTo>
+                  <a:lnTo>
+                    <a:pt x="4079980" y="828079"/>
+                  </a:lnTo>
+                  <a:lnTo>
+                    <a:pt x="4009635" y="822379"/>
+                  </a:lnTo>
+                  <a:lnTo>
+                    <a:pt x="3939291" y="816515"/>
+                  </a:lnTo>
+                  <a:lnTo>
+                    <a:pt x="3868946" y="810482"/>
+                  </a:lnTo>
+                  <a:lnTo>
+                    <a:pt x="3798602" y="804276"/>
+                  </a:lnTo>
+                  <a:lnTo>
+                    <a:pt x="3728257" y="797892"/>
+                  </a:lnTo>
+                  <a:lnTo>
+                    <a:pt x="3657913" y="791324"/>
+                  </a:lnTo>
+                  <a:lnTo>
+                    <a:pt x="3587569" y="784567"/>
+                  </a:lnTo>
+                  <a:lnTo>
+                    <a:pt x="3517224" y="777616"/>
+                  </a:lnTo>
+                  <a:lnTo>
+                    <a:pt x="3446880" y="770464"/>
+                  </a:lnTo>
+                  <a:lnTo>
+                    <a:pt x="3376535" y="763108"/>
+                  </a:lnTo>
+                  <a:lnTo>
+                    <a:pt x="3306191" y="755539"/>
+                  </a:lnTo>
+                  <a:lnTo>
+                    <a:pt x="3235846" y="747753"/>
+                  </a:lnTo>
+                  <a:lnTo>
+                    <a:pt x="3165502" y="739743"/>
+                  </a:lnTo>
+                  <a:lnTo>
+                    <a:pt x="3095157" y="731503"/>
+                  </a:lnTo>
+                  <a:lnTo>
+                    <a:pt x="3024813" y="726746"/>
+                  </a:lnTo>
+                  <a:lnTo>
+                    <a:pt x="2954468" y="726286"/>
+                  </a:lnTo>
+                  <a:lnTo>
+                    <a:pt x="2884124" y="725825"/>
+                  </a:lnTo>
+                  <a:lnTo>
+                    <a:pt x="2813779" y="725364"/>
+                  </a:lnTo>
+                  <a:lnTo>
+                    <a:pt x="2743435" y="724902"/>
+                  </a:lnTo>
+                  <a:lnTo>
+                    <a:pt x="2673090" y="724439"/>
+                  </a:lnTo>
+                  <a:lnTo>
+                    <a:pt x="2602746" y="723975"/>
+                  </a:lnTo>
+                  <a:lnTo>
+                    <a:pt x="2532401" y="723511"/>
+                  </a:lnTo>
+                  <a:lnTo>
+                    <a:pt x="2462057" y="723046"/>
+                  </a:lnTo>
+                  <a:lnTo>
+                    <a:pt x="2391712" y="722581"/>
+                  </a:lnTo>
+                  <a:lnTo>
+                    <a:pt x="2321368" y="722114"/>
+                  </a:lnTo>
+                  <a:lnTo>
+                    <a:pt x="2251023" y="721647"/>
+                  </a:lnTo>
+                  <a:lnTo>
+                    <a:pt x="2180679" y="721179"/>
+                  </a:lnTo>
+                  <a:lnTo>
+                    <a:pt x="2110334" y="720711"/>
+                  </a:lnTo>
+                  <a:lnTo>
+                    <a:pt x="2039990" y="720242"/>
+                  </a:lnTo>
+                  <a:lnTo>
+                    <a:pt x="1969645" y="719772"/>
+                  </a:lnTo>
+                  <a:lnTo>
+                    <a:pt x="1899301" y="719301"/>
+                  </a:lnTo>
+                  <a:lnTo>
+                    <a:pt x="1828956" y="718829"/>
+                  </a:lnTo>
+                  <a:lnTo>
+                    <a:pt x="1758612" y="718357"/>
+                  </a:lnTo>
+                  <a:lnTo>
+                    <a:pt x="1688267" y="717884"/>
+                  </a:lnTo>
+                  <a:lnTo>
+                    <a:pt x="1617923" y="717411"/>
+                  </a:lnTo>
+                  <a:lnTo>
+                    <a:pt x="1547578" y="716937"/>
+                  </a:lnTo>
+                  <a:lnTo>
+                    <a:pt x="1477234" y="716461"/>
+                  </a:lnTo>
+                  <a:lnTo>
+                    <a:pt x="1406889" y="715986"/>
+                  </a:lnTo>
+                  <a:lnTo>
+                    <a:pt x="1336545" y="715509"/>
+                  </a:lnTo>
+                  <a:lnTo>
+                    <a:pt x="1266200" y="715032"/>
+                  </a:lnTo>
+                  <a:lnTo>
+                    <a:pt x="1195856" y="714554"/>
+                  </a:lnTo>
+                  <a:lnTo>
+                    <a:pt x="1125511" y="714075"/>
+                  </a:lnTo>
+                  <a:lnTo>
+                    <a:pt x="1055167" y="713596"/>
+                  </a:lnTo>
+                  <a:lnTo>
+                    <a:pt x="984822" y="713116"/>
+                  </a:lnTo>
+                  <a:lnTo>
+                    <a:pt x="914478" y="712635"/>
+                  </a:lnTo>
+                  <a:lnTo>
+                    <a:pt x="844133" y="712153"/>
+                  </a:lnTo>
+                  <a:lnTo>
+                    <a:pt x="773789" y="711671"/>
+                  </a:lnTo>
+                  <a:lnTo>
+                    <a:pt x="703444" y="711187"/>
+                  </a:lnTo>
+                  <a:lnTo>
+                    <a:pt x="633100" y="710704"/>
+                  </a:lnTo>
+                  <a:lnTo>
+                    <a:pt x="562755" y="710219"/>
+                  </a:lnTo>
+                  <a:lnTo>
+                    <a:pt x="492411" y="709734"/>
+                  </a:lnTo>
+                  <a:lnTo>
+                    <a:pt x="422066" y="709248"/>
+                  </a:lnTo>
+                  <a:lnTo>
+                    <a:pt x="351722" y="708761"/>
+                  </a:lnTo>
+                  <a:lnTo>
+                    <a:pt x="281377" y="708273"/>
+                  </a:lnTo>
+                  <a:lnTo>
+                    <a:pt x="211033" y="707785"/>
+                  </a:lnTo>
+                  <a:lnTo>
+                    <a:pt x="140688" y="707296"/>
+                  </a:lnTo>
+                  <a:lnTo>
+                    <a:pt x="70344" y="706806"/>
+                  </a:lnTo>
+                  <a:lnTo>
+                    <a:pt x="0" y="706315"/>
                   </a:lnTo>
                   <a:close/>
                 </a:path>
@@ -3670,643 +3705,318 @@
         </p:sp>
         <p:sp>
           <p:nvSpPr>
-            <p:cNvPr id="23" name="pl23"/>
-            <p:cNvSpPr/>
-            <p:nvPr/>
-          </p:nvSpPr>
-          <p:spPr>
-            <a:xfrm>
-              <a:off x="1172049" y="2713362"/>
-              <a:ext cx="7090630" cy="2082184"/>
-            </a:xfrm>
-            <a:custGeom>
-              <a:avLst/>
-              <a:pathLst>
-                <a:path w="7090630" h="2082184">
-                  <a:moveTo>
-                    <a:pt x="0" y="0"/>
-                  </a:moveTo>
-                  <a:lnTo>
-                    <a:pt x="71622" y="79495"/>
-                  </a:lnTo>
-                  <a:lnTo>
-                    <a:pt x="143245" y="156768"/>
-                  </a:lnTo>
-                  <a:lnTo>
-                    <a:pt x="214867" y="231881"/>
-                  </a:lnTo>
-                  <a:lnTo>
-                    <a:pt x="286490" y="304894"/>
-                  </a:lnTo>
-                  <a:lnTo>
-                    <a:pt x="358112" y="375867"/>
-                  </a:lnTo>
-                  <a:lnTo>
-                    <a:pt x="429735" y="444856"/>
-                  </a:lnTo>
-                  <a:lnTo>
-                    <a:pt x="501357" y="511916"/>
-                  </a:lnTo>
-                  <a:lnTo>
-                    <a:pt x="572980" y="577101"/>
-                  </a:lnTo>
-                  <a:lnTo>
-                    <a:pt x="644602" y="640465"/>
-                  </a:lnTo>
-                  <a:lnTo>
-                    <a:pt x="716225" y="702057"/>
-                  </a:lnTo>
-                  <a:lnTo>
-                    <a:pt x="787847" y="761928"/>
-                  </a:lnTo>
-                  <a:lnTo>
-                    <a:pt x="859470" y="820125"/>
-                  </a:lnTo>
-                  <a:lnTo>
-                    <a:pt x="931092" y="876695"/>
-                  </a:lnTo>
-                  <a:lnTo>
-                    <a:pt x="1002715" y="931684"/>
-                  </a:lnTo>
-                  <a:lnTo>
-                    <a:pt x="1074337" y="985136"/>
-                  </a:lnTo>
-                  <a:lnTo>
-                    <a:pt x="1145960" y="1037094"/>
-                  </a:lnTo>
-                  <a:lnTo>
-                    <a:pt x="1217582" y="1087599"/>
-                  </a:lnTo>
-                  <a:lnTo>
-                    <a:pt x="1289205" y="1136692"/>
-                  </a:lnTo>
-                  <a:lnTo>
-                    <a:pt x="1360827" y="1184414"/>
-                  </a:lnTo>
-                  <a:lnTo>
-                    <a:pt x="1432450" y="1230801"/>
-                  </a:lnTo>
-                  <a:lnTo>
-                    <a:pt x="1504073" y="1275892"/>
-                  </a:lnTo>
-                  <a:lnTo>
-                    <a:pt x="1575695" y="1319722"/>
-                  </a:lnTo>
-                  <a:lnTo>
-                    <a:pt x="1647318" y="1362327"/>
-                  </a:lnTo>
-                  <a:lnTo>
-                    <a:pt x="1718940" y="1403741"/>
-                  </a:lnTo>
-                  <a:lnTo>
-                    <a:pt x="1790563" y="1443997"/>
-                  </a:lnTo>
-                  <a:lnTo>
-                    <a:pt x="1862185" y="1483128"/>
-                  </a:lnTo>
-                  <a:lnTo>
-                    <a:pt x="1933808" y="1521166"/>
-                  </a:lnTo>
-                  <a:lnTo>
-                    <a:pt x="2005430" y="1558140"/>
-                  </a:lnTo>
-                  <a:lnTo>
-                    <a:pt x="2077053" y="1594080"/>
-                  </a:lnTo>
-                  <a:lnTo>
-                    <a:pt x="2148675" y="1629016"/>
-                  </a:lnTo>
-                  <a:lnTo>
-                    <a:pt x="2220298" y="1662976"/>
-                  </a:lnTo>
-                  <a:lnTo>
-                    <a:pt x="2291920" y="1695986"/>
-                  </a:lnTo>
-                  <a:lnTo>
-                    <a:pt x="2363543" y="1728073"/>
-                  </a:lnTo>
-                  <a:lnTo>
-                    <a:pt x="2435165" y="1759263"/>
-                  </a:lnTo>
-                  <a:lnTo>
-                    <a:pt x="2506788" y="1789582"/>
-                  </a:lnTo>
-                  <a:lnTo>
-                    <a:pt x="2578410" y="1819053"/>
-                  </a:lnTo>
-                  <a:lnTo>
-                    <a:pt x="2650033" y="1847700"/>
-                  </a:lnTo>
-                  <a:lnTo>
-                    <a:pt x="2721655" y="1875546"/>
-                  </a:lnTo>
-                  <a:lnTo>
-                    <a:pt x="2793278" y="1902614"/>
-                  </a:lnTo>
-                  <a:lnTo>
-                    <a:pt x="2864901" y="1928926"/>
-                  </a:lnTo>
-                  <a:lnTo>
-                    <a:pt x="2936523" y="1954502"/>
-                  </a:lnTo>
-                  <a:lnTo>
-                    <a:pt x="3008146" y="1979363"/>
-                  </a:lnTo>
-                  <a:lnTo>
-                    <a:pt x="3079768" y="2003529"/>
-                  </a:lnTo>
-                  <a:lnTo>
-                    <a:pt x="3151391" y="2015110"/>
-                  </a:lnTo>
-                  <a:lnTo>
-                    <a:pt x="3223013" y="2016380"/>
-                  </a:lnTo>
-                  <a:lnTo>
-                    <a:pt x="3294636" y="2017649"/>
-                  </a:lnTo>
-                  <a:lnTo>
-                    <a:pt x="3366258" y="2018916"/>
-                  </a:lnTo>
-                  <a:lnTo>
-                    <a:pt x="3437881" y="2020181"/>
-                  </a:lnTo>
-                  <a:lnTo>
-                    <a:pt x="3509503" y="2021444"/>
-                  </a:lnTo>
-                  <a:lnTo>
-                    <a:pt x="3581126" y="2022705"/>
-                  </a:lnTo>
-                  <a:lnTo>
-                    <a:pt x="3652748" y="2023964"/>
-                  </a:lnTo>
-                  <a:lnTo>
-                    <a:pt x="3724371" y="2025221"/>
-                  </a:lnTo>
-                  <a:lnTo>
-                    <a:pt x="3795993" y="2026476"/>
-                  </a:lnTo>
-                  <a:lnTo>
-                    <a:pt x="3867616" y="2027730"/>
-                  </a:lnTo>
-                  <a:lnTo>
-                    <a:pt x="3939238" y="2028981"/>
-                  </a:lnTo>
-                  <a:lnTo>
-                    <a:pt x="4010861" y="2030230"/>
-                  </a:lnTo>
-                  <a:lnTo>
-                    <a:pt x="4082483" y="2031478"/>
-                  </a:lnTo>
-                  <a:lnTo>
-                    <a:pt x="4154106" y="2032724"/>
-                  </a:lnTo>
-                  <a:lnTo>
-                    <a:pt x="4225729" y="2033967"/>
-                  </a:lnTo>
-                  <a:lnTo>
-                    <a:pt x="4297351" y="2035209"/>
-                  </a:lnTo>
-                  <a:lnTo>
-                    <a:pt x="4368974" y="2036449"/>
-                  </a:lnTo>
-                  <a:lnTo>
-                    <a:pt x="4440596" y="2037687"/>
-                  </a:lnTo>
-                  <a:lnTo>
-                    <a:pt x="4512219" y="2038923"/>
-                  </a:lnTo>
-                  <a:lnTo>
-                    <a:pt x="4583841" y="2040158"/>
-                  </a:lnTo>
-                  <a:lnTo>
-                    <a:pt x="4655464" y="2041390"/>
-                  </a:lnTo>
-                  <a:lnTo>
-                    <a:pt x="4727086" y="2042620"/>
-                  </a:lnTo>
-                  <a:lnTo>
-                    <a:pt x="4798709" y="2043849"/>
-                  </a:lnTo>
-                  <a:lnTo>
-                    <a:pt x="4870331" y="2045076"/>
-                  </a:lnTo>
-                  <a:lnTo>
-                    <a:pt x="4941954" y="2046300"/>
-                  </a:lnTo>
-                  <a:lnTo>
-                    <a:pt x="5013576" y="2047523"/>
-                  </a:lnTo>
-                  <a:lnTo>
-                    <a:pt x="5085199" y="2048744"/>
-                  </a:lnTo>
-                  <a:lnTo>
-                    <a:pt x="5156821" y="2049963"/>
-                  </a:lnTo>
-                  <a:lnTo>
-                    <a:pt x="5228444" y="2051181"/>
-                  </a:lnTo>
-                  <a:lnTo>
-                    <a:pt x="5300066" y="2052396"/>
-                  </a:lnTo>
-                  <a:lnTo>
-                    <a:pt x="5371689" y="2053610"/>
-                  </a:lnTo>
-                  <a:lnTo>
-                    <a:pt x="5443311" y="2054821"/>
-                  </a:lnTo>
-                  <a:lnTo>
-                    <a:pt x="5514934" y="2056031"/>
-                  </a:lnTo>
-                  <a:lnTo>
-                    <a:pt x="5586557" y="2057239"/>
-                  </a:lnTo>
-                  <a:lnTo>
-                    <a:pt x="5658179" y="2058445"/>
-                  </a:lnTo>
-                  <a:lnTo>
-                    <a:pt x="5729802" y="2059650"/>
-                  </a:lnTo>
-                  <a:lnTo>
-                    <a:pt x="5801424" y="2060852"/>
-                  </a:lnTo>
-                  <a:lnTo>
-                    <a:pt x="5873047" y="2062053"/>
-                  </a:lnTo>
-                  <a:lnTo>
-                    <a:pt x="5944669" y="2063251"/>
-                  </a:lnTo>
-                  <a:lnTo>
-                    <a:pt x="6016292" y="2064448"/>
-                  </a:lnTo>
-                  <a:lnTo>
-                    <a:pt x="6087914" y="2065643"/>
-                  </a:lnTo>
-                  <a:lnTo>
-                    <a:pt x="6159537" y="2066837"/>
-                  </a:lnTo>
-                  <a:lnTo>
-                    <a:pt x="6231159" y="2068028"/>
-                  </a:lnTo>
-                  <a:lnTo>
-                    <a:pt x="6302782" y="2069218"/>
-                  </a:lnTo>
-                  <a:lnTo>
-                    <a:pt x="6374404" y="2070406"/>
-                  </a:lnTo>
-                  <a:lnTo>
-                    <a:pt x="6446027" y="2071591"/>
-                  </a:lnTo>
-                  <a:lnTo>
-                    <a:pt x="6517649" y="2072776"/>
-                  </a:lnTo>
-                  <a:lnTo>
-                    <a:pt x="6589272" y="2073958"/>
-                  </a:lnTo>
-                  <a:lnTo>
-                    <a:pt x="6660894" y="2075138"/>
-                  </a:lnTo>
-                  <a:lnTo>
-                    <a:pt x="6732517" y="2076317"/>
-                  </a:lnTo>
-                  <a:lnTo>
-                    <a:pt x="6804139" y="2077494"/>
-                  </a:lnTo>
-                  <a:lnTo>
-                    <a:pt x="6875762" y="2078669"/>
-                  </a:lnTo>
-                  <a:lnTo>
-                    <a:pt x="6947385" y="2079842"/>
-                  </a:lnTo>
-                  <a:lnTo>
-                    <a:pt x="7019007" y="2081014"/>
-                  </a:lnTo>
-                  <a:lnTo>
-                    <a:pt x="7090630" y="2082184"/>
-                  </a:lnTo>
-                </a:path>
-              </a:pathLst>
-            </a:custGeom>
-          </p:spPr>
-          <p:txBody>
-            <a:bodyPr/>
-            <a:lstStyle/>
-            <a:p/>
-          </p:txBody>
-        </p:sp>
-        <p:sp>
-          <p:nvSpPr>
             <p:cNvPr id="24" name="pl24"/>
             <p:cNvSpPr/>
             <p:nvPr/>
           </p:nvSpPr>
           <p:spPr>
             <a:xfrm>
-              <a:off x="1172049" y="4670585"/>
-              <a:ext cx="7090630" cy="714893"/>
+              <a:off x="1235312" y="2374002"/>
+              <a:ext cx="6964104" cy="751411"/>
             </a:xfrm>
             <a:custGeom>
               <a:avLst/>
               <a:pathLst>
-                <a:path w="7090630" h="714893">
+                <a:path w="6964104" h="751411">
                   <a:moveTo>
-                    <a:pt x="7090630" y="714893"/>
+                    <a:pt x="0" y="0"/>
                   </a:moveTo>
                   <a:lnTo>
-                    <a:pt x="7019007" y="709953"/>
-                  </a:lnTo>
-                  <a:lnTo>
-                    <a:pt x="6947385" y="704871"/>
-                  </a:lnTo>
-                  <a:lnTo>
-                    <a:pt x="6875762" y="699644"/>
-                  </a:lnTo>
-                  <a:lnTo>
-                    <a:pt x="6804139" y="694265"/>
-                  </a:lnTo>
-                  <a:lnTo>
-                    <a:pt x="6732517" y="688733"/>
-                  </a:lnTo>
-                  <a:lnTo>
-                    <a:pt x="6660894" y="683041"/>
-                  </a:lnTo>
-                  <a:lnTo>
-                    <a:pt x="6589272" y="677185"/>
-                  </a:lnTo>
-                  <a:lnTo>
-                    <a:pt x="6517649" y="671161"/>
-                  </a:lnTo>
-                  <a:lnTo>
-                    <a:pt x="6446027" y="664964"/>
-                  </a:lnTo>
-                  <a:lnTo>
-                    <a:pt x="6374404" y="658589"/>
-                  </a:lnTo>
-                  <a:lnTo>
-                    <a:pt x="6302782" y="652030"/>
-                  </a:lnTo>
-                  <a:lnTo>
-                    <a:pt x="6231159" y="645283"/>
-                  </a:lnTo>
-                  <a:lnTo>
-                    <a:pt x="6159537" y="638341"/>
-                  </a:lnTo>
-                  <a:lnTo>
-                    <a:pt x="6087914" y="631200"/>
-                  </a:lnTo>
-                  <a:lnTo>
-                    <a:pt x="6016292" y="623854"/>
-                  </a:lnTo>
-                  <a:lnTo>
-                    <a:pt x="5944669" y="616296"/>
-                  </a:lnTo>
-                  <a:lnTo>
-                    <a:pt x="5873047" y="608522"/>
-                  </a:lnTo>
-                  <a:lnTo>
-                    <a:pt x="5801424" y="600523"/>
-                  </a:lnTo>
-                  <a:lnTo>
-                    <a:pt x="5729802" y="592295"/>
-                  </a:lnTo>
-                  <a:lnTo>
-                    <a:pt x="5658179" y="583829"/>
-                  </a:lnTo>
-                  <a:lnTo>
-                    <a:pt x="5586557" y="575121"/>
-                  </a:lnTo>
-                  <a:lnTo>
-                    <a:pt x="5514934" y="566162"/>
-                  </a:lnTo>
-                  <a:lnTo>
-                    <a:pt x="5443311" y="556945"/>
-                  </a:lnTo>
-                  <a:lnTo>
-                    <a:pt x="5371689" y="547463"/>
-                  </a:lnTo>
-                  <a:lnTo>
-                    <a:pt x="5300066" y="537709"/>
-                  </a:lnTo>
-                  <a:lnTo>
-                    <a:pt x="5228444" y="527674"/>
-                  </a:lnTo>
-                  <a:lnTo>
-                    <a:pt x="5156821" y="517351"/>
-                  </a:lnTo>
-                  <a:lnTo>
-                    <a:pt x="5085199" y="506731"/>
-                  </a:lnTo>
-                  <a:lnTo>
-                    <a:pt x="5013576" y="495805"/>
-                  </a:lnTo>
-                  <a:lnTo>
-                    <a:pt x="4941954" y="484565"/>
-                  </a:lnTo>
-                  <a:lnTo>
-                    <a:pt x="4870331" y="473002"/>
-                  </a:lnTo>
-                  <a:lnTo>
-                    <a:pt x="4798709" y="461106"/>
-                  </a:lnTo>
-                  <a:lnTo>
-                    <a:pt x="4727086" y="448869"/>
-                  </a:lnTo>
-                  <a:lnTo>
-                    <a:pt x="4655464" y="436279"/>
-                  </a:lnTo>
-                  <a:lnTo>
-                    <a:pt x="4583841" y="423327"/>
-                  </a:lnTo>
-                  <a:lnTo>
-                    <a:pt x="4512219" y="410003"/>
-                  </a:lnTo>
-                  <a:lnTo>
-                    <a:pt x="4440596" y="396296"/>
-                  </a:lnTo>
-                  <a:lnTo>
-                    <a:pt x="4368974" y="382195"/>
-                  </a:lnTo>
-                  <a:lnTo>
-                    <a:pt x="4297351" y="367688"/>
-                  </a:lnTo>
-                  <a:lnTo>
-                    <a:pt x="4225729" y="352763"/>
-                  </a:lnTo>
-                  <a:lnTo>
-                    <a:pt x="4154106" y="337410"/>
-                  </a:lnTo>
-                  <a:lnTo>
-                    <a:pt x="4082483" y="321615"/>
-                  </a:lnTo>
-                  <a:lnTo>
-                    <a:pt x="4010861" y="305366"/>
-                  </a:lnTo>
-                  <a:lnTo>
-                    <a:pt x="3939238" y="288650"/>
-                  </a:lnTo>
-                  <a:lnTo>
-                    <a:pt x="3867616" y="271453"/>
-                  </a:lnTo>
-                  <a:lnTo>
-                    <a:pt x="3795993" y="253761"/>
-                  </a:lnTo>
-                  <a:lnTo>
-                    <a:pt x="3724371" y="235561"/>
-                  </a:lnTo>
-                  <a:lnTo>
-                    <a:pt x="3652748" y="216838"/>
-                  </a:lnTo>
-                  <a:lnTo>
-                    <a:pt x="3581126" y="197575"/>
-                  </a:lnTo>
-                  <a:lnTo>
-                    <a:pt x="3509503" y="177759"/>
-                  </a:lnTo>
-                  <a:lnTo>
-                    <a:pt x="3437881" y="157374"/>
-                  </a:lnTo>
-                  <a:lnTo>
-                    <a:pt x="3366258" y="136401"/>
-                  </a:lnTo>
-                  <a:lnTo>
-                    <a:pt x="3294636" y="114826"/>
-                  </a:lnTo>
-                  <a:lnTo>
-                    <a:pt x="3223013" y="92631"/>
-                  </a:lnTo>
-                  <a:lnTo>
-                    <a:pt x="3151391" y="69797"/>
-                  </a:lnTo>
-                  <a:lnTo>
-                    <a:pt x="3079768" y="56614"/>
-                  </a:lnTo>
-                  <a:lnTo>
-                    <a:pt x="3008146" y="55340"/>
-                  </a:lnTo>
-                  <a:lnTo>
-                    <a:pt x="2936523" y="54063"/>
-                  </a:lnTo>
-                  <a:lnTo>
-                    <a:pt x="2864901" y="52784"/>
-                  </a:lnTo>
-                  <a:lnTo>
-                    <a:pt x="2793278" y="51504"/>
-                  </a:lnTo>
-                  <a:lnTo>
-                    <a:pt x="2721655" y="50221"/>
-                  </a:lnTo>
-                  <a:lnTo>
-                    <a:pt x="2650033" y="48937"/>
-                  </a:lnTo>
-                  <a:lnTo>
-                    <a:pt x="2578410" y="47651"/>
-                  </a:lnTo>
-                  <a:lnTo>
-                    <a:pt x="2506788" y="46362"/>
-                  </a:lnTo>
-                  <a:lnTo>
-                    <a:pt x="2435165" y="45072"/>
-                  </a:lnTo>
-                  <a:lnTo>
-                    <a:pt x="2363543" y="43779"/>
-                  </a:lnTo>
-                  <a:lnTo>
-                    <a:pt x="2291920" y="42485"/>
-                  </a:lnTo>
-                  <a:lnTo>
-                    <a:pt x="2220298" y="41189"/>
-                  </a:lnTo>
-                  <a:lnTo>
-                    <a:pt x="2148675" y="39890"/>
-                  </a:lnTo>
-                  <a:lnTo>
-                    <a:pt x="2077053" y="38590"/>
-                  </a:lnTo>
-                  <a:lnTo>
-                    <a:pt x="2005430" y="37288"/>
-                  </a:lnTo>
-                  <a:lnTo>
-                    <a:pt x="1933808" y="35983"/>
-                  </a:lnTo>
-                  <a:lnTo>
-                    <a:pt x="1862185" y="34677"/>
-                  </a:lnTo>
-                  <a:lnTo>
-                    <a:pt x="1790563" y="33369"/>
-                  </a:lnTo>
-                  <a:lnTo>
-                    <a:pt x="1718940" y="32058"/>
-                  </a:lnTo>
-                  <a:lnTo>
-                    <a:pt x="1647318" y="30746"/>
-                  </a:lnTo>
-                  <a:lnTo>
-                    <a:pt x="1575695" y="29432"/>
-                  </a:lnTo>
-                  <a:lnTo>
-                    <a:pt x="1504073" y="28115"/>
-                  </a:lnTo>
-                  <a:lnTo>
-                    <a:pt x="1432450" y="26797"/>
-                  </a:lnTo>
-                  <a:lnTo>
-                    <a:pt x="1360827" y="25476"/>
-                  </a:lnTo>
-                  <a:lnTo>
-                    <a:pt x="1289205" y="24154"/>
-                  </a:lnTo>
-                  <a:lnTo>
-                    <a:pt x="1217582" y="22830"/>
-                  </a:lnTo>
-                  <a:lnTo>
-                    <a:pt x="1145960" y="21503"/>
-                  </a:lnTo>
-                  <a:lnTo>
-                    <a:pt x="1074337" y="20174"/>
-                  </a:lnTo>
-                  <a:lnTo>
-                    <a:pt x="1002715" y="18844"/>
-                  </a:lnTo>
-                  <a:lnTo>
-                    <a:pt x="931092" y="17511"/>
-                  </a:lnTo>
-                  <a:lnTo>
-                    <a:pt x="859470" y="16177"/>
-                  </a:lnTo>
-                  <a:lnTo>
-                    <a:pt x="787847" y="14840"/>
-                  </a:lnTo>
-                  <a:lnTo>
-                    <a:pt x="716225" y="13501"/>
-                  </a:lnTo>
-                  <a:lnTo>
-                    <a:pt x="644602" y="12160"/>
-                  </a:lnTo>
-                  <a:lnTo>
-                    <a:pt x="572980" y="10817"/>
-                  </a:lnTo>
-                  <a:lnTo>
-                    <a:pt x="501357" y="9472"/>
-                  </a:lnTo>
-                  <a:lnTo>
-                    <a:pt x="429735" y="8125"/>
-                  </a:lnTo>
-                  <a:lnTo>
-                    <a:pt x="358112" y="6776"/>
-                  </a:lnTo>
-                  <a:lnTo>
-                    <a:pt x="286490" y="5425"/>
-                  </a:lnTo>
-                  <a:lnTo>
-                    <a:pt x="214867" y="4072"/>
-                  </a:lnTo>
-                  <a:lnTo>
-                    <a:pt x="143245" y="2716"/>
-                  </a:lnTo>
-                  <a:lnTo>
-                    <a:pt x="71622" y="1359"/>
-                  </a:lnTo>
-                  <a:lnTo>
-                    <a:pt x="0" y="0"/>
+                    <a:pt x="70344" y="28687"/>
+                  </a:lnTo>
+                  <a:lnTo>
+                    <a:pt x="140688" y="56574"/>
+                  </a:lnTo>
+                  <a:lnTo>
+                    <a:pt x="211033" y="83680"/>
+                  </a:lnTo>
+                  <a:lnTo>
+                    <a:pt x="281377" y="110029"/>
+                  </a:lnTo>
+                  <a:lnTo>
+                    <a:pt x="351722" y="135641"/>
+                  </a:lnTo>
+                  <a:lnTo>
+                    <a:pt x="422066" y="160538"/>
+                  </a:lnTo>
+                  <a:lnTo>
+                    <a:pt x="492411" y="184738"/>
+                  </a:lnTo>
+                  <a:lnTo>
+                    <a:pt x="562755" y="208262"/>
+                  </a:lnTo>
+                  <a:lnTo>
+                    <a:pt x="633100" y="231128"/>
+                  </a:lnTo>
+                  <a:lnTo>
+                    <a:pt x="703444" y="253356"/>
+                  </a:lnTo>
+                  <a:lnTo>
+                    <a:pt x="773789" y="274961"/>
+                  </a:lnTo>
+                  <a:lnTo>
+                    <a:pt x="844133" y="295963"/>
+                  </a:lnTo>
+                  <a:lnTo>
+                    <a:pt x="914478" y="316378"/>
+                  </a:lnTo>
+                  <a:lnTo>
+                    <a:pt x="984822" y="336223"/>
+                  </a:lnTo>
+                  <a:lnTo>
+                    <a:pt x="1055167" y="355512"/>
+                  </a:lnTo>
+                  <a:lnTo>
+                    <a:pt x="1125511" y="374262"/>
+                  </a:lnTo>
+                  <a:lnTo>
+                    <a:pt x="1195856" y="392489"/>
+                  </a:lnTo>
+                  <a:lnTo>
+                    <a:pt x="1266200" y="410205"/>
+                  </a:lnTo>
+                  <a:lnTo>
+                    <a:pt x="1336545" y="427427"/>
+                  </a:lnTo>
+                  <a:lnTo>
+                    <a:pt x="1406889" y="444167"/>
+                  </a:lnTo>
+                  <a:lnTo>
+                    <a:pt x="1477234" y="460439"/>
+                  </a:lnTo>
+                  <a:lnTo>
+                    <a:pt x="1547578" y="476256"/>
+                  </a:lnTo>
+                  <a:lnTo>
+                    <a:pt x="1617923" y="491631"/>
+                  </a:lnTo>
+                  <a:lnTo>
+                    <a:pt x="1688267" y="506577"/>
+                  </a:lnTo>
+                  <a:lnTo>
+                    <a:pt x="1758612" y="521104"/>
+                  </a:lnTo>
+                  <a:lnTo>
+                    <a:pt x="1828956" y="535226"/>
+                  </a:lnTo>
+                  <a:lnTo>
+                    <a:pt x="1899301" y="548953"/>
+                  </a:lnTo>
+                  <a:lnTo>
+                    <a:pt x="1969645" y="562296"/>
+                  </a:lnTo>
+                  <a:lnTo>
+                    <a:pt x="2039990" y="575266"/>
+                  </a:lnTo>
+                  <a:lnTo>
+                    <a:pt x="2110334" y="587873"/>
+                  </a:lnTo>
+                  <a:lnTo>
+                    <a:pt x="2180679" y="600128"/>
+                  </a:lnTo>
+                  <a:lnTo>
+                    <a:pt x="2251023" y="612041"/>
+                  </a:lnTo>
+                  <a:lnTo>
+                    <a:pt x="2321368" y="623621"/>
+                  </a:lnTo>
+                  <a:lnTo>
+                    <a:pt x="2391712" y="634876"/>
+                  </a:lnTo>
+                  <a:lnTo>
+                    <a:pt x="2462057" y="645818"/>
+                  </a:lnTo>
+                  <a:lnTo>
+                    <a:pt x="2532401" y="656453"/>
+                  </a:lnTo>
+                  <a:lnTo>
+                    <a:pt x="2602746" y="666791"/>
+                  </a:lnTo>
+                  <a:lnTo>
+                    <a:pt x="2673090" y="676840"/>
+                  </a:lnTo>
+                  <a:lnTo>
+                    <a:pt x="2743435" y="686608"/>
+                  </a:lnTo>
+                  <a:lnTo>
+                    <a:pt x="2813779" y="696104"/>
+                  </a:lnTo>
+                  <a:lnTo>
+                    <a:pt x="2884124" y="705333"/>
+                  </a:lnTo>
+                  <a:lnTo>
+                    <a:pt x="2954468" y="714305"/>
+                  </a:lnTo>
+                  <a:lnTo>
+                    <a:pt x="3024813" y="723026"/>
+                  </a:lnTo>
+                  <a:lnTo>
+                    <a:pt x="3095157" y="727205"/>
+                  </a:lnTo>
+                  <a:lnTo>
+                    <a:pt x="3165502" y="727664"/>
+                  </a:lnTo>
+                  <a:lnTo>
+                    <a:pt x="3235846" y="728122"/>
+                  </a:lnTo>
+                  <a:lnTo>
+                    <a:pt x="3306191" y="728579"/>
+                  </a:lnTo>
+                  <a:lnTo>
+                    <a:pt x="3376535" y="729035"/>
+                  </a:lnTo>
+                  <a:lnTo>
+                    <a:pt x="3446880" y="729491"/>
+                  </a:lnTo>
+                  <a:lnTo>
+                    <a:pt x="3517224" y="729946"/>
+                  </a:lnTo>
+                  <a:lnTo>
+                    <a:pt x="3587569" y="730401"/>
+                  </a:lnTo>
+                  <a:lnTo>
+                    <a:pt x="3657913" y="730854"/>
+                  </a:lnTo>
+                  <a:lnTo>
+                    <a:pt x="3728257" y="731307"/>
+                  </a:lnTo>
+                  <a:lnTo>
+                    <a:pt x="3798602" y="731760"/>
+                  </a:lnTo>
+                  <a:lnTo>
+                    <a:pt x="3868946" y="732211"/>
+                  </a:lnTo>
+                  <a:lnTo>
+                    <a:pt x="3939291" y="732662"/>
+                  </a:lnTo>
+                  <a:lnTo>
+                    <a:pt x="4009635" y="733112"/>
+                  </a:lnTo>
+                  <a:lnTo>
+                    <a:pt x="4079980" y="733562"/>
+                  </a:lnTo>
+                  <a:lnTo>
+                    <a:pt x="4150324" y="734011"/>
+                  </a:lnTo>
+                  <a:lnTo>
+                    <a:pt x="4220669" y="734459"/>
+                  </a:lnTo>
+                  <a:lnTo>
+                    <a:pt x="4291013" y="734906"/>
+                  </a:lnTo>
+                  <a:lnTo>
+                    <a:pt x="4361358" y="735353"/>
+                  </a:lnTo>
+                  <a:lnTo>
+                    <a:pt x="4431702" y="735799"/>
+                  </a:lnTo>
+                  <a:lnTo>
+                    <a:pt x="4502047" y="736245"/>
+                  </a:lnTo>
+                  <a:lnTo>
+                    <a:pt x="4572391" y="736689"/>
+                  </a:lnTo>
+                  <a:lnTo>
+                    <a:pt x="4642736" y="737133"/>
+                  </a:lnTo>
+                  <a:lnTo>
+                    <a:pt x="4713080" y="737577"/>
+                  </a:lnTo>
+                  <a:lnTo>
+                    <a:pt x="4783425" y="738019"/>
+                  </a:lnTo>
+                  <a:lnTo>
+                    <a:pt x="4853769" y="738461"/>
+                  </a:lnTo>
+                  <a:lnTo>
+                    <a:pt x="4924114" y="738903"/>
+                  </a:lnTo>
+                  <a:lnTo>
+                    <a:pt x="4994458" y="739343"/>
+                  </a:lnTo>
+                  <a:lnTo>
+                    <a:pt x="5064803" y="739783"/>
+                  </a:lnTo>
+                  <a:lnTo>
+                    <a:pt x="5135147" y="740223"/>
+                  </a:lnTo>
+                  <a:lnTo>
+                    <a:pt x="5205492" y="740661"/>
+                  </a:lnTo>
+                  <a:lnTo>
+                    <a:pt x="5275836" y="741099"/>
+                  </a:lnTo>
+                  <a:lnTo>
+                    <a:pt x="5346181" y="741536"/>
+                  </a:lnTo>
+                  <a:lnTo>
+                    <a:pt x="5416525" y="741973"/>
+                  </a:lnTo>
+                  <a:lnTo>
+                    <a:pt x="5486870" y="742409"/>
+                  </a:lnTo>
+                  <a:lnTo>
+                    <a:pt x="5557214" y="742844"/>
+                  </a:lnTo>
+                  <a:lnTo>
+                    <a:pt x="5627559" y="743279"/>
+                  </a:lnTo>
+                  <a:lnTo>
+                    <a:pt x="5697903" y="743713"/>
+                  </a:lnTo>
+                  <a:lnTo>
+                    <a:pt x="5768248" y="744146"/>
+                  </a:lnTo>
+                  <a:lnTo>
+                    <a:pt x="5838592" y="744579"/>
+                  </a:lnTo>
+                  <a:lnTo>
+                    <a:pt x="5908937" y="745011"/>
+                  </a:lnTo>
+                  <a:lnTo>
+                    <a:pt x="5979281" y="745442"/>
+                  </a:lnTo>
+                  <a:lnTo>
+                    <a:pt x="6049626" y="745872"/>
+                  </a:lnTo>
+                  <a:lnTo>
+                    <a:pt x="6119970" y="746302"/>
+                  </a:lnTo>
+                  <a:lnTo>
+                    <a:pt x="6190315" y="746732"/>
+                  </a:lnTo>
+                  <a:lnTo>
+                    <a:pt x="6260659" y="747160"/>
+                  </a:lnTo>
+                  <a:lnTo>
+                    <a:pt x="6331004" y="747588"/>
+                  </a:lnTo>
+                  <a:lnTo>
+                    <a:pt x="6401348" y="748016"/>
+                  </a:lnTo>
+                  <a:lnTo>
+                    <a:pt x="6471693" y="748442"/>
+                  </a:lnTo>
+                  <a:lnTo>
+                    <a:pt x="6542037" y="748868"/>
+                  </a:lnTo>
+                  <a:lnTo>
+                    <a:pt x="6612382" y="749294"/>
+                  </a:lnTo>
+                  <a:lnTo>
+                    <a:pt x="6682726" y="749718"/>
+                  </a:lnTo>
+                  <a:lnTo>
+                    <a:pt x="6753071" y="750142"/>
+                  </a:lnTo>
+                  <a:lnTo>
+                    <a:pt x="6823415" y="750566"/>
+                  </a:lnTo>
+                  <a:lnTo>
+                    <a:pt x="6893760" y="750989"/>
+                  </a:lnTo>
+                  <a:lnTo>
+                    <a:pt x="6964104" y="751411"/>
                   </a:lnTo>
                 </a:path>
               </a:pathLst>
@@ -4326,312 +4036,637 @@
           </p:nvSpPr>
           <p:spPr>
             <a:xfrm>
-              <a:off x="1172049" y="3969303"/>
-              <a:ext cx="7090630" cy="1226229"/>
+              <a:off x="1235312" y="3080318"/>
+              <a:ext cx="6964104" cy="257988"/>
             </a:xfrm>
             <a:custGeom>
               <a:avLst/>
               <a:pathLst>
-                <a:path w="7090630" h="1226229">
+                <a:path w="6964104" h="257988">
+                  <a:moveTo>
+                    <a:pt x="6964104" y="257988"/>
+                  </a:moveTo>
+                  <a:lnTo>
+                    <a:pt x="6893760" y="256205"/>
+                  </a:lnTo>
+                  <a:lnTo>
+                    <a:pt x="6823415" y="254371"/>
+                  </a:lnTo>
+                  <a:lnTo>
+                    <a:pt x="6753071" y="252485"/>
+                  </a:lnTo>
+                  <a:lnTo>
+                    <a:pt x="6682726" y="250544"/>
+                  </a:lnTo>
+                  <a:lnTo>
+                    <a:pt x="6612382" y="248547"/>
+                  </a:lnTo>
+                  <a:lnTo>
+                    <a:pt x="6542037" y="246493"/>
+                  </a:lnTo>
+                  <a:lnTo>
+                    <a:pt x="6471693" y="244380"/>
+                  </a:lnTo>
+                  <a:lnTo>
+                    <a:pt x="6401348" y="242206"/>
+                  </a:lnTo>
+                  <a:lnTo>
+                    <a:pt x="6331004" y="239970"/>
+                  </a:lnTo>
+                  <a:lnTo>
+                    <a:pt x="6260659" y="237669"/>
+                  </a:lnTo>
+                  <a:lnTo>
+                    <a:pt x="6190315" y="235302"/>
+                  </a:lnTo>
+                  <a:lnTo>
+                    <a:pt x="6119970" y="232867"/>
+                  </a:lnTo>
+                  <a:lnTo>
+                    <a:pt x="6049626" y="230362"/>
+                  </a:lnTo>
+                  <a:lnTo>
+                    <a:pt x="5979281" y="227785"/>
+                  </a:lnTo>
+                  <a:lnTo>
+                    <a:pt x="5908937" y="225134"/>
+                  </a:lnTo>
+                  <a:lnTo>
+                    <a:pt x="5838592" y="222407"/>
+                  </a:lnTo>
+                  <a:lnTo>
+                    <a:pt x="5768248" y="219601"/>
+                  </a:lnTo>
+                  <a:lnTo>
+                    <a:pt x="5697903" y="216714"/>
+                  </a:lnTo>
+                  <a:lnTo>
+                    <a:pt x="5627559" y="213745"/>
+                  </a:lnTo>
+                  <a:lnTo>
+                    <a:pt x="5557214" y="210690"/>
+                  </a:lnTo>
+                  <a:lnTo>
+                    <a:pt x="5486870" y="207547"/>
+                  </a:lnTo>
+                  <a:lnTo>
+                    <a:pt x="5416525" y="204314"/>
+                  </a:lnTo>
+                  <a:lnTo>
+                    <a:pt x="5346181" y="200988"/>
+                  </a:lnTo>
+                  <a:lnTo>
+                    <a:pt x="5275836" y="197566"/>
+                  </a:lnTo>
+                  <a:lnTo>
+                    <a:pt x="5205492" y="194046"/>
+                  </a:lnTo>
+                  <a:lnTo>
+                    <a:pt x="5135147" y="190425"/>
+                  </a:lnTo>
+                  <a:lnTo>
+                    <a:pt x="5064803" y="186699"/>
+                  </a:lnTo>
+                  <a:lnTo>
+                    <a:pt x="4994458" y="182867"/>
+                  </a:lnTo>
+                  <a:lnTo>
+                    <a:pt x="4924114" y="178924"/>
+                  </a:lnTo>
+                  <a:lnTo>
+                    <a:pt x="4853769" y="174868"/>
+                  </a:lnTo>
+                  <a:lnTo>
+                    <a:pt x="4783425" y="170695"/>
+                  </a:lnTo>
+                  <a:lnTo>
+                    <a:pt x="4713080" y="166402"/>
+                  </a:lnTo>
+                  <a:lnTo>
+                    <a:pt x="4642736" y="161986"/>
+                  </a:lnTo>
+                  <a:lnTo>
+                    <a:pt x="4572391" y="157443"/>
+                  </a:lnTo>
+                  <a:lnTo>
+                    <a:pt x="4502047" y="152769"/>
+                  </a:lnTo>
+                  <a:lnTo>
+                    <a:pt x="4431702" y="147960"/>
+                  </a:lnTo>
+                  <a:lnTo>
+                    <a:pt x="4361358" y="143014"/>
+                  </a:lnTo>
+                  <a:lnTo>
+                    <a:pt x="4291013" y="137925"/>
+                  </a:lnTo>
+                  <a:lnTo>
+                    <a:pt x="4220669" y="132689"/>
+                  </a:lnTo>
+                  <a:lnTo>
+                    <a:pt x="4150324" y="127304"/>
+                  </a:lnTo>
+                  <a:lnTo>
+                    <a:pt x="4079980" y="121763"/>
+                  </a:lnTo>
+                  <a:lnTo>
+                    <a:pt x="4009635" y="116063"/>
+                  </a:lnTo>
+                  <a:lnTo>
+                    <a:pt x="3939291" y="110199"/>
+                  </a:lnTo>
+                  <a:lnTo>
+                    <a:pt x="3868946" y="104167"/>
+                  </a:lnTo>
+                  <a:lnTo>
+                    <a:pt x="3798602" y="97961"/>
+                  </a:lnTo>
+                  <a:lnTo>
+                    <a:pt x="3728257" y="91576"/>
+                  </a:lnTo>
+                  <a:lnTo>
+                    <a:pt x="3657913" y="85008"/>
+                  </a:lnTo>
+                  <a:lnTo>
+                    <a:pt x="3587569" y="78251"/>
+                  </a:lnTo>
+                  <a:lnTo>
+                    <a:pt x="3517224" y="71300"/>
+                  </a:lnTo>
+                  <a:lnTo>
+                    <a:pt x="3446880" y="64149"/>
+                  </a:lnTo>
+                  <a:lnTo>
+                    <a:pt x="3376535" y="56792"/>
+                  </a:lnTo>
+                  <a:lnTo>
+                    <a:pt x="3306191" y="49224"/>
+                  </a:lnTo>
+                  <a:lnTo>
+                    <a:pt x="3235846" y="41438"/>
+                  </a:lnTo>
+                  <a:lnTo>
+                    <a:pt x="3165502" y="33428"/>
+                  </a:lnTo>
+                  <a:lnTo>
+                    <a:pt x="3095157" y="25188"/>
+                  </a:lnTo>
+                  <a:lnTo>
+                    <a:pt x="3024813" y="20430"/>
+                  </a:lnTo>
+                  <a:lnTo>
+                    <a:pt x="2954468" y="19970"/>
+                  </a:lnTo>
+                  <a:lnTo>
+                    <a:pt x="2884124" y="19510"/>
+                  </a:lnTo>
+                  <a:lnTo>
+                    <a:pt x="2813779" y="19048"/>
+                  </a:lnTo>
+                  <a:lnTo>
+                    <a:pt x="2743435" y="18586"/>
+                  </a:lnTo>
+                  <a:lnTo>
+                    <a:pt x="2673090" y="18123"/>
+                  </a:lnTo>
+                  <a:lnTo>
+                    <a:pt x="2602746" y="17660"/>
+                  </a:lnTo>
+                  <a:lnTo>
+                    <a:pt x="2532401" y="17196"/>
+                  </a:lnTo>
+                  <a:lnTo>
+                    <a:pt x="2462057" y="16731"/>
+                  </a:lnTo>
+                  <a:lnTo>
+                    <a:pt x="2391712" y="16265"/>
+                  </a:lnTo>
+                  <a:lnTo>
+                    <a:pt x="2321368" y="15799"/>
+                  </a:lnTo>
+                  <a:lnTo>
+                    <a:pt x="2251023" y="15332"/>
+                  </a:lnTo>
+                  <a:lnTo>
+                    <a:pt x="2180679" y="14864"/>
+                  </a:lnTo>
+                  <a:lnTo>
+                    <a:pt x="2110334" y="14395"/>
+                  </a:lnTo>
+                  <a:lnTo>
+                    <a:pt x="2039990" y="13926"/>
+                  </a:lnTo>
+                  <a:lnTo>
+                    <a:pt x="1969645" y="13456"/>
+                  </a:lnTo>
+                  <a:lnTo>
+                    <a:pt x="1899301" y="12985"/>
+                  </a:lnTo>
+                  <a:lnTo>
+                    <a:pt x="1828956" y="12514"/>
+                  </a:lnTo>
+                  <a:lnTo>
+                    <a:pt x="1758612" y="12042"/>
+                  </a:lnTo>
+                  <a:lnTo>
+                    <a:pt x="1688267" y="11569"/>
+                  </a:lnTo>
+                  <a:lnTo>
+                    <a:pt x="1617923" y="11095"/>
+                  </a:lnTo>
+                  <a:lnTo>
+                    <a:pt x="1547578" y="10621"/>
+                  </a:lnTo>
+                  <a:lnTo>
+                    <a:pt x="1477234" y="10146"/>
+                  </a:lnTo>
+                  <a:lnTo>
+                    <a:pt x="1406889" y="9670"/>
+                  </a:lnTo>
+                  <a:lnTo>
+                    <a:pt x="1336545" y="9194"/>
+                  </a:lnTo>
+                  <a:lnTo>
+                    <a:pt x="1266200" y="8716"/>
+                  </a:lnTo>
+                  <a:lnTo>
+                    <a:pt x="1195856" y="8238"/>
+                  </a:lnTo>
+                  <a:lnTo>
+                    <a:pt x="1125511" y="7760"/>
+                  </a:lnTo>
+                  <a:lnTo>
+                    <a:pt x="1055167" y="7280"/>
+                  </a:lnTo>
+                  <a:lnTo>
+                    <a:pt x="984822" y="6800"/>
+                  </a:lnTo>
+                  <a:lnTo>
+                    <a:pt x="914478" y="6319"/>
+                  </a:lnTo>
+                  <a:lnTo>
+                    <a:pt x="844133" y="5837"/>
+                  </a:lnTo>
+                  <a:lnTo>
+                    <a:pt x="773789" y="5355"/>
+                  </a:lnTo>
+                  <a:lnTo>
+                    <a:pt x="703444" y="4872"/>
+                  </a:lnTo>
+                  <a:lnTo>
+                    <a:pt x="633100" y="4388"/>
+                  </a:lnTo>
+                  <a:lnTo>
+                    <a:pt x="562755" y="3903"/>
+                  </a:lnTo>
+                  <a:lnTo>
+                    <a:pt x="492411" y="3418"/>
+                  </a:lnTo>
+                  <a:lnTo>
+                    <a:pt x="422066" y="2932"/>
+                  </a:lnTo>
+                  <a:lnTo>
+                    <a:pt x="351722" y="2445"/>
+                  </a:lnTo>
+                  <a:lnTo>
+                    <a:pt x="281377" y="1957"/>
+                  </a:lnTo>
+                  <a:lnTo>
+                    <a:pt x="211033" y="1469"/>
+                  </a:lnTo>
+                  <a:lnTo>
+                    <a:pt x="140688" y="980"/>
+                  </a:lnTo>
+                  <a:lnTo>
+                    <a:pt x="70344" y="490"/>
+                  </a:lnTo>
+                  <a:lnTo>
+                    <a:pt x="0" y="0"/>
+                  </a:lnTo>
+                </a:path>
+              </a:pathLst>
+            </a:custGeom>
+          </p:spPr>
+          <p:txBody>
+            <a:bodyPr/>
+            <a:lstStyle/>
+            <a:p/>
+          </p:txBody>
+        </p:sp>
+        <p:sp>
+          <p:nvSpPr>
+            <p:cNvPr id="26" name="pl26"/>
+            <p:cNvSpPr/>
+            <p:nvPr/>
+          </p:nvSpPr>
+          <p:spPr>
+            <a:xfrm>
+              <a:off x="1235312" y="2827241"/>
+              <a:ext cx="6964104" cy="442517"/>
+            </a:xfrm>
+            <a:custGeom>
+              <a:avLst/>
+              <a:pathLst>
+                <a:path w="6964104" h="442517">
                   <a:moveTo>
                     <a:pt x="0" y="0"/>
                   </a:moveTo>
                   <a:lnTo>
-                    <a:pt x="71622" y="23551"/>
-                  </a:lnTo>
-                  <a:lnTo>
-                    <a:pt x="143245" y="46754"/>
-                  </a:lnTo>
-                  <a:lnTo>
-                    <a:pt x="214867" y="69613"/>
-                  </a:lnTo>
-                  <a:lnTo>
-                    <a:pt x="286490" y="92132"/>
-                  </a:lnTo>
-                  <a:lnTo>
-                    <a:pt x="358112" y="114318"/>
-                  </a:lnTo>
-                  <a:lnTo>
-                    <a:pt x="429735" y="136174"/>
-                  </a:lnTo>
-                  <a:lnTo>
-                    <a:pt x="501357" y="157706"/>
-                  </a:lnTo>
-                  <a:lnTo>
-                    <a:pt x="572980" y="178919"/>
-                  </a:lnTo>
-                  <a:lnTo>
-                    <a:pt x="644602" y="199817"/>
-                  </a:lnTo>
-                  <a:lnTo>
-                    <a:pt x="716225" y="220406"/>
-                  </a:lnTo>
-                  <a:lnTo>
-                    <a:pt x="787847" y="240689"/>
-                  </a:lnTo>
-                  <a:lnTo>
-                    <a:pt x="859470" y="260671"/>
-                  </a:lnTo>
-                  <a:lnTo>
-                    <a:pt x="931092" y="280357"/>
-                  </a:lnTo>
-                  <a:lnTo>
-                    <a:pt x="1002715" y="299750"/>
-                  </a:lnTo>
-                  <a:lnTo>
-                    <a:pt x="1074337" y="318856"/>
-                  </a:lnTo>
-                  <a:lnTo>
-                    <a:pt x="1145960" y="337679"/>
-                  </a:lnTo>
-                  <a:lnTo>
-                    <a:pt x="1217582" y="356223"/>
-                  </a:lnTo>
-                  <a:lnTo>
-                    <a:pt x="1289205" y="374491"/>
-                  </a:lnTo>
-                  <a:lnTo>
-                    <a:pt x="1360827" y="392489"/>
-                  </a:lnTo>
-                  <a:lnTo>
-                    <a:pt x="1432450" y="410220"/>
-                  </a:lnTo>
-                  <a:lnTo>
-                    <a:pt x="1504073" y="427687"/>
-                  </a:lnTo>
-                  <a:lnTo>
-                    <a:pt x="1575695" y="444896"/>
-                  </a:lnTo>
-                  <a:lnTo>
-                    <a:pt x="1647318" y="461849"/>
-                  </a:lnTo>
-                  <a:lnTo>
-                    <a:pt x="1718940" y="478551"/>
-                  </a:lnTo>
-                  <a:lnTo>
-                    <a:pt x="1790563" y="495005"/>
-                  </a:lnTo>
-                  <a:lnTo>
-                    <a:pt x="1862185" y="511216"/>
-                  </a:lnTo>
-                  <a:lnTo>
-                    <a:pt x="1933808" y="527185"/>
-                  </a:lnTo>
-                  <a:lnTo>
-                    <a:pt x="2005430" y="542918"/>
-                  </a:lnTo>
-                  <a:lnTo>
-                    <a:pt x="2077053" y="558418"/>
-                  </a:lnTo>
-                  <a:lnTo>
-                    <a:pt x="2148675" y="573687"/>
-                  </a:lnTo>
-                  <a:lnTo>
-                    <a:pt x="2220298" y="588731"/>
-                  </a:lnTo>
-                  <a:lnTo>
-                    <a:pt x="2291920" y="603551"/>
-                  </a:lnTo>
-                  <a:lnTo>
-                    <a:pt x="2363543" y="618151"/>
-                  </a:lnTo>
-                  <a:lnTo>
-                    <a:pt x="2435165" y="632535"/>
-                  </a:lnTo>
-                  <a:lnTo>
-                    <a:pt x="2506788" y="646705"/>
-                  </a:lnTo>
-                  <a:lnTo>
-                    <a:pt x="2578410" y="660665"/>
-                  </a:lnTo>
-                  <a:lnTo>
-                    <a:pt x="2650033" y="674418"/>
-                  </a:lnTo>
-                  <a:lnTo>
-                    <a:pt x="2721655" y="687968"/>
-                  </a:lnTo>
-                  <a:lnTo>
-                    <a:pt x="2793278" y="701316"/>
-                  </a:lnTo>
-                  <a:lnTo>
-                    <a:pt x="2864901" y="714466"/>
-                  </a:lnTo>
-                  <a:lnTo>
-                    <a:pt x="2936523" y="727421"/>
-                  </a:lnTo>
-                  <a:lnTo>
-                    <a:pt x="3008146" y="740184"/>
-                  </a:lnTo>
-                  <a:lnTo>
-                    <a:pt x="3079768" y="752758"/>
-                  </a:lnTo>
-                  <a:lnTo>
-                    <a:pt x="3151391" y="765145"/>
-                  </a:lnTo>
-                  <a:lnTo>
-                    <a:pt x="3223013" y="777349"/>
-                  </a:lnTo>
-                  <a:lnTo>
-                    <a:pt x="3294636" y="789371"/>
-                  </a:lnTo>
-                  <a:lnTo>
-                    <a:pt x="3366258" y="801216"/>
-                  </a:lnTo>
-                  <a:lnTo>
-                    <a:pt x="3437881" y="812884"/>
-                  </a:lnTo>
-                  <a:lnTo>
-                    <a:pt x="3509503" y="824380"/>
-                  </a:lnTo>
-                  <a:lnTo>
-                    <a:pt x="3581126" y="835705"/>
-                  </a:lnTo>
-                  <a:lnTo>
-                    <a:pt x="3652748" y="846862"/>
-                  </a:lnTo>
-                  <a:lnTo>
-                    <a:pt x="3724371" y="857853"/>
-                  </a:lnTo>
-                  <a:lnTo>
-                    <a:pt x="3795993" y="868682"/>
-                  </a:lnTo>
-                  <a:lnTo>
-                    <a:pt x="3867616" y="879350"/>
-                  </a:lnTo>
-                  <a:lnTo>
-                    <a:pt x="3939238" y="889859"/>
-                  </a:lnTo>
-                  <a:lnTo>
-                    <a:pt x="4010861" y="900213"/>
-                  </a:lnTo>
-                  <a:lnTo>
-                    <a:pt x="4082483" y="910413"/>
-                  </a:lnTo>
-                  <a:lnTo>
-                    <a:pt x="4154106" y="920462"/>
-                  </a:lnTo>
-                  <a:lnTo>
-                    <a:pt x="4225729" y="930362"/>
-                  </a:lnTo>
-                  <a:lnTo>
-                    <a:pt x="4297351" y="940115"/>
-                  </a:lnTo>
-                  <a:lnTo>
-                    <a:pt x="4368974" y="949724"/>
-                  </a:lnTo>
-                  <a:lnTo>
-                    <a:pt x="4440596" y="959190"/>
-                  </a:lnTo>
-                  <a:lnTo>
-                    <a:pt x="4512219" y="968515"/>
-                  </a:lnTo>
-                  <a:lnTo>
-                    <a:pt x="4583841" y="977702"/>
-                  </a:lnTo>
-                  <a:lnTo>
-                    <a:pt x="4655464" y="986753"/>
-                  </a:lnTo>
-                  <a:lnTo>
-                    <a:pt x="4727086" y="995670"/>
-                  </a:lnTo>
-                  <a:lnTo>
-                    <a:pt x="4798709" y="1004454"/>
-                  </a:lnTo>
-                  <a:lnTo>
-                    <a:pt x="4870331" y="1013109"/>
-                  </a:lnTo>
-                  <a:lnTo>
-                    <a:pt x="4941954" y="1021634"/>
-                  </a:lnTo>
-                  <a:lnTo>
-                    <a:pt x="5013576" y="1030034"/>
-                  </a:lnTo>
-                  <a:lnTo>
-                    <a:pt x="5085199" y="1038309"/>
-                  </a:lnTo>
-                  <a:lnTo>
-                    <a:pt x="5156821" y="1046461"/>
-                  </a:lnTo>
-                  <a:lnTo>
-                    <a:pt x="5228444" y="1054492"/>
-                  </a:lnTo>
-                  <a:lnTo>
-                    <a:pt x="5300066" y="1062404"/>
-                  </a:lnTo>
-                  <a:lnTo>
-                    <a:pt x="5371689" y="1070199"/>
-                  </a:lnTo>
-                  <a:lnTo>
-                    <a:pt x="5443311" y="1077878"/>
-                  </a:lnTo>
-                  <a:lnTo>
-                    <a:pt x="5514934" y="1085443"/>
-                  </a:lnTo>
-                  <a:lnTo>
-                    <a:pt x="5586557" y="1092896"/>
-                  </a:lnTo>
-                  <a:lnTo>
-                    <a:pt x="5658179" y="1100238"/>
-                  </a:lnTo>
-                  <a:lnTo>
-                    <a:pt x="5729802" y="1107472"/>
-                  </a:lnTo>
-                  <a:lnTo>
-                    <a:pt x="5801424" y="1114598"/>
-                  </a:lnTo>
-                  <a:lnTo>
-                    <a:pt x="5873047" y="1121619"/>
-                  </a:lnTo>
-                  <a:lnTo>
-                    <a:pt x="5944669" y="1128535"/>
-                  </a:lnTo>
-                  <a:lnTo>
-                    <a:pt x="6016292" y="1135349"/>
-                  </a:lnTo>
-                  <a:lnTo>
-                    <a:pt x="6087914" y="1142062"/>
-                  </a:lnTo>
-                  <a:lnTo>
-                    <a:pt x="6159537" y="1148675"/>
-                  </a:lnTo>
-                  <a:lnTo>
-                    <a:pt x="6231159" y="1155190"/>
-                  </a:lnTo>
-                  <a:lnTo>
-                    <a:pt x="6302782" y="1161608"/>
-                  </a:lnTo>
-                  <a:lnTo>
-                    <a:pt x="6374404" y="1167932"/>
-                  </a:lnTo>
-                  <a:lnTo>
-                    <a:pt x="6446027" y="1174161"/>
-                  </a:lnTo>
-                  <a:lnTo>
-                    <a:pt x="6517649" y="1180298"/>
-                  </a:lnTo>
-                  <a:lnTo>
-                    <a:pt x="6589272" y="1186345"/>
-                  </a:lnTo>
-                  <a:lnTo>
-                    <a:pt x="6660894" y="1192301"/>
-                  </a:lnTo>
-                  <a:lnTo>
-                    <a:pt x="6732517" y="1198169"/>
-                  </a:lnTo>
-                  <a:lnTo>
-                    <a:pt x="6804139" y="1203950"/>
-                  </a:lnTo>
-                  <a:lnTo>
-                    <a:pt x="6875762" y="1209645"/>
-                  </a:lnTo>
-                  <a:lnTo>
-                    <a:pt x="6947385" y="1215256"/>
-                  </a:lnTo>
-                  <a:lnTo>
-                    <a:pt x="7019007" y="1220784"/>
-                  </a:lnTo>
-                  <a:lnTo>
-                    <a:pt x="7090630" y="1226229"/>
+                    <a:pt x="70344" y="8499"/>
+                  </a:lnTo>
+                  <a:lnTo>
+                    <a:pt x="140688" y="16872"/>
+                  </a:lnTo>
+                  <a:lnTo>
+                    <a:pt x="211033" y="25121"/>
+                  </a:lnTo>
+                  <a:lnTo>
+                    <a:pt x="281377" y="33248"/>
+                  </a:lnTo>
+                  <a:lnTo>
+                    <a:pt x="351722" y="41254"/>
+                  </a:lnTo>
+                  <a:lnTo>
+                    <a:pt x="422066" y="49142"/>
+                  </a:lnTo>
+                  <a:lnTo>
+                    <a:pt x="492411" y="56912"/>
+                  </a:lnTo>
+                  <a:lnTo>
+                    <a:pt x="562755" y="64567"/>
+                  </a:lnTo>
+                  <a:lnTo>
+                    <a:pt x="633100" y="72109"/>
+                  </a:lnTo>
+                  <a:lnTo>
+                    <a:pt x="703444" y="79539"/>
+                  </a:lnTo>
+                  <a:lnTo>
+                    <a:pt x="773789" y="86859"/>
+                  </a:lnTo>
+                  <a:lnTo>
+                    <a:pt x="844133" y="94070"/>
+                  </a:lnTo>
+                  <a:lnTo>
+                    <a:pt x="914478" y="101174"/>
+                  </a:lnTo>
+                  <a:lnTo>
+                    <a:pt x="984822" y="108173"/>
+                  </a:lnTo>
+                  <a:lnTo>
+                    <a:pt x="1055167" y="115067"/>
+                  </a:lnTo>
+                  <a:lnTo>
+                    <a:pt x="1125511" y="121860"/>
+                  </a:lnTo>
+                  <a:lnTo>
+                    <a:pt x="1195856" y="128552"/>
+                  </a:lnTo>
+                  <a:lnTo>
+                    <a:pt x="1266200" y="135145"/>
+                  </a:lnTo>
+                  <a:lnTo>
+                    <a:pt x="1336545" y="141640"/>
+                  </a:lnTo>
+                  <a:lnTo>
+                    <a:pt x="1406889" y="148038"/>
+                  </a:lnTo>
+                  <a:lnTo>
+                    <a:pt x="1477234" y="154342"/>
+                  </a:lnTo>
+                  <a:lnTo>
+                    <a:pt x="1547578" y="160552"/>
+                  </a:lnTo>
+                  <a:lnTo>
+                    <a:pt x="1617923" y="166670"/>
+                  </a:lnTo>
+                  <a:lnTo>
+                    <a:pt x="1688267" y="172698"/>
+                  </a:lnTo>
+                  <a:lnTo>
+                    <a:pt x="1758612" y="178635"/>
+                  </a:lnTo>
+                  <a:lnTo>
+                    <a:pt x="1828956" y="184485"/>
+                  </a:lnTo>
+                  <a:lnTo>
+                    <a:pt x="1899301" y="190248"/>
+                  </a:lnTo>
+                  <a:lnTo>
+                    <a:pt x="1969645" y="195926"/>
+                  </a:lnTo>
+                  <a:lnTo>
+                    <a:pt x="2039990" y="201520"/>
+                  </a:lnTo>
+                  <a:lnTo>
+                    <a:pt x="2110334" y="207030"/>
+                  </a:lnTo>
+                  <a:lnTo>
+                    <a:pt x="2180679" y="212459"/>
+                  </a:lnTo>
+                  <a:lnTo>
+                    <a:pt x="2251023" y="217807"/>
+                  </a:lnTo>
+                  <a:lnTo>
+                    <a:pt x="2321368" y="223076"/>
+                  </a:lnTo>
+                  <a:lnTo>
+                    <a:pt x="2391712" y="228267"/>
+                  </a:lnTo>
+                  <a:lnTo>
+                    <a:pt x="2462057" y="233380"/>
+                  </a:lnTo>
+                  <a:lnTo>
+                    <a:pt x="2532401" y="238418"/>
+                  </a:lnTo>
+                  <a:lnTo>
+                    <a:pt x="2602746" y="243381"/>
+                  </a:lnTo>
+                  <a:lnTo>
+                    <a:pt x="2673090" y="248271"/>
+                  </a:lnTo>
+                  <a:lnTo>
+                    <a:pt x="2743435" y="253088"/>
+                  </a:lnTo>
+                  <a:lnTo>
+                    <a:pt x="2813779" y="257834"/>
+                  </a:lnTo>
+                  <a:lnTo>
+                    <a:pt x="2884124" y="262509"/>
+                  </a:lnTo>
+                  <a:lnTo>
+                    <a:pt x="2954468" y="267115"/>
+                  </a:lnTo>
+                  <a:lnTo>
+                    <a:pt x="3024813" y="271652"/>
+                  </a:lnTo>
+                  <a:lnTo>
+                    <a:pt x="3095157" y="276123"/>
+                  </a:lnTo>
+                  <a:lnTo>
+                    <a:pt x="3165502" y="280527"/>
+                  </a:lnTo>
+                  <a:lnTo>
+                    <a:pt x="3235846" y="284865"/>
+                  </a:lnTo>
+                  <a:lnTo>
+                    <a:pt x="3306191" y="289140"/>
+                  </a:lnTo>
+                  <a:lnTo>
+                    <a:pt x="3376535" y="293350"/>
+                  </a:lnTo>
+                  <a:lnTo>
+                    <a:pt x="3446880" y="297499"/>
+                  </a:lnTo>
+                  <a:lnTo>
+                    <a:pt x="3517224" y="301586"/>
+                  </a:lnTo>
+                  <a:lnTo>
+                    <a:pt x="3587569" y="305612"/>
+                  </a:lnTo>
+                  <a:lnTo>
+                    <a:pt x="3657913" y="309579"/>
+                  </a:lnTo>
+                  <a:lnTo>
+                    <a:pt x="3728257" y="313486"/>
+                  </a:lnTo>
+                  <a:lnTo>
+                    <a:pt x="3798602" y="317336"/>
+                  </a:lnTo>
+                  <a:lnTo>
+                    <a:pt x="3868946" y="321129"/>
+                  </a:lnTo>
+                  <a:lnTo>
+                    <a:pt x="3939291" y="324865"/>
+                  </a:lnTo>
+                  <a:lnTo>
+                    <a:pt x="4009635" y="328546"/>
+                  </a:lnTo>
+                  <a:lnTo>
+                    <a:pt x="4079980" y="332173"/>
+                  </a:lnTo>
+                  <a:lnTo>
+                    <a:pt x="4150324" y="335746"/>
+                  </a:lnTo>
+                  <a:lnTo>
+                    <a:pt x="4220669" y="339265"/>
+                  </a:lnTo>
+                  <a:lnTo>
+                    <a:pt x="4291013" y="342733"/>
+                  </a:lnTo>
+                  <a:lnTo>
+                    <a:pt x="4361358" y="346149"/>
+                  </a:lnTo>
+                  <a:lnTo>
+                    <a:pt x="4431702" y="349514"/>
+                  </a:lnTo>
+                  <a:lnTo>
+                    <a:pt x="4502047" y="352829"/>
+                  </a:lnTo>
+                  <a:lnTo>
+                    <a:pt x="4572391" y="356096"/>
+                  </a:lnTo>
+                  <a:lnTo>
+                    <a:pt x="4642736" y="359314"/>
+                  </a:lnTo>
+                  <a:lnTo>
+                    <a:pt x="4713080" y="362484"/>
+                  </a:lnTo>
+                  <a:lnTo>
+                    <a:pt x="4783425" y="365607"/>
+                  </a:lnTo>
+                  <a:lnTo>
+                    <a:pt x="4853769" y="368684"/>
+                  </a:lnTo>
+                  <a:lnTo>
+                    <a:pt x="4924114" y="371715"/>
+                  </a:lnTo>
+                  <a:lnTo>
+                    <a:pt x="4994458" y="374701"/>
+                  </a:lnTo>
+                  <a:lnTo>
+                    <a:pt x="5064803" y="377643"/>
+                  </a:lnTo>
+                  <a:lnTo>
+                    <a:pt x="5135147" y="380541"/>
+                  </a:lnTo>
+                  <a:lnTo>
+                    <a:pt x="5205492" y="383396"/>
+                  </a:lnTo>
+                  <a:lnTo>
+                    <a:pt x="5275836" y="386209"/>
+                  </a:lnTo>
+                  <a:lnTo>
+                    <a:pt x="5346181" y="388980"/>
+                  </a:lnTo>
+                  <a:lnTo>
+                    <a:pt x="5416525" y="391710"/>
+                  </a:lnTo>
+                  <a:lnTo>
+                    <a:pt x="5486870" y="394400"/>
+                  </a:lnTo>
+                  <a:lnTo>
+                    <a:pt x="5557214" y="397050"/>
+                  </a:lnTo>
+                  <a:lnTo>
+                    <a:pt x="5627559" y="399660"/>
+                  </a:lnTo>
+                  <a:lnTo>
+                    <a:pt x="5697903" y="402232"/>
+                  </a:lnTo>
+                  <a:lnTo>
+                    <a:pt x="5768248" y="404765"/>
+                  </a:lnTo>
+                  <a:lnTo>
+                    <a:pt x="5838592" y="407261"/>
+                  </a:lnTo>
+                  <a:lnTo>
+                    <a:pt x="5908937" y="409720"/>
+                  </a:lnTo>
+                  <a:lnTo>
+                    <a:pt x="5979281" y="412143"/>
+                  </a:lnTo>
+                  <a:lnTo>
+                    <a:pt x="6049626" y="414529"/>
+                  </a:lnTo>
+                  <a:lnTo>
+                    <a:pt x="6119970" y="416881"/>
+                  </a:lnTo>
+                  <a:lnTo>
+                    <a:pt x="6190315" y="419197"/>
+                  </a:lnTo>
+                  <a:lnTo>
+                    <a:pt x="6260659" y="421479"/>
+                  </a:lnTo>
+                  <a:lnTo>
+                    <a:pt x="6331004" y="423727"/>
+                  </a:lnTo>
+                  <a:lnTo>
+                    <a:pt x="6401348" y="425942"/>
+                  </a:lnTo>
+                  <a:lnTo>
+                    <a:pt x="6471693" y="428124"/>
+                  </a:lnTo>
+                  <a:lnTo>
+                    <a:pt x="6542037" y="430273"/>
+                  </a:lnTo>
+                  <a:lnTo>
+                    <a:pt x="6612382" y="432391"/>
+                  </a:lnTo>
+                  <a:lnTo>
+                    <a:pt x="6682726" y="434477"/>
+                  </a:lnTo>
+                  <a:lnTo>
+                    <a:pt x="6753071" y="436532"/>
+                  </a:lnTo>
+                  <a:lnTo>
+                    <a:pt x="6823415" y="438557"/>
+                  </a:lnTo>
+                  <a:lnTo>
+                    <a:pt x="6893760" y="440552"/>
+                  </a:lnTo>
+                  <a:lnTo>
+                    <a:pt x="6964104" y="442517"/>
                   </a:lnTo>
                 </a:path>
               </a:pathLst>
@@ -4654,27 +4689,27 @@
         </p:sp>
         <p:sp>
           <p:nvSpPr>
-            <p:cNvPr id="26" name="pl26"/>
+            <p:cNvPr id="27" name="pl27"/>
             <p:cNvSpPr/>
             <p:nvPr/>
           </p:nvSpPr>
           <p:spPr>
             <a:xfrm>
-              <a:off x="817517" y="4727786"/>
-              <a:ext cx="7799693" cy="0"/>
+              <a:off x="887106" y="3100960"/>
+              <a:ext cx="7660515" cy="0"/>
             </a:xfrm>
             <a:custGeom>
               <a:avLst/>
               <a:pathLst>
-                <a:path w="7799693" h="0">
+                <a:path w="7660515" h="0">
                   <a:moveTo>
                     <a:pt x="0" y="0"/>
                   </a:moveTo>
                   <a:lnTo>
-                    <a:pt x="7799693" y="0"/>
-                  </a:lnTo>
-                  <a:lnTo>
-                    <a:pt x="7799693" y="0"/>
+                    <a:pt x="7660515" y="0"/>
+                  </a:lnTo>
+                  <a:lnTo>
+                    <a:pt x="7660515" y="0"/>
                   </a:lnTo>
                 </a:path>
               </a:pathLst>
@@ -4697,21 +4732,21 @@
         </p:sp>
         <p:sp>
           <p:nvSpPr>
-            <p:cNvPr id="27" name="pl27"/>
+            <p:cNvPr id="28" name="pl28"/>
             <p:cNvSpPr/>
             <p:nvPr/>
           </p:nvSpPr>
           <p:spPr>
             <a:xfrm>
-              <a:off x="4284781" y="2073503"/>
-              <a:ext cx="0" cy="3649639"/>
+              <a:off x="4292500" y="2143092"/>
+              <a:ext cx="0" cy="1317069"/>
             </a:xfrm>
             <a:custGeom>
               <a:avLst/>
               <a:pathLst>
-                <a:path w="0" h="3649639">
+                <a:path w="0" h="1317069">
                   <a:moveTo>
-                    <a:pt x="0" y="3649639"/>
+                    <a:pt x="0" y="1317069"/>
                   </a:moveTo>
                   <a:lnTo>
                     <a:pt x="0" y="0"/>
@@ -4740,21 +4775,21 @@
         </p:sp>
         <p:sp>
           <p:nvSpPr>
-            <p:cNvPr id="28" name="pl28"/>
+            <p:cNvPr id="29" name="pl29"/>
             <p:cNvSpPr/>
             <p:nvPr/>
           </p:nvSpPr>
           <p:spPr>
             <a:xfrm>
-              <a:off x="3095906" y="2073503"/>
-              <a:ext cx="0" cy="3649639"/>
+              <a:off x="3124839" y="2143092"/>
+              <a:ext cx="0" cy="1317069"/>
             </a:xfrm>
             <a:custGeom>
               <a:avLst/>
               <a:pathLst>
-                <a:path w="0" h="3649639">
+                <a:path w="0" h="1317069">
                   <a:moveTo>
-                    <a:pt x="0" y="3649639"/>
+                    <a:pt x="0" y="1317069"/>
                   </a:moveTo>
                   <a:lnTo>
                     <a:pt x="0" y="0"/>
@@ -4783,21 +4818,21 @@
         </p:sp>
         <p:sp>
           <p:nvSpPr>
-            <p:cNvPr id="29" name="pl29"/>
+            <p:cNvPr id="30" name="pl30"/>
             <p:cNvSpPr/>
             <p:nvPr/>
           </p:nvSpPr>
           <p:spPr>
             <a:xfrm>
-              <a:off x="5522967" y="2073503"/>
-              <a:ext cx="0" cy="3649639"/>
+              <a:off x="5508592" y="2143092"/>
+              <a:ext cx="0" cy="1317069"/>
             </a:xfrm>
             <a:custGeom>
               <a:avLst/>
               <a:pathLst>
-                <a:path w="0" h="3649639">
+                <a:path w="0" h="1317069">
                   <a:moveTo>
-                    <a:pt x="0" y="3649639"/>
+                    <a:pt x="0" y="1317069"/>
                   </a:moveTo>
                   <a:lnTo>
                     <a:pt x="0" y="0"/>
@@ -4826,13 +4861,13 @@
         </p:sp>
         <p:sp>
           <p:nvSpPr>
-            <p:cNvPr id="30" name="tx30"/>
+            <p:cNvPr id="31" name="tx31"/>
             <p:cNvSpPr/>
             <p:nvPr/>
           </p:nvSpPr>
           <p:spPr>
             <a:xfrm>
-              <a:off x="692708" y="5517199"/>
+              <a:off x="762297" y="3360243"/>
               <a:ext cx="62179" cy="80101"/>
             </a:xfrm>
             <a:prstGeom prst="rect">
@@ -4872,13 +4907,13 @@
         </p:sp>
         <p:sp>
           <p:nvSpPr>
-            <p:cNvPr id="31" name="tx31"/>
+            <p:cNvPr id="32" name="tx32"/>
             <p:cNvSpPr/>
             <p:nvPr/>
           </p:nvSpPr>
           <p:spPr>
             <a:xfrm>
-              <a:off x="692708" y="4687735"/>
+              <a:off x="762297" y="3060909"/>
               <a:ext cx="62179" cy="80101"/>
             </a:xfrm>
             <a:prstGeom prst="rect">
@@ -4918,13 +4953,13 @@
         </p:sp>
         <p:sp>
           <p:nvSpPr>
-            <p:cNvPr id="32" name="tx32"/>
+            <p:cNvPr id="33" name="tx33"/>
             <p:cNvSpPr/>
             <p:nvPr/>
           </p:nvSpPr>
           <p:spPr>
             <a:xfrm>
-              <a:off x="692708" y="3858272"/>
+              <a:off x="762297" y="2761575"/>
               <a:ext cx="62179" cy="80101"/>
             </a:xfrm>
             <a:prstGeom prst="rect">
@@ -4964,13 +4999,13 @@
         </p:sp>
         <p:sp>
           <p:nvSpPr>
-            <p:cNvPr id="33" name="tx33"/>
+            <p:cNvPr id="34" name="tx34"/>
             <p:cNvSpPr/>
             <p:nvPr/>
           </p:nvSpPr>
           <p:spPr>
             <a:xfrm>
-              <a:off x="692708" y="3028808"/>
+              <a:off x="762297" y="2462242"/>
               <a:ext cx="62179" cy="80101"/>
             </a:xfrm>
             <a:prstGeom prst="rect">
@@ -5010,13 +5045,13 @@
         </p:sp>
         <p:sp>
           <p:nvSpPr>
-            <p:cNvPr id="34" name="tx34"/>
+            <p:cNvPr id="35" name="tx35"/>
             <p:cNvSpPr/>
             <p:nvPr/>
           </p:nvSpPr>
           <p:spPr>
             <a:xfrm>
-              <a:off x="692708" y="2199345"/>
+              <a:off x="762297" y="2162908"/>
               <a:ext cx="62179" cy="80101"/>
             </a:xfrm>
             <a:prstGeom prst="rect">
@@ -5056,13 +5091,13 @@
         </p:sp>
         <p:sp>
           <p:nvSpPr>
-            <p:cNvPr id="35" name="tx35"/>
+            <p:cNvPr id="36" name="tx36"/>
             <p:cNvSpPr/>
             <p:nvPr/>
           </p:nvSpPr>
           <p:spPr>
             <a:xfrm>
-              <a:off x="2152181" y="5785772"/>
+              <a:off x="2196512" y="3522791"/>
               <a:ext cx="161574" cy="80101"/>
             </a:xfrm>
             <a:prstGeom prst="rect">
@@ -5102,13 +5137,13 @@
         </p:sp>
         <p:sp>
           <p:nvSpPr>
-            <p:cNvPr id="36" name="tx36"/>
+            <p:cNvPr id="37" name="tx37"/>
             <p:cNvSpPr/>
             <p:nvPr/>
           </p:nvSpPr>
           <p:spPr>
             <a:xfrm>
-              <a:off x="3884104" y="5785772"/>
+              <a:off x="3897531" y="3522791"/>
               <a:ext cx="161574" cy="80101"/>
             </a:xfrm>
             <a:prstGeom prst="rect">
@@ -5148,13 +5183,13 @@
         </p:sp>
         <p:sp>
           <p:nvSpPr>
-            <p:cNvPr id="37" name="tx37"/>
+            <p:cNvPr id="38" name="tx38"/>
             <p:cNvSpPr/>
             <p:nvPr/>
           </p:nvSpPr>
           <p:spPr>
             <a:xfrm>
-              <a:off x="5665725" y="5785772"/>
+              <a:off x="5648248" y="3522791"/>
               <a:ext cx="62179" cy="80101"/>
             </a:xfrm>
             <a:prstGeom prst="rect">
@@ -5194,13 +5229,13 @@
         </p:sp>
         <p:sp>
           <p:nvSpPr>
-            <p:cNvPr id="38" name="tx38"/>
+            <p:cNvPr id="39" name="tx39"/>
             <p:cNvSpPr/>
             <p:nvPr/>
           </p:nvSpPr>
           <p:spPr>
             <a:xfrm>
-              <a:off x="7366559" y="5785772"/>
+              <a:off x="7318177" y="3522791"/>
               <a:ext cx="124358" cy="80101"/>
             </a:xfrm>
             <a:prstGeom prst="rect">
@@ -5240,13 +5275,13 @@
         </p:sp>
         <p:sp>
           <p:nvSpPr>
-            <p:cNvPr id="39" name="tx39"/>
+            <p:cNvPr id="40" name="tx40"/>
             <p:cNvSpPr/>
             <p:nvPr/>
           </p:nvSpPr>
           <p:spPr>
             <a:xfrm>
-              <a:off x="1561815" y="5925448"/>
+              <a:off x="1561815" y="3662467"/>
               <a:ext cx="6311097" cy="100218"/>
             </a:xfrm>
             <a:prstGeom prst="rect">
@@ -5286,13 +5321,13 @@
         </p:sp>
         <p:sp>
           <p:nvSpPr>
-            <p:cNvPr id="40" name="tx40"/>
+            <p:cNvPr id="41" name="tx41"/>
             <p:cNvSpPr/>
             <p:nvPr/>
           </p:nvSpPr>
           <p:spPr>
             <a:xfrm rot="-5400000">
-              <a:off x="68446" y="3848213"/>
+              <a:off x="138035" y="2751517"/>
               <a:ext cx="1016904" cy="100218"/>
             </a:xfrm>
             <a:prstGeom prst="rect">
@@ -5332,13 +5367,13 @@
         </p:sp>
         <p:sp>
           <p:nvSpPr>
-            <p:cNvPr id="41" name="tx41"/>
+            <p:cNvPr id="42" name="tx42"/>
             <p:cNvSpPr/>
             <p:nvPr/>
           </p:nvSpPr>
           <p:spPr>
             <a:xfrm>
-              <a:off x="817517" y="1896563"/>
+              <a:off x="887106" y="1966152"/>
               <a:ext cx="6959864" cy="82021"/>
             </a:xfrm>
             <a:prstGeom prst="rect">
@@ -5378,13 +5413,3789 @@
         </p:sp>
         <p:sp>
           <p:nvSpPr>
-            <p:cNvPr id="42" name="tx42"/>
+            <p:cNvPr id="43" name="tx43"/>
             <p:cNvSpPr/>
             <p:nvPr/>
           </p:nvSpPr>
           <p:spPr>
             <a:xfrm>
-              <a:off x="817517" y="1669789"/>
+              <a:off x="887106" y="1739378"/>
+              <a:ext cx="2783982" cy="120152"/>
+            </a:xfrm>
+            <a:prstGeom prst="rect">
+              <a:avLst/>
+            </a:prstGeom>
+            <a:noFill/>
+          </p:spPr>
+          <p:txBody>
+            <a:bodyPr lIns="0" rIns="0" tIns="0" bIns="0" anchorCtr="1" anchor="ctr" wrap="none"/>
+            <a:lstStyle/>
+            <a:p>
+              <a:pPr algn="l" marL="0" marR="0" indent="0">
+                <a:lnSpc>
+                  <a:spcPts val="1320"/>
+                </a:lnSpc>
+                <a:spcBef>
+                  <a:spcPts val="0"/>
+                </a:spcBef>
+                <a:spcAft>
+                  <a:spcPts val="0"/>
+                </a:spcAft>
+              </a:pPr>
+              <a:r>
+                <a:rPr sz="1320">
+                  <a:solidFill>
+                    <a:srgbClr val="000000">
+                      <a:alpha val="100000"/>
+                    </a:srgbClr>
+                  </a:solidFill>
+                  <a:latin typeface="Helvetica"/>
+                  <a:cs typeface="Helvetica"/>
+                </a:rPr>
+                <a:t>AKI Grade 2 (Sensitivity, Carboplatin)</a:t>
+              </a:r>
+            </a:p>
+          </p:txBody>
+        </p:sp>
+        <p:sp>
+          <p:nvSpPr>
+            <p:cNvPr id="44" name="pl44"/>
+            <p:cNvSpPr/>
+            <p:nvPr/>
+          </p:nvSpPr>
+          <p:spPr>
+            <a:xfrm>
+              <a:off x="887106" y="5444019"/>
+              <a:ext cx="7660515" cy="0"/>
+            </a:xfrm>
+            <a:custGeom>
+              <a:avLst/>
+              <a:pathLst>
+                <a:path w="7660515" h="0">
+                  <a:moveTo>
+                    <a:pt x="0" y="0"/>
+                  </a:moveTo>
+                  <a:lnTo>
+                    <a:pt x="7660515" y="0"/>
+                  </a:lnTo>
+                  <a:lnTo>
+                    <a:pt x="7660515" y="0"/>
+                  </a:lnTo>
+                </a:path>
+              </a:pathLst>
+            </a:custGeom>
+            <a:ln w="6775" cap="flat">
+              <a:solidFill>
+                <a:srgbClr val="EBEBEB">
+                  <a:alpha val="100000"/>
+                </a:srgbClr>
+              </a:solidFill>
+              <a:prstDash val="solid"/>
+              <a:round/>
+            </a:ln>
+          </p:spPr>
+          <p:txBody>
+            <a:bodyPr/>
+            <a:lstStyle/>
+            <a:p/>
+          </p:txBody>
+        </p:sp>
+        <p:sp>
+          <p:nvSpPr>
+            <p:cNvPr id="45" name="pl45"/>
+            <p:cNvSpPr/>
+            <p:nvPr/>
+          </p:nvSpPr>
+          <p:spPr>
+            <a:xfrm>
+              <a:off x="887106" y="5144686"/>
+              <a:ext cx="7660515" cy="0"/>
+            </a:xfrm>
+            <a:custGeom>
+              <a:avLst/>
+              <a:pathLst>
+                <a:path w="7660515" h="0">
+                  <a:moveTo>
+                    <a:pt x="0" y="0"/>
+                  </a:moveTo>
+                  <a:lnTo>
+                    <a:pt x="7660515" y="0"/>
+                  </a:lnTo>
+                  <a:lnTo>
+                    <a:pt x="7660515" y="0"/>
+                  </a:lnTo>
+                </a:path>
+              </a:pathLst>
+            </a:custGeom>
+            <a:ln w="6775" cap="flat">
+              <a:solidFill>
+                <a:srgbClr val="EBEBEB">
+                  <a:alpha val="100000"/>
+                </a:srgbClr>
+              </a:solidFill>
+              <a:prstDash val="solid"/>
+              <a:round/>
+            </a:ln>
+          </p:spPr>
+          <p:txBody>
+            <a:bodyPr/>
+            <a:lstStyle/>
+            <a:p/>
+          </p:txBody>
+        </p:sp>
+        <p:sp>
+          <p:nvSpPr>
+            <p:cNvPr id="46" name="pl46"/>
+            <p:cNvSpPr/>
+            <p:nvPr/>
+          </p:nvSpPr>
+          <p:spPr>
+            <a:xfrm>
+              <a:off x="887106" y="4845352"/>
+              <a:ext cx="7660515" cy="0"/>
+            </a:xfrm>
+            <a:custGeom>
+              <a:avLst/>
+              <a:pathLst>
+                <a:path w="7660515" h="0">
+                  <a:moveTo>
+                    <a:pt x="0" y="0"/>
+                  </a:moveTo>
+                  <a:lnTo>
+                    <a:pt x="7660515" y="0"/>
+                  </a:lnTo>
+                  <a:lnTo>
+                    <a:pt x="7660515" y="0"/>
+                  </a:lnTo>
+                </a:path>
+              </a:pathLst>
+            </a:custGeom>
+            <a:ln w="6775" cap="flat">
+              <a:solidFill>
+                <a:srgbClr val="EBEBEB">
+                  <a:alpha val="100000"/>
+                </a:srgbClr>
+              </a:solidFill>
+              <a:prstDash val="solid"/>
+              <a:round/>
+            </a:ln>
+          </p:spPr>
+          <p:txBody>
+            <a:bodyPr/>
+            <a:lstStyle/>
+            <a:p/>
+          </p:txBody>
+        </p:sp>
+        <p:sp>
+          <p:nvSpPr>
+            <p:cNvPr id="47" name="pl47"/>
+            <p:cNvSpPr/>
+            <p:nvPr/>
+          </p:nvSpPr>
+          <p:spPr>
+            <a:xfrm>
+              <a:off x="887106" y="4546018"/>
+              <a:ext cx="7660515" cy="0"/>
+            </a:xfrm>
+            <a:custGeom>
+              <a:avLst/>
+              <a:pathLst>
+                <a:path w="7660515" h="0">
+                  <a:moveTo>
+                    <a:pt x="0" y="0"/>
+                  </a:moveTo>
+                  <a:lnTo>
+                    <a:pt x="7660515" y="0"/>
+                  </a:lnTo>
+                  <a:lnTo>
+                    <a:pt x="7660515" y="0"/>
+                  </a:lnTo>
+                </a:path>
+              </a:pathLst>
+            </a:custGeom>
+            <a:ln w="6775" cap="flat">
+              <a:solidFill>
+                <a:srgbClr val="EBEBEB">
+                  <a:alpha val="100000"/>
+                </a:srgbClr>
+              </a:solidFill>
+              <a:prstDash val="solid"/>
+              <a:round/>
+            </a:ln>
+          </p:spPr>
+          <p:txBody>
+            <a:bodyPr/>
+            <a:lstStyle/>
+            <a:p/>
+          </p:txBody>
+        </p:sp>
+        <p:sp>
+          <p:nvSpPr>
+            <p:cNvPr id="48" name="pl48"/>
+            <p:cNvSpPr/>
+            <p:nvPr/>
+          </p:nvSpPr>
+          <p:spPr>
+            <a:xfrm>
+              <a:off x="1001535" y="4336484"/>
+              <a:ext cx="0" cy="1317069"/>
+            </a:xfrm>
+            <a:custGeom>
+              <a:avLst/>
+              <a:pathLst>
+                <a:path w="0" h="1317069">
+                  <a:moveTo>
+                    <a:pt x="0" y="1317069"/>
+                  </a:moveTo>
+                  <a:lnTo>
+                    <a:pt x="0" y="0"/>
+                  </a:lnTo>
+                  <a:lnTo>
+                    <a:pt x="0" y="0"/>
+                  </a:lnTo>
+                </a:path>
+              </a:pathLst>
+            </a:custGeom>
+            <a:ln w="6775" cap="flat">
+              <a:solidFill>
+                <a:srgbClr val="EBEBEB">
+                  <a:alpha val="100000"/>
+                </a:srgbClr>
+              </a:solidFill>
+              <a:prstDash val="solid"/>
+              <a:round/>
+            </a:ln>
+          </p:spPr>
+          <p:txBody>
+            <a:bodyPr/>
+            <a:lstStyle/>
+            <a:p/>
+          </p:txBody>
+        </p:sp>
+        <p:sp>
+          <p:nvSpPr>
+            <p:cNvPr id="49" name="pl49"/>
+            <p:cNvSpPr/>
+            <p:nvPr/>
+          </p:nvSpPr>
+          <p:spPr>
+            <a:xfrm>
+              <a:off x="1852045" y="4336484"/>
+              <a:ext cx="0" cy="1317069"/>
+            </a:xfrm>
+            <a:custGeom>
+              <a:avLst/>
+              <a:pathLst>
+                <a:path w="0" h="1317069">
+                  <a:moveTo>
+                    <a:pt x="0" y="1317069"/>
+                  </a:moveTo>
+                  <a:lnTo>
+                    <a:pt x="0" y="0"/>
+                  </a:lnTo>
+                  <a:lnTo>
+                    <a:pt x="0" y="0"/>
+                  </a:lnTo>
+                </a:path>
+              </a:pathLst>
+            </a:custGeom>
+            <a:ln w="6775" cap="flat">
+              <a:solidFill>
+                <a:srgbClr val="EBEBEB">
+                  <a:alpha val="100000"/>
+                </a:srgbClr>
+              </a:solidFill>
+              <a:prstDash val="solid"/>
+              <a:round/>
+            </a:ln>
+          </p:spPr>
+          <p:txBody>
+            <a:bodyPr/>
+            <a:lstStyle/>
+            <a:p/>
+          </p:txBody>
+        </p:sp>
+        <p:sp>
+          <p:nvSpPr>
+            <p:cNvPr id="50" name="pl50"/>
+            <p:cNvSpPr/>
+            <p:nvPr/>
+          </p:nvSpPr>
+          <p:spPr>
+            <a:xfrm>
+              <a:off x="2702554" y="4336484"/>
+              <a:ext cx="0" cy="1317069"/>
+            </a:xfrm>
+            <a:custGeom>
+              <a:avLst/>
+              <a:pathLst>
+                <a:path w="0" h="1317069">
+                  <a:moveTo>
+                    <a:pt x="0" y="1317069"/>
+                  </a:moveTo>
+                  <a:lnTo>
+                    <a:pt x="0" y="0"/>
+                  </a:lnTo>
+                  <a:lnTo>
+                    <a:pt x="0" y="0"/>
+                  </a:lnTo>
+                </a:path>
+              </a:pathLst>
+            </a:custGeom>
+            <a:ln w="6775" cap="flat">
+              <a:solidFill>
+                <a:srgbClr val="EBEBEB">
+                  <a:alpha val="100000"/>
+                </a:srgbClr>
+              </a:solidFill>
+              <a:prstDash val="solid"/>
+              <a:round/>
+            </a:ln>
+          </p:spPr>
+          <p:txBody>
+            <a:bodyPr/>
+            <a:lstStyle/>
+            <a:p/>
+          </p:txBody>
+        </p:sp>
+        <p:sp>
+          <p:nvSpPr>
+            <p:cNvPr id="51" name="pl51"/>
+            <p:cNvSpPr/>
+            <p:nvPr/>
+          </p:nvSpPr>
+          <p:spPr>
+            <a:xfrm>
+              <a:off x="3553064" y="4336484"/>
+              <a:ext cx="0" cy="1317069"/>
+            </a:xfrm>
+            <a:custGeom>
+              <a:avLst/>
+              <a:pathLst>
+                <a:path w="0" h="1317069">
+                  <a:moveTo>
+                    <a:pt x="0" y="1317069"/>
+                  </a:moveTo>
+                  <a:lnTo>
+                    <a:pt x="0" y="0"/>
+                  </a:lnTo>
+                  <a:lnTo>
+                    <a:pt x="0" y="0"/>
+                  </a:lnTo>
+                </a:path>
+              </a:pathLst>
+            </a:custGeom>
+            <a:ln w="6775" cap="flat">
+              <a:solidFill>
+                <a:srgbClr val="EBEBEB">
+                  <a:alpha val="100000"/>
+                </a:srgbClr>
+              </a:solidFill>
+              <a:prstDash val="solid"/>
+              <a:round/>
+            </a:ln>
+          </p:spPr>
+          <p:txBody>
+            <a:bodyPr/>
+            <a:lstStyle/>
+            <a:p/>
+          </p:txBody>
+        </p:sp>
+        <p:sp>
+          <p:nvSpPr>
+            <p:cNvPr id="52" name="pl52"/>
+            <p:cNvSpPr/>
+            <p:nvPr/>
+          </p:nvSpPr>
+          <p:spPr>
+            <a:xfrm>
+              <a:off x="4403573" y="4336484"/>
+              <a:ext cx="0" cy="1317069"/>
+            </a:xfrm>
+            <a:custGeom>
+              <a:avLst/>
+              <a:pathLst>
+                <a:path w="0" h="1317069">
+                  <a:moveTo>
+                    <a:pt x="0" y="1317069"/>
+                  </a:moveTo>
+                  <a:lnTo>
+                    <a:pt x="0" y="0"/>
+                  </a:lnTo>
+                  <a:lnTo>
+                    <a:pt x="0" y="0"/>
+                  </a:lnTo>
+                </a:path>
+              </a:pathLst>
+            </a:custGeom>
+            <a:ln w="6775" cap="flat">
+              <a:solidFill>
+                <a:srgbClr val="EBEBEB">
+                  <a:alpha val="100000"/>
+                </a:srgbClr>
+              </a:solidFill>
+              <a:prstDash val="solid"/>
+              <a:round/>
+            </a:ln>
+          </p:spPr>
+          <p:txBody>
+            <a:bodyPr/>
+            <a:lstStyle/>
+            <a:p/>
+          </p:txBody>
+        </p:sp>
+        <p:sp>
+          <p:nvSpPr>
+            <p:cNvPr id="53" name="pl53"/>
+            <p:cNvSpPr/>
+            <p:nvPr/>
+          </p:nvSpPr>
+          <p:spPr>
+            <a:xfrm>
+              <a:off x="5254082" y="4336484"/>
+              <a:ext cx="0" cy="1317069"/>
+            </a:xfrm>
+            <a:custGeom>
+              <a:avLst/>
+              <a:pathLst>
+                <a:path w="0" h="1317069">
+                  <a:moveTo>
+                    <a:pt x="0" y="1317069"/>
+                  </a:moveTo>
+                  <a:lnTo>
+                    <a:pt x="0" y="0"/>
+                  </a:lnTo>
+                  <a:lnTo>
+                    <a:pt x="0" y="0"/>
+                  </a:lnTo>
+                </a:path>
+              </a:pathLst>
+            </a:custGeom>
+            <a:ln w="6775" cap="flat">
+              <a:solidFill>
+                <a:srgbClr val="EBEBEB">
+                  <a:alpha val="100000"/>
+                </a:srgbClr>
+              </a:solidFill>
+              <a:prstDash val="solid"/>
+              <a:round/>
+            </a:ln>
+          </p:spPr>
+          <p:txBody>
+            <a:bodyPr/>
+            <a:lstStyle/>
+            <a:p/>
+          </p:txBody>
+        </p:sp>
+        <p:sp>
+          <p:nvSpPr>
+            <p:cNvPr id="54" name="pl54"/>
+            <p:cNvSpPr/>
+            <p:nvPr/>
+          </p:nvSpPr>
+          <p:spPr>
+            <a:xfrm>
+              <a:off x="6104592" y="4336484"/>
+              <a:ext cx="0" cy="1317069"/>
+            </a:xfrm>
+            <a:custGeom>
+              <a:avLst/>
+              <a:pathLst>
+                <a:path w="0" h="1317069">
+                  <a:moveTo>
+                    <a:pt x="0" y="1317069"/>
+                  </a:moveTo>
+                  <a:lnTo>
+                    <a:pt x="0" y="0"/>
+                  </a:lnTo>
+                  <a:lnTo>
+                    <a:pt x="0" y="0"/>
+                  </a:lnTo>
+                </a:path>
+              </a:pathLst>
+            </a:custGeom>
+            <a:ln w="6775" cap="flat">
+              <a:solidFill>
+                <a:srgbClr val="EBEBEB">
+                  <a:alpha val="100000"/>
+                </a:srgbClr>
+              </a:solidFill>
+              <a:prstDash val="solid"/>
+              <a:round/>
+            </a:ln>
+          </p:spPr>
+          <p:txBody>
+            <a:bodyPr/>
+            <a:lstStyle/>
+            <a:p/>
+          </p:txBody>
+        </p:sp>
+        <p:sp>
+          <p:nvSpPr>
+            <p:cNvPr id="55" name="pl55"/>
+            <p:cNvSpPr/>
+            <p:nvPr/>
+          </p:nvSpPr>
+          <p:spPr>
+            <a:xfrm>
+              <a:off x="6955101" y="4336484"/>
+              <a:ext cx="0" cy="1317069"/>
+            </a:xfrm>
+            <a:custGeom>
+              <a:avLst/>
+              <a:pathLst>
+                <a:path w="0" h="1317069">
+                  <a:moveTo>
+                    <a:pt x="0" y="1317069"/>
+                  </a:moveTo>
+                  <a:lnTo>
+                    <a:pt x="0" y="0"/>
+                  </a:lnTo>
+                  <a:lnTo>
+                    <a:pt x="0" y="0"/>
+                  </a:lnTo>
+                </a:path>
+              </a:pathLst>
+            </a:custGeom>
+            <a:ln w="6775" cap="flat">
+              <a:solidFill>
+                <a:srgbClr val="EBEBEB">
+                  <a:alpha val="100000"/>
+                </a:srgbClr>
+              </a:solidFill>
+              <a:prstDash val="solid"/>
+              <a:round/>
+            </a:ln>
+          </p:spPr>
+          <p:txBody>
+            <a:bodyPr/>
+            <a:lstStyle/>
+            <a:p/>
+          </p:txBody>
+        </p:sp>
+        <p:sp>
+          <p:nvSpPr>
+            <p:cNvPr id="56" name="pl56"/>
+            <p:cNvSpPr/>
+            <p:nvPr/>
+          </p:nvSpPr>
+          <p:spPr>
+            <a:xfrm>
+              <a:off x="7805611" y="4336484"/>
+              <a:ext cx="0" cy="1317069"/>
+            </a:xfrm>
+            <a:custGeom>
+              <a:avLst/>
+              <a:pathLst>
+                <a:path w="0" h="1317069">
+                  <a:moveTo>
+                    <a:pt x="0" y="1317069"/>
+                  </a:moveTo>
+                  <a:lnTo>
+                    <a:pt x="0" y="0"/>
+                  </a:lnTo>
+                  <a:lnTo>
+                    <a:pt x="0" y="0"/>
+                  </a:lnTo>
+                </a:path>
+              </a:pathLst>
+            </a:custGeom>
+            <a:ln w="6775" cap="flat">
+              <a:solidFill>
+                <a:srgbClr val="EBEBEB">
+                  <a:alpha val="100000"/>
+                </a:srgbClr>
+              </a:solidFill>
+              <a:prstDash val="solid"/>
+              <a:round/>
+            </a:ln>
+          </p:spPr>
+          <p:txBody>
+            <a:bodyPr/>
+            <a:lstStyle/>
+            <a:p/>
+          </p:txBody>
+        </p:sp>
+        <p:sp>
+          <p:nvSpPr>
+            <p:cNvPr id="57" name="pl57"/>
+            <p:cNvSpPr/>
+            <p:nvPr/>
+          </p:nvSpPr>
+          <p:spPr>
+            <a:xfrm>
+              <a:off x="887106" y="5593686"/>
+              <a:ext cx="7660515" cy="0"/>
+            </a:xfrm>
+            <a:custGeom>
+              <a:avLst/>
+              <a:pathLst>
+                <a:path w="7660515" h="0">
+                  <a:moveTo>
+                    <a:pt x="0" y="0"/>
+                  </a:moveTo>
+                  <a:lnTo>
+                    <a:pt x="7660515" y="0"/>
+                  </a:lnTo>
+                  <a:lnTo>
+                    <a:pt x="7660515" y="0"/>
+                  </a:lnTo>
+                </a:path>
+              </a:pathLst>
+            </a:custGeom>
+            <a:ln w="13550" cap="flat">
+              <a:solidFill>
+                <a:srgbClr val="EBEBEB">
+                  <a:alpha val="100000"/>
+                </a:srgbClr>
+              </a:solidFill>
+              <a:prstDash val="solid"/>
+              <a:round/>
+            </a:ln>
+          </p:spPr>
+          <p:txBody>
+            <a:bodyPr/>
+            <a:lstStyle/>
+            <a:p/>
+          </p:txBody>
+        </p:sp>
+        <p:sp>
+          <p:nvSpPr>
+            <p:cNvPr id="58" name="pl58"/>
+            <p:cNvSpPr/>
+            <p:nvPr/>
+          </p:nvSpPr>
+          <p:spPr>
+            <a:xfrm>
+              <a:off x="887106" y="5294352"/>
+              <a:ext cx="7660515" cy="0"/>
+            </a:xfrm>
+            <a:custGeom>
+              <a:avLst/>
+              <a:pathLst>
+                <a:path w="7660515" h="0">
+                  <a:moveTo>
+                    <a:pt x="0" y="0"/>
+                  </a:moveTo>
+                  <a:lnTo>
+                    <a:pt x="7660515" y="0"/>
+                  </a:lnTo>
+                  <a:lnTo>
+                    <a:pt x="7660515" y="0"/>
+                  </a:lnTo>
+                </a:path>
+              </a:pathLst>
+            </a:custGeom>
+            <a:ln w="13550" cap="flat">
+              <a:solidFill>
+                <a:srgbClr val="EBEBEB">
+                  <a:alpha val="100000"/>
+                </a:srgbClr>
+              </a:solidFill>
+              <a:prstDash val="solid"/>
+              <a:round/>
+            </a:ln>
+          </p:spPr>
+          <p:txBody>
+            <a:bodyPr/>
+            <a:lstStyle/>
+            <a:p/>
+          </p:txBody>
+        </p:sp>
+        <p:sp>
+          <p:nvSpPr>
+            <p:cNvPr id="59" name="pl59"/>
+            <p:cNvSpPr/>
+            <p:nvPr/>
+          </p:nvSpPr>
+          <p:spPr>
+            <a:xfrm>
+              <a:off x="887106" y="4995019"/>
+              <a:ext cx="7660515" cy="0"/>
+            </a:xfrm>
+            <a:custGeom>
+              <a:avLst/>
+              <a:pathLst>
+                <a:path w="7660515" h="0">
+                  <a:moveTo>
+                    <a:pt x="0" y="0"/>
+                  </a:moveTo>
+                  <a:lnTo>
+                    <a:pt x="7660515" y="0"/>
+                  </a:lnTo>
+                  <a:lnTo>
+                    <a:pt x="7660515" y="0"/>
+                  </a:lnTo>
+                </a:path>
+              </a:pathLst>
+            </a:custGeom>
+            <a:ln w="13550" cap="flat">
+              <a:solidFill>
+                <a:srgbClr val="EBEBEB">
+                  <a:alpha val="100000"/>
+                </a:srgbClr>
+              </a:solidFill>
+              <a:prstDash val="solid"/>
+              <a:round/>
+            </a:ln>
+          </p:spPr>
+          <p:txBody>
+            <a:bodyPr/>
+            <a:lstStyle/>
+            <a:p/>
+          </p:txBody>
+        </p:sp>
+        <p:sp>
+          <p:nvSpPr>
+            <p:cNvPr id="60" name="pl60"/>
+            <p:cNvSpPr/>
+            <p:nvPr/>
+          </p:nvSpPr>
+          <p:spPr>
+            <a:xfrm>
+              <a:off x="887106" y="4695685"/>
+              <a:ext cx="7660515" cy="0"/>
+            </a:xfrm>
+            <a:custGeom>
+              <a:avLst/>
+              <a:pathLst>
+                <a:path w="7660515" h="0">
+                  <a:moveTo>
+                    <a:pt x="0" y="0"/>
+                  </a:moveTo>
+                  <a:lnTo>
+                    <a:pt x="7660515" y="0"/>
+                  </a:lnTo>
+                  <a:lnTo>
+                    <a:pt x="7660515" y="0"/>
+                  </a:lnTo>
+                </a:path>
+              </a:pathLst>
+            </a:custGeom>
+            <a:ln w="13550" cap="flat">
+              <a:solidFill>
+                <a:srgbClr val="EBEBEB">
+                  <a:alpha val="100000"/>
+                </a:srgbClr>
+              </a:solidFill>
+              <a:prstDash val="solid"/>
+              <a:round/>
+            </a:ln>
+          </p:spPr>
+          <p:txBody>
+            <a:bodyPr/>
+            <a:lstStyle/>
+            <a:p/>
+          </p:txBody>
+        </p:sp>
+        <p:sp>
+          <p:nvSpPr>
+            <p:cNvPr id="61" name="pl61"/>
+            <p:cNvSpPr/>
+            <p:nvPr/>
+          </p:nvSpPr>
+          <p:spPr>
+            <a:xfrm>
+              <a:off x="887106" y="4396351"/>
+              <a:ext cx="7660515" cy="0"/>
+            </a:xfrm>
+            <a:custGeom>
+              <a:avLst/>
+              <a:pathLst>
+                <a:path w="7660515" h="0">
+                  <a:moveTo>
+                    <a:pt x="0" y="0"/>
+                  </a:moveTo>
+                  <a:lnTo>
+                    <a:pt x="7660515" y="0"/>
+                  </a:lnTo>
+                  <a:lnTo>
+                    <a:pt x="7660515" y="0"/>
+                  </a:lnTo>
+                </a:path>
+              </a:pathLst>
+            </a:custGeom>
+            <a:ln w="13550" cap="flat">
+              <a:solidFill>
+                <a:srgbClr val="EBEBEB">
+                  <a:alpha val="100000"/>
+                </a:srgbClr>
+              </a:solidFill>
+              <a:prstDash val="solid"/>
+              <a:round/>
+            </a:ln>
+          </p:spPr>
+          <p:txBody>
+            <a:bodyPr/>
+            <a:lstStyle/>
+            <a:p/>
+          </p:txBody>
+        </p:sp>
+        <p:sp>
+          <p:nvSpPr>
+            <p:cNvPr id="62" name="pl62"/>
+            <p:cNvSpPr/>
+            <p:nvPr/>
+          </p:nvSpPr>
+          <p:spPr>
+            <a:xfrm>
+              <a:off x="1426790" y="4336484"/>
+              <a:ext cx="0" cy="1317069"/>
+            </a:xfrm>
+            <a:custGeom>
+              <a:avLst/>
+              <a:pathLst>
+                <a:path w="0" h="1317069">
+                  <a:moveTo>
+                    <a:pt x="0" y="1317069"/>
+                  </a:moveTo>
+                  <a:lnTo>
+                    <a:pt x="0" y="0"/>
+                  </a:lnTo>
+                  <a:lnTo>
+                    <a:pt x="0" y="0"/>
+                  </a:lnTo>
+                </a:path>
+              </a:pathLst>
+            </a:custGeom>
+            <a:ln w="13550" cap="flat">
+              <a:solidFill>
+                <a:srgbClr val="EBEBEB">
+                  <a:alpha val="100000"/>
+                </a:srgbClr>
+              </a:solidFill>
+              <a:prstDash val="solid"/>
+              <a:round/>
+            </a:ln>
+          </p:spPr>
+          <p:txBody>
+            <a:bodyPr/>
+            <a:lstStyle/>
+            <a:p/>
+          </p:txBody>
+        </p:sp>
+        <p:sp>
+          <p:nvSpPr>
+            <p:cNvPr id="63" name="pl63"/>
+            <p:cNvSpPr/>
+            <p:nvPr/>
+          </p:nvSpPr>
+          <p:spPr>
+            <a:xfrm>
+              <a:off x="2277299" y="4336484"/>
+              <a:ext cx="0" cy="1317069"/>
+            </a:xfrm>
+            <a:custGeom>
+              <a:avLst/>
+              <a:pathLst>
+                <a:path w="0" h="1317069">
+                  <a:moveTo>
+                    <a:pt x="0" y="1317069"/>
+                  </a:moveTo>
+                  <a:lnTo>
+                    <a:pt x="0" y="0"/>
+                  </a:lnTo>
+                  <a:lnTo>
+                    <a:pt x="0" y="0"/>
+                  </a:lnTo>
+                </a:path>
+              </a:pathLst>
+            </a:custGeom>
+            <a:ln w="13550" cap="flat">
+              <a:solidFill>
+                <a:srgbClr val="EBEBEB">
+                  <a:alpha val="100000"/>
+                </a:srgbClr>
+              </a:solidFill>
+              <a:prstDash val="solid"/>
+              <a:round/>
+            </a:ln>
+          </p:spPr>
+          <p:txBody>
+            <a:bodyPr/>
+            <a:lstStyle/>
+            <a:p/>
+          </p:txBody>
+        </p:sp>
+        <p:sp>
+          <p:nvSpPr>
+            <p:cNvPr id="64" name="pl64"/>
+            <p:cNvSpPr/>
+            <p:nvPr/>
+          </p:nvSpPr>
+          <p:spPr>
+            <a:xfrm>
+              <a:off x="3127809" y="4336484"/>
+              <a:ext cx="0" cy="1317069"/>
+            </a:xfrm>
+            <a:custGeom>
+              <a:avLst/>
+              <a:pathLst>
+                <a:path w="0" h="1317069">
+                  <a:moveTo>
+                    <a:pt x="0" y="1317069"/>
+                  </a:moveTo>
+                  <a:lnTo>
+                    <a:pt x="0" y="0"/>
+                  </a:lnTo>
+                  <a:lnTo>
+                    <a:pt x="0" y="0"/>
+                  </a:lnTo>
+                </a:path>
+              </a:pathLst>
+            </a:custGeom>
+            <a:ln w="13550" cap="flat">
+              <a:solidFill>
+                <a:srgbClr val="EBEBEB">
+                  <a:alpha val="100000"/>
+                </a:srgbClr>
+              </a:solidFill>
+              <a:prstDash val="solid"/>
+              <a:round/>
+            </a:ln>
+          </p:spPr>
+          <p:txBody>
+            <a:bodyPr/>
+            <a:lstStyle/>
+            <a:p/>
+          </p:txBody>
+        </p:sp>
+        <p:sp>
+          <p:nvSpPr>
+            <p:cNvPr id="65" name="pl65"/>
+            <p:cNvSpPr/>
+            <p:nvPr/>
+          </p:nvSpPr>
+          <p:spPr>
+            <a:xfrm>
+              <a:off x="3978318" y="4336484"/>
+              <a:ext cx="0" cy="1317069"/>
+            </a:xfrm>
+            <a:custGeom>
+              <a:avLst/>
+              <a:pathLst>
+                <a:path w="0" h="1317069">
+                  <a:moveTo>
+                    <a:pt x="0" y="1317069"/>
+                  </a:moveTo>
+                  <a:lnTo>
+                    <a:pt x="0" y="0"/>
+                  </a:lnTo>
+                  <a:lnTo>
+                    <a:pt x="0" y="0"/>
+                  </a:lnTo>
+                </a:path>
+              </a:pathLst>
+            </a:custGeom>
+            <a:ln w="13550" cap="flat">
+              <a:solidFill>
+                <a:srgbClr val="EBEBEB">
+                  <a:alpha val="100000"/>
+                </a:srgbClr>
+              </a:solidFill>
+              <a:prstDash val="solid"/>
+              <a:round/>
+            </a:ln>
+          </p:spPr>
+          <p:txBody>
+            <a:bodyPr/>
+            <a:lstStyle/>
+            <a:p/>
+          </p:txBody>
+        </p:sp>
+        <p:sp>
+          <p:nvSpPr>
+            <p:cNvPr id="66" name="pl66"/>
+            <p:cNvSpPr/>
+            <p:nvPr/>
+          </p:nvSpPr>
+          <p:spPr>
+            <a:xfrm>
+              <a:off x="4828828" y="4336484"/>
+              <a:ext cx="0" cy="1317069"/>
+            </a:xfrm>
+            <a:custGeom>
+              <a:avLst/>
+              <a:pathLst>
+                <a:path w="0" h="1317069">
+                  <a:moveTo>
+                    <a:pt x="0" y="1317069"/>
+                  </a:moveTo>
+                  <a:lnTo>
+                    <a:pt x="0" y="0"/>
+                  </a:lnTo>
+                  <a:lnTo>
+                    <a:pt x="0" y="0"/>
+                  </a:lnTo>
+                </a:path>
+              </a:pathLst>
+            </a:custGeom>
+            <a:ln w="13550" cap="flat">
+              <a:solidFill>
+                <a:srgbClr val="EBEBEB">
+                  <a:alpha val="100000"/>
+                </a:srgbClr>
+              </a:solidFill>
+              <a:prstDash val="solid"/>
+              <a:round/>
+            </a:ln>
+          </p:spPr>
+          <p:txBody>
+            <a:bodyPr/>
+            <a:lstStyle/>
+            <a:p/>
+          </p:txBody>
+        </p:sp>
+        <p:sp>
+          <p:nvSpPr>
+            <p:cNvPr id="67" name="pl67"/>
+            <p:cNvSpPr/>
+            <p:nvPr/>
+          </p:nvSpPr>
+          <p:spPr>
+            <a:xfrm>
+              <a:off x="5679337" y="4336484"/>
+              <a:ext cx="0" cy="1317069"/>
+            </a:xfrm>
+            <a:custGeom>
+              <a:avLst/>
+              <a:pathLst>
+                <a:path w="0" h="1317069">
+                  <a:moveTo>
+                    <a:pt x="0" y="1317069"/>
+                  </a:moveTo>
+                  <a:lnTo>
+                    <a:pt x="0" y="0"/>
+                  </a:lnTo>
+                  <a:lnTo>
+                    <a:pt x="0" y="0"/>
+                  </a:lnTo>
+                </a:path>
+              </a:pathLst>
+            </a:custGeom>
+            <a:ln w="13550" cap="flat">
+              <a:solidFill>
+                <a:srgbClr val="EBEBEB">
+                  <a:alpha val="100000"/>
+                </a:srgbClr>
+              </a:solidFill>
+              <a:prstDash val="solid"/>
+              <a:round/>
+            </a:ln>
+          </p:spPr>
+          <p:txBody>
+            <a:bodyPr/>
+            <a:lstStyle/>
+            <a:p/>
+          </p:txBody>
+        </p:sp>
+        <p:sp>
+          <p:nvSpPr>
+            <p:cNvPr id="68" name="pl68"/>
+            <p:cNvSpPr/>
+            <p:nvPr/>
+          </p:nvSpPr>
+          <p:spPr>
+            <a:xfrm>
+              <a:off x="6529847" y="4336484"/>
+              <a:ext cx="0" cy="1317069"/>
+            </a:xfrm>
+            <a:custGeom>
+              <a:avLst/>
+              <a:pathLst>
+                <a:path w="0" h="1317069">
+                  <a:moveTo>
+                    <a:pt x="0" y="1317069"/>
+                  </a:moveTo>
+                  <a:lnTo>
+                    <a:pt x="0" y="0"/>
+                  </a:lnTo>
+                  <a:lnTo>
+                    <a:pt x="0" y="0"/>
+                  </a:lnTo>
+                </a:path>
+              </a:pathLst>
+            </a:custGeom>
+            <a:ln w="13550" cap="flat">
+              <a:solidFill>
+                <a:srgbClr val="EBEBEB">
+                  <a:alpha val="100000"/>
+                </a:srgbClr>
+              </a:solidFill>
+              <a:prstDash val="solid"/>
+              <a:round/>
+            </a:ln>
+          </p:spPr>
+          <p:txBody>
+            <a:bodyPr/>
+            <a:lstStyle/>
+            <a:p/>
+          </p:txBody>
+        </p:sp>
+        <p:sp>
+          <p:nvSpPr>
+            <p:cNvPr id="69" name="pl69"/>
+            <p:cNvSpPr/>
+            <p:nvPr/>
+          </p:nvSpPr>
+          <p:spPr>
+            <a:xfrm>
+              <a:off x="7380356" y="4336484"/>
+              <a:ext cx="0" cy="1317069"/>
+            </a:xfrm>
+            <a:custGeom>
+              <a:avLst/>
+              <a:pathLst>
+                <a:path w="0" h="1317069">
+                  <a:moveTo>
+                    <a:pt x="0" y="1317069"/>
+                  </a:moveTo>
+                  <a:lnTo>
+                    <a:pt x="0" y="0"/>
+                  </a:lnTo>
+                  <a:lnTo>
+                    <a:pt x="0" y="0"/>
+                  </a:lnTo>
+                </a:path>
+              </a:pathLst>
+            </a:custGeom>
+            <a:ln w="13550" cap="flat">
+              <a:solidFill>
+                <a:srgbClr val="EBEBEB">
+                  <a:alpha val="100000"/>
+                </a:srgbClr>
+              </a:solidFill>
+              <a:prstDash val="solid"/>
+              <a:round/>
+            </a:ln>
+          </p:spPr>
+          <p:txBody>
+            <a:bodyPr/>
+            <a:lstStyle/>
+            <a:p/>
+          </p:txBody>
+        </p:sp>
+        <p:sp>
+          <p:nvSpPr>
+            <p:cNvPr id="70" name="pl70"/>
+            <p:cNvSpPr/>
+            <p:nvPr/>
+          </p:nvSpPr>
+          <p:spPr>
+            <a:xfrm>
+              <a:off x="8230866" y="4336484"/>
+              <a:ext cx="0" cy="1317069"/>
+            </a:xfrm>
+            <a:custGeom>
+              <a:avLst/>
+              <a:pathLst>
+                <a:path w="0" h="1317069">
+                  <a:moveTo>
+                    <a:pt x="0" y="1317069"/>
+                  </a:moveTo>
+                  <a:lnTo>
+                    <a:pt x="0" y="0"/>
+                  </a:lnTo>
+                  <a:lnTo>
+                    <a:pt x="0" y="0"/>
+                  </a:lnTo>
+                </a:path>
+              </a:pathLst>
+            </a:custGeom>
+            <a:ln w="13550" cap="flat">
+              <a:solidFill>
+                <a:srgbClr val="EBEBEB">
+                  <a:alpha val="100000"/>
+                </a:srgbClr>
+              </a:solidFill>
+              <a:prstDash val="solid"/>
+              <a:round/>
+            </a:ln>
+          </p:spPr>
+          <p:txBody>
+            <a:bodyPr/>
+            <a:lstStyle/>
+            <a:p/>
+          </p:txBody>
+        </p:sp>
+        <p:sp>
+          <p:nvSpPr>
+            <p:cNvPr id="71" name="pg71"/>
+            <p:cNvSpPr/>
+            <p:nvPr/>
+          </p:nvSpPr>
+          <p:spPr>
+            <a:xfrm>
+              <a:off x="1235312" y="4567394"/>
+              <a:ext cx="6964104" cy="964303"/>
+            </a:xfrm>
+            <a:custGeom>
+              <a:avLst/>
+              <a:pathLst>
+                <a:path w="6964104" h="964303">
+                  <a:moveTo>
+                    <a:pt x="0" y="0"/>
+                  </a:moveTo>
+                  <a:lnTo>
+                    <a:pt x="70344" y="28687"/>
+                  </a:lnTo>
+                  <a:lnTo>
+                    <a:pt x="140688" y="56574"/>
+                  </a:lnTo>
+                  <a:lnTo>
+                    <a:pt x="211033" y="83680"/>
+                  </a:lnTo>
+                  <a:lnTo>
+                    <a:pt x="281377" y="110029"/>
+                  </a:lnTo>
+                  <a:lnTo>
+                    <a:pt x="351722" y="135641"/>
+                  </a:lnTo>
+                  <a:lnTo>
+                    <a:pt x="422066" y="160538"/>
+                  </a:lnTo>
+                  <a:lnTo>
+                    <a:pt x="492411" y="184738"/>
+                  </a:lnTo>
+                  <a:lnTo>
+                    <a:pt x="562755" y="208262"/>
+                  </a:lnTo>
+                  <a:lnTo>
+                    <a:pt x="633100" y="231128"/>
+                  </a:lnTo>
+                  <a:lnTo>
+                    <a:pt x="703444" y="253356"/>
+                  </a:lnTo>
+                  <a:lnTo>
+                    <a:pt x="773789" y="274961"/>
+                  </a:lnTo>
+                  <a:lnTo>
+                    <a:pt x="844133" y="295963"/>
+                  </a:lnTo>
+                  <a:lnTo>
+                    <a:pt x="914478" y="316378"/>
+                  </a:lnTo>
+                  <a:lnTo>
+                    <a:pt x="984822" y="336223"/>
+                  </a:lnTo>
+                  <a:lnTo>
+                    <a:pt x="1055167" y="355512"/>
+                  </a:lnTo>
+                  <a:lnTo>
+                    <a:pt x="1125511" y="374262"/>
+                  </a:lnTo>
+                  <a:lnTo>
+                    <a:pt x="1195856" y="392489"/>
+                  </a:lnTo>
+                  <a:lnTo>
+                    <a:pt x="1266200" y="410205"/>
+                  </a:lnTo>
+                  <a:lnTo>
+                    <a:pt x="1336545" y="427427"/>
+                  </a:lnTo>
+                  <a:lnTo>
+                    <a:pt x="1406889" y="444167"/>
+                  </a:lnTo>
+                  <a:lnTo>
+                    <a:pt x="1477234" y="460439"/>
+                  </a:lnTo>
+                  <a:lnTo>
+                    <a:pt x="1547578" y="476256"/>
+                  </a:lnTo>
+                  <a:lnTo>
+                    <a:pt x="1617923" y="491631"/>
+                  </a:lnTo>
+                  <a:lnTo>
+                    <a:pt x="1688267" y="506577"/>
+                  </a:lnTo>
+                  <a:lnTo>
+                    <a:pt x="1758612" y="521104"/>
+                  </a:lnTo>
+                  <a:lnTo>
+                    <a:pt x="1828956" y="535226"/>
+                  </a:lnTo>
+                  <a:lnTo>
+                    <a:pt x="1899301" y="548953"/>
+                  </a:lnTo>
+                  <a:lnTo>
+                    <a:pt x="1969645" y="562296"/>
+                  </a:lnTo>
+                  <a:lnTo>
+                    <a:pt x="2039990" y="575266"/>
+                  </a:lnTo>
+                  <a:lnTo>
+                    <a:pt x="2110334" y="587873"/>
+                  </a:lnTo>
+                  <a:lnTo>
+                    <a:pt x="2180679" y="600128"/>
+                  </a:lnTo>
+                  <a:lnTo>
+                    <a:pt x="2251023" y="612041"/>
+                  </a:lnTo>
+                  <a:lnTo>
+                    <a:pt x="2321368" y="623621"/>
+                  </a:lnTo>
+                  <a:lnTo>
+                    <a:pt x="2391712" y="634876"/>
+                  </a:lnTo>
+                  <a:lnTo>
+                    <a:pt x="2462057" y="645818"/>
+                  </a:lnTo>
+                  <a:lnTo>
+                    <a:pt x="2532401" y="656453"/>
+                  </a:lnTo>
+                  <a:lnTo>
+                    <a:pt x="2602746" y="666791"/>
+                  </a:lnTo>
+                  <a:lnTo>
+                    <a:pt x="2673090" y="676840"/>
+                  </a:lnTo>
+                  <a:lnTo>
+                    <a:pt x="2743435" y="686608"/>
+                  </a:lnTo>
+                  <a:lnTo>
+                    <a:pt x="2813779" y="696104"/>
+                  </a:lnTo>
+                  <a:lnTo>
+                    <a:pt x="2884124" y="705333"/>
+                  </a:lnTo>
+                  <a:lnTo>
+                    <a:pt x="2954468" y="714305"/>
+                  </a:lnTo>
+                  <a:lnTo>
+                    <a:pt x="3024813" y="723026"/>
+                  </a:lnTo>
+                  <a:lnTo>
+                    <a:pt x="3095157" y="727205"/>
+                  </a:lnTo>
+                  <a:lnTo>
+                    <a:pt x="3165502" y="727664"/>
+                  </a:lnTo>
+                  <a:lnTo>
+                    <a:pt x="3235846" y="728122"/>
+                  </a:lnTo>
+                  <a:lnTo>
+                    <a:pt x="3306191" y="728579"/>
+                  </a:lnTo>
+                  <a:lnTo>
+                    <a:pt x="3376535" y="729035"/>
+                  </a:lnTo>
+                  <a:lnTo>
+                    <a:pt x="3446880" y="729491"/>
+                  </a:lnTo>
+                  <a:lnTo>
+                    <a:pt x="3517224" y="729946"/>
+                  </a:lnTo>
+                  <a:lnTo>
+                    <a:pt x="3587569" y="730401"/>
+                  </a:lnTo>
+                  <a:lnTo>
+                    <a:pt x="3657913" y="730854"/>
+                  </a:lnTo>
+                  <a:lnTo>
+                    <a:pt x="3728257" y="731307"/>
+                  </a:lnTo>
+                  <a:lnTo>
+                    <a:pt x="3798602" y="731760"/>
+                  </a:lnTo>
+                  <a:lnTo>
+                    <a:pt x="3868946" y="732211"/>
+                  </a:lnTo>
+                  <a:lnTo>
+                    <a:pt x="3939291" y="732662"/>
+                  </a:lnTo>
+                  <a:lnTo>
+                    <a:pt x="4009635" y="733112"/>
+                  </a:lnTo>
+                  <a:lnTo>
+                    <a:pt x="4079980" y="733562"/>
+                  </a:lnTo>
+                  <a:lnTo>
+                    <a:pt x="4150324" y="734011"/>
+                  </a:lnTo>
+                  <a:lnTo>
+                    <a:pt x="4220669" y="734459"/>
+                  </a:lnTo>
+                  <a:lnTo>
+                    <a:pt x="4291013" y="734906"/>
+                  </a:lnTo>
+                  <a:lnTo>
+                    <a:pt x="4361358" y="735353"/>
+                  </a:lnTo>
+                  <a:lnTo>
+                    <a:pt x="4431702" y="735799"/>
+                  </a:lnTo>
+                  <a:lnTo>
+                    <a:pt x="4502047" y="736245"/>
+                  </a:lnTo>
+                  <a:lnTo>
+                    <a:pt x="4572391" y="736689"/>
+                  </a:lnTo>
+                  <a:lnTo>
+                    <a:pt x="4642736" y="737133"/>
+                  </a:lnTo>
+                  <a:lnTo>
+                    <a:pt x="4713080" y="737577"/>
+                  </a:lnTo>
+                  <a:lnTo>
+                    <a:pt x="4783425" y="738019"/>
+                  </a:lnTo>
+                  <a:lnTo>
+                    <a:pt x="4853769" y="738461"/>
+                  </a:lnTo>
+                  <a:lnTo>
+                    <a:pt x="4924114" y="738903"/>
+                  </a:lnTo>
+                  <a:lnTo>
+                    <a:pt x="4994458" y="739343"/>
+                  </a:lnTo>
+                  <a:lnTo>
+                    <a:pt x="5064803" y="739783"/>
+                  </a:lnTo>
+                  <a:lnTo>
+                    <a:pt x="5135147" y="740223"/>
+                  </a:lnTo>
+                  <a:lnTo>
+                    <a:pt x="5205492" y="740661"/>
+                  </a:lnTo>
+                  <a:lnTo>
+                    <a:pt x="5275836" y="741099"/>
+                  </a:lnTo>
+                  <a:lnTo>
+                    <a:pt x="5346181" y="741536"/>
+                  </a:lnTo>
+                  <a:lnTo>
+                    <a:pt x="5416525" y="741973"/>
+                  </a:lnTo>
+                  <a:lnTo>
+                    <a:pt x="5486870" y="742409"/>
+                  </a:lnTo>
+                  <a:lnTo>
+                    <a:pt x="5557214" y="742844"/>
+                  </a:lnTo>
+                  <a:lnTo>
+                    <a:pt x="5627559" y="743279"/>
+                  </a:lnTo>
+                  <a:lnTo>
+                    <a:pt x="5697903" y="743713"/>
+                  </a:lnTo>
+                  <a:lnTo>
+                    <a:pt x="5768248" y="744146"/>
+                  </a:lnTo>
+                  <a:lnTo>
+                    <a:pt x="5838592" y="744579"/>
+                  </a:lnTo>
+                  <a:lnTo>
+                    <a:pt x="5908937" y="745011"/>
+                  </a:lnTo>
+                  <a:lnTo>
+                    <a:pt x="5979281" y="745442"/>
+                  </a:lnTo>
+                  <a:lnTo>
+                    <a:pt x="6049626" y="745872"/>
+                  </a:lnTo>
+                  <a:lnTo>
+                    <a:pt x="6119970" y="746302"/>
+                  </a:lnTo>
+                  <a:lnTo>
+                    <a:pt x="6190315" y="746732"/>
+                  </a:lnTo>
+                  <a:lnTo>
+                    <a:pt x="6260659" y="747160"/>
+                  </a:lnTo>
+                  <a:lnTo>
+                    <a:pt x="6331004" y="747588"/>
+                  </a:lnTo>
+                  <a:lnTo>
+                    <a:pt x="6401348" y="748016"/>
+                  </a:lnTo>
+                  <a:lnTo>
+                    <a:pt x="6471693" y="748442"/>
+                  </a:lnTo>
+                  <a:lnTo>
+                    <a:pt x="6542037" y="748868"/>
+                  </a:lnTo>
+                  <a:lnTo>
+                    <a:pt x="6612382" y="749294"/>
+                  </a:lnTo>
+                  <a:lnTo>
+                    <a:pt x="6682726" y="749718"/>
+                  </a:lnTo>
+                  <a:lnTo>
+                    <a:pt x="6753071" y="750142"/>
+                  </a:lnTo>
+                  <a:lnTo>
+                    <a:pt x="6823415" y="750566"/>
+                  </a:lnTo>
+                  <a:lnTo>
+                    <a:pt x="6893760" y="750989"/>
+                  </a:lnTo>
+                  <a:lnTo>
+                    <a:pt x="6964104" y="751411"/>
+                  </a:lnTo>
+                  <a:lnTo>
+                    <a:pt x="6964104" y="964303"/>
+                  </a:lnTo>
+                  <a:lnTo>
+                    <a:pt x="6893760" y="962521"/>
+                  </a:lnTo>
+                  <a:lnTo>
+                    <a:pt x="6823415" y="960687"/>
+                  </a:lnTo>
+                  <a:lnTo>
+                    <a:pt x="6753071" y="958800"/>
+                  </a:lnTo>
+                  <a:lnTo>
+                    <a:pt x="6682726" y="956859"/>
+                  </a:lnTo>
+                  <a:lnTo>
+                    <a:pt x="6612382" y="954863"/>
+                  </a:lnTo>
+                  <a:lnTo>
+                    <a:pt x="6542037" y="952809"/>
+                  </a:lnTo>
+                  <a:lnTo>
+                    <a:pt x="6471693" y="950696"/>
+                  </a:lnTo>
+                  <a:lnTo>
+                    <a:pt x="6401348" y="948522"/>
+                  </a:lnTo>
+                  <a:lnTo>
+                    <a:pt x="6331004" y="946285"/>
+                  </a:lnTo>
+                  <a:lnTo>
+                    <a:pt x="6260659" y="943984"/>
+                  </a:lnTo>
+                  <a:lnTo>
+                    <a:pt x="6190315" y="941618"/>
+                  </a:lnTo>
+                  <a:lnTo>
+                    <a:pt x="6119970" y="939183"/>
+                  </a:lnTo>
+                  <a:lnTo>
+                    <a:pt x="6049626" y="936678"/>
+                  </a:lnTo>
+                  <a:lnTo>
+                    <a:pt x="5979281" y="934101"/>
+                  </a:lnTo>
+                  <a:lnTo>
+                    <a:pt x="5908937" y="931450"/>
+                  </a:lnTo>
+                  <a:lnTo>
+                    <a:pt x="5838592" y="928722"/>
+                  </a:lnTo>
+                  <a:lnTo>
+                    <a:pt x="5768248" y="925916"/>
+                  </a:lnTo>
+                  <a:lnTo>
+                    <a:pt x="5697903" y="923030"/>
+                  </a:lnTo>
+                  <a:lnTo>
+                    <a:pt x="5627559" y="920060"/>
+                  </a:lnTo>
+                  <a:lnTo>
+                    <a:pt x="5557214" y="917006"/>
+                  </a:lnTo>
+                  <a:lnTo>
+                    <a:pt x="5486870" y="913863"/>
+                  </a:lnTo>
+                  <a:lnTo>
+                    <a:pt x="5416525" y="910630"/>
+                  </a:lnTo>
+                  <a:lnTo>
+                    <a:pt x="5346181" y="907304"/>
+                  </a:lnTo>
+                  <a:lnTo>
+                    <a:pt x="5275836" y="903882"/>
+                  </a:lnTo>
+                  <a:lnTo>
+                    <a:pt x="5205492" y="900362"/>
+                  </a:lnTo>
+                  <a:lnTo>
+                    <a:pt x="5135147" y="896741"/>
+                  </a:lnTo>
+                  <a:lnTo>
+                    <a:pt x="5064803" y="893015"/>
+                  </a:lnTo>
+                  <a:lnTo>
+                    <a:pt x="4994458" y="889182"/>
+                  </a:lnTo>
+                  <a:lnTo>
+                    <a:pt x="4924114" y="885240"/>
+                  </a:lnTo>
+                  <a:lnTo>
+                    <a:pt x="4853769" y="881183"/>
+                  </a:lnTo>
+                  <a:lnTo>
+                    <a:pt x="4783425" y="877011"/>
+                  </a:lnTo>
+                  <a:lnTo>
+                    <a:pt x="4713080" y="872718"/>
+                  </a:lnTo>
+                  <a:lnTo>
+                    <a:pt x="4642736" y="868301"/>
+                  </a:lnTo>
+                  <a:lnTo>
+                    <a:pt x="4572391" y="863758"/>
+                  </a:lnTo>
+                  <a:lnTo>
+                    <a:pt x="4502047" y="859084"/>
+                  </a:lnTo>
+                  <a:lnTo>
+                    <a:pt x="4431702" y="854276"/>
+                  </a:lnTo>
+                  <a:lnTo>
+                    <a:pt x="4361358" y="849329"/>
+                  </a:lnTo>
+                  <a:lnTo>
+                    <a:pt x="4291013" y="844240"/>
+                  </a:lnTo>
+                  <a:lnTo>
+                    <a:pt x="4220669" y="839005"/>
+                  </a:lnTo>
+                  <a:lnTo>
+                    <a:pt x="4150324" y="833619"/>
+                  </a:lnTo>
+                  <a:lnTo>
+                    <a:pt x="4079980" y="828079"/>
+                  </a:lnTo>
+                  <a:lnTo>
+                    <a:pt x="4009635" y="822379"/>
+                  </a:lnTo>
+                  <a:lnTo>
+                    <a:pt x="3939291" y="816515"/>
+                  </a:lnTo>
+                  <a:lnTo>
+                    <a:pt x="3868946" y="810482"/>
+                  </a:lnTo>
+                  <a:lnTo>
+                    <a:pt x="3798602" y="804276"/>
+                  </a:lnTo>
+                  <a:lnTo>
+                    <a:pt x="3728257" y="797892"/>
+                  </a:lnTo>
+                  <a:lnTo>
+                    <a:pt x="3657913" y="791324"/>
+                  </a:lnTo>
+                  <a:lnTo>
+                    <a:pt x="3587569" y="784567"/>
+                  </a:lnTo>
+                  <a:lnTo>
+                    <a:pt x="3517224" y="777616"/>
+                  </a:lnTo>
+                  <a:lnTo>
+                    <a:pt x="3446880" y="770464"/>
+                  </a:lnTo>
+                  <a:lnTo>
+                    <a:pt x="3376535" y="763108"/>
+                  </a:lnTo>
+                  <a:lnTo>
+                    <a:pt x="3306191" y="755539"/>
+                  </a:lnTo>
+                  <a:lnTo>
+                    <a:pt x="3235846" y="747753"/>
+                  </a:lnTo>
+                  <a:lnTo>
+                    <a:pt x="3165502" y="739743"/>
+                  </a:lnTo>
+                  <a:lnTo>
+                    <a:pt x="3095157" y="731503"/>
+                  </a:lnTo>
+                  <a:lnTo>
+                    <a:pt x="3024813" y="726746"/>
+                  </a:lnTo>
+                  <a:lnTo>
+                    <a:pt x="2954468" y="726286"/>
+                  </a:lnTo>
+                  <a:lnTo>
+                    <a:pt x="2884124" y="725825"/>
+                  </a:lnTo>
+                  <a:lnTo>
+                    <a:pt x="2813779" y="725364"/>
+                  </a:lnTo>
+                  <a:lnTo>
+                    <a:pt x="2743435" y="724902"/>
+                  </a:lnTo>
+                  <a:lnTo>
+                    <a:pt x="2673090" y="724439"/>
+                  </a:lnTo>
+                  <a:lnTo>
+                    <a:pt x="2602746" y="723975"/>
+                  </a:lnTo>
+                  <a:lnTo>
+                    <a:pt x="2532401" y="723511"/>
+                  </a:lnTo>
+                  <a:lnTo>
+                    <a:pt x="2462057" y="723046"/>
+                  </a:lnTo>
+                  <a:lnTo>
+                    <a:pt x="2391712" y="722581"/>
+                  </a:lnTo>
+                  <a:lnTo>
+                    <a:pt x="2321368" y="722114"/>
+                  </a:lnTo>
+                  <a:lnTo>
+                    <a:pt x="2251023" y="721647"/>
+                  </a:lnTo>
+                  <a:lnTo>
+                    <a:pt x="2180679" y="721179"/>
+                  </a:lnTo>
+                  <a:lnTo>
+                    <a:pt x="2110334" y="720711"/>
+                  </a:lnTo>
+                  <a:lnTo>
+                    <a:pt x="2039990" y="720242"/>
+                  </a:lnTo>
+                  <a:lnTo>
+                    <a:pt x="1969645" y="719772"/>
+                  </a:lnTo>
+                  <a:lnTo>
+                    <a:pt x="1899301" y="719301"/>
+                  </a:lnTo>
+                  <a:lnTo>
+                    <a:pt x="1828956" y="718829"/>
+                  </a:lnTo>
+                  <a:lnTo>
+                    <a:pt x="1758612" y="718357"/>
+                  </a:lnTo>
+                  <a:lnTo>
+                    <a:pt x="1688267" y="717884"/>
+                  </a:lnTo>
+                  <a:lnTo>
+                    <a:pt x="1617923" y="717411"/>
+                  </a:lnTo>
+                  <a:lnTo>
+                    <a:pt x="1547578" y="716937"/>
+                  </a:lnTo>
+                  <a:lnTo>
+                    <a:pt x="1477234" y="716461"/>
+                  </a:lnTo>
+                  <a:lnTo>
+                    <a:pt x="1406889" y="715986"/>
+                  </a:lnTo>
+                  <a:lnTo>
+                    <a:pt x="1336545" y="715509"/>
+                  </a:lnTo>
+                  <a:lnTo>
+                    <a:pt x="1266200" y="715032"/>
+                  </a:lnTo>
+                  <a:lnTo>
+                    <a:pt x="1195856" y="714554"/>
+                  </a:lnTo>
+                  <a:lnTo>
+                    <a:pt x="1125511" y="714075"/>
+                  </a:lnTo>
+                  <a:lnTo>
+                    <a:pt x="1055167" y="713596"/>
+                  </a:lnTo>
+                  <a:lnTo>
+                    <a:pt x="984822" y="713116"/>
+                  </a:lnTo>
+                  <a:lnTo>
+                    <a:pt x="914478" y="712635"/>
+                  </a:lnTo>
+                  <a:lnTo>
+                    <a:pt x="844133" y="712153"/>
+                  </a:lnTo>
+                  <a:lnTo>
+                    <a:pt x="773789" y="711671"/>
+                  </a:lnTo>
+                  <a:lnTo>
+                    <a:pt x="703444" y="711187"/>
+                  </a:lnTo>
+                  <a:lnTo>
+                    <a:pt x="633100" y="710704"/>
+                  </a:lnTo>
+                  <a:lnTo>
+                    <a:pt x="562755" y="710219"/>
+                  </a:lnTo>
+                  <a:lnTo>
+                    <a:pt x="492411" y="709734"/>
+                  </a:lnTo>
+                  <a:lnTo>
+                    <a:pt x="422066" y="709248"/>
+                  </a:lnTo>
+                  <a:lnTo>
+                    <a:pt x="351722" y="708761"/>
+                  </a:lnTo>
+                  <a:lnTo>
+                    <a:pt x="281377" y="708273"/>
+                  </a:lnTo>
+                  <a:lnTo>
+                    <a:pt x="211033" y="707785"/>
+                  </a:lnTo>
+                  <a:lnTo>
+                    <a:pt x="140688" y="707296"/>
+                  </a:lnTo>
+                  <a:lnTo>
+                    <a:pt x="70344" y="706806"/>
+                  </a:lnTo>
+                  <a:lnTo>
+                    <a:pt x="0" y="706315"/>
+                  </a:lnTo>
+                  <a:close/>
+                </a:path>
+              </a:pathLst>
+            </a:custGeom>
+            <a:solidFill>
+              <a:srgbClr val="FF8C00">
+                <a:alpha val="20000"/>
+              </a:srgbClr>
+            </a:solidFill>
+          </p:spPr>
+          <p:txBody>
+            <a:bodyPr/>
+            <a:lstStyle/>
+            <a:p/>
+          </p:txBody>
+        </p:sp>
+        <p:sp>
+          <p:nvSpPr>
+            <p:cNvPr id="72" name="pl72"/>
+            <p:cNvSpPr/>
+            <p:nvPr/>
+          </p:nvSpPr>
+          <p:spPr>
+            <a:xfrm>
+              <a:off x="1235312" y="4567394"/>
+              <a:ext cx="6964104" cy="751411"/>
+            </a:xfrm>
+            <a:custGeom>
+              <a:avLst/>
+              <a:pathLst>
+                <a:path w="6964104" h="751411">
+                  <a:moveTo>
+                    <a:pt x="0" y="0"/>
+                  </a:moveTo>
+                  <a:lnTo>
+                    <a:pt x="70344" y="28687"/>
+                  </a:lnTo>
+                  <a:lnTo>
+                    <a:pt x="140688" y="56574"/>
+                  </a:lnTo>
+                  <a:lnTo>
+                    <a:pt x="211033" y="83680"/>
+                  </a:lnTo>
+                  <a:lnTo>
+                    <a:pt x="281377" y="110029"/>
+                  </a:lnTo>
+                  <a:lnTo>
+                    <a:pt x="351722" y="135641"/>
+                  </a:lnTo>
+                  <a:lnTo>
+                    <a:pt x="422066" y="160538"/>
+                  </a:lnTo>
+                  <a:lnTo>
+                    <a:pt x="492411" y="184738"/>
+                  </a:lnTo>
+                  <a:lnTo>
+                    <a:pt x="562755" y="208262"/>
+                  </a:lnTo>
+                  <a:lnTo>
+                    <a:pt x="633100" y="231128"/>
+                  </a:lnTo>
+                  <a:lnTo>
+                    <a:pt x="703444" y="253356"/>
+                  </a:lnTo>
+                  <a:lnTo>
+                    <a:pt x="773789" y="274961"/>
+                  </a:lnTo>
+                  <a:lnTo>
+                    <a:pt x="844133" y="295963"/>
+                  </a:lnTo>
+                  <a:lnTo>
+                    <a:pt x="914478" y="316378"/>
+                  </a:lnTo>
+                  <a:lnTo>
+                    <a:pt x="984822" y="336223"/>
+                  </a:lnTo>
+                  <a:lnTo>
+                    <a:pt x="1055167" y="355512"/>
+                  </a:lnTo>
+                  <a:lnTo>
+                    <a:pt x="1125511" y="374262"/>
+                  </a:lnTo>
+                  <a:lnTo>
+                    <a:pt x="1195856" y="392489"/>
+                  </a:lnTo>
+                  <a:lnTo>
+                    <a:pt x="1266200" y="410205"/>
+                  </a:lnTo>
+                  <a:lnTo>
+                    <a:pt x="1336545" y="427427"/>
+                  </a:lnTo>
+                  <a:lnTo>
+                    <a:pt x="1406889" y="444167"/>
+                  </a:lnTo>
+                  <a:lnTo>
+                    <a:pt x="1477234" y="460439"/>
+                  </a:lnTo>
+                  <a:lnTo>
+                    <a:pt x="1547578" y="476256"/>
+                  </a:lnTo>
+                  <a:lnTo>
+                    <a:pt x="1617923" y="491631"/>
+                  </a:lnTo>
+                  <a:lnTo>
+                    <a:pt x="1688267" y="506577"/>
+                  </a:lnTo>
+                  <a:lnTo>
+                    <a:pt x="1758612" y="521104"/>
+                  </a:lnTo>
+                  <a:lnTo>
+                    <a:pt x="1828956" y="535226"/>
+                  </a:lnTo>
+                  <a:lnTo>
+                    <a:pt x="1899301" y="548953"/>
+                  </a:lnTo>
+                  <a:lnTo>
+                    <a:pt x="1969645" y="562296"/>
+                  </a:lnTo>
+                  <a:lnTo>
+                    <a:pt x="2039990" y="575266"/>
+                  </a:lnTo>
+                  <a:lnTo>
+                    <a:pt x="2110334" y="587873"/>
+                  </a:lnTo>
+                  <a:lnTo>
+                    <a:pt x="2180679" y="600128"/>
+                  </a:lnTo>
+                  <a:lnTo>
+                    <a:pt x="2251023" y="612041"/>
+                  </a:lnTo>
+                  <a:lnTo>
+                    <a:pt x="2321368" y="623621"/>
+                  </a:lnTo>
+                  <a:lnTo>
+                    <a:pt x="2391712" y="634876"/>
+                  </a:lnTo>
+                  <a:lnTo>
+                    <a:pt x="2462057" y="645818"/>
+                  </a:lnTo>
+                  <a:lnTo>
+                    <a:pt x="2532401" y="656453"/>
+                  </a:lnTo>
+                  <a:lnTo>
+                    <a:pt x="2602746" y="666791"/>
+                  </a:lnTo>
+                  <a:lnTo>
+                    <a:pt x="2673090" y="676840"/>
+                  </a:lnTo>
+                  <a:lnTo>
+                    <a:pt x="2743435" y="686608"/>
+                  </a:lnTo>
+                  <a:lnTo>
+                    <a:pt x="2813779" y="696104"/>
+                  </a:lnTo>
+                  <a:lnTo>
+                    <a:pt x="2884124" y="705333"/>
+                  </a:lnTo>
+                  <a:lnTo>
+                    <a:pt x="2954468" y="714305"/>
+                  </a:lnTo>
+                  <a:lnTo>
+                    <a:pt x="3024813" y="723026"/>
+                  </a:lnTo>
+                  <a:lnTo>
+                    <a:pt x="3095157" y="727205"/>
+                  </a:lnTo>
+                  <a:lnTo>
+                    <a:pt x="3165502" y="727664"/>
+                  </a:lnTo>
+                  <a:lnTo>
+                    <a:pt x="3235846" y="728122"/>
+                  </a:lnTo>
+                  <a:lnTo>
+                    <a:pt x="3306191" y="728579"/>
+                  </a:lnTo>
+                  <a:lnTo>
+                    <a:pt x="3376535" y="729035"/>
+                  </a:lnTo>
+                  <a:lnTo>
+                    <a:pt x="3446880" y="729491"/>
+                  </a:lnTo>
+                  <a:lnTo>
+                    <a:pt x="3517224" y="729946"/>
+                  </a:lnTo>
+                  <a:lnTo>
+                    <a:pt x="3587569" y="730401"/>
+                  </a:lnTo>
+                  <a:lnTo>
+                    <a:pt x="3657913" y="730854"/>
+                  </a:lnTo>
+                  <a:lnTo>
+                    <a:pt x="3728257" y="731307"/>
+                  </a:lnTo>
+                  <a:lnTo>
+                    <a:pt x="3798602" y="731760"/>
+                  </a:lnTo>
+                  <a:lnTo>
+                    <a:pt x="3868946" y="732211"/>
+                  </a:lnTo>
+                  <a:lnTo>
+                    <a:pt x="3939291" y="732662"/>
+                  </a:lnTo>
+                  <a:lnTo>
+                    <a:pt x="4009635" y="733112"/>
+                  </a:lnTo>
+                  <a:lnTo>
+                    <a:pt x="4079980" y="733562"/>
+                  </a:lnTo>
+                  <a:lnTo>
+                    <a:pt x="4150324" y="734011"/>
+                  </a:lnTo>
+                  <a:lnTo>
+                    <a:pt x="4220669" y="734459"/>
+                  </a:lnTo>
+                  <a:lnTo>
+                    <a:pt x="4291013" y="734906"/>
+                  </a:lnTo>
+                  <a:lnTo>
+                    <a:pt x="4361358" y="735353"/>
+                  </a:lnTo>
+                  <a:lnTo>
+                    <a:pt x="4431702" y="735799"/>
+                  </a:lnTo>
+                  <a:lnTo>
+                    <a:pt x="4502047" y="736245"/>
+                  </a:lnTo>
+                  <a:lnTo>
+                    <a:pt x="4572391" y="736689"/>
+                  </a:lnTo>
+                  <a:lnTo>
+                    <a:pt x="4642736" y="737133"/>
+                  </a:lnTo>
+                  <a:lnTo>
+                    <a:pt x="4713080" y="737577"/>
+                  </a:lnTo>
+                  <a:lnTo>
+                    <a:pt x="4783425" y="738019"/>
+                  </a:lnTo>
+                  <a:lnTo>
+                    <a:pt x="4853769" y="738461"/>
+                  </a:lnTo>
+                  <a:lnTo>
+                    <a:pt x="4924114" y="738903"/>
+                  </a:lnTo>
+                  <a:lnTo>
+                    <a:pt x="4994458" y="739343"/>
+                  </a:lnTo>
+                  <a:lnTo>
+                    <a:pt x="5064803" y="739783"/>
+                  </a:lnTo>
+                  <a:lnTo>
+                    <a:pt x="5135147" y="740223"/>
+                  </a:lnTo>
+                  <a:lnTo>
+                    <a:pt x="5205492" y="740661"/>
+                  </a:lnTo>
+                  <a:lnTo>
+                    <a:pt x="5275836" y="741099"/>
+                  </a:lnTo>
+                  <a:lnTo>
+                    <a:pt x="5346181" y="741536"/>
+                  </a:lnTo>
+                  <a:lnTo>
+                    <a:pt x="5416525" y="741973"/>
+                  </a:lnTo>
+                  <a:lnTo>
+                    <a:pt x="5486870" y="742409"/>
+                  </a:lnTo>
+                  <a:lnTo>
+                    <a:pt x="5557214" y="742844"/>
+                  </a:lnTo>
+                  <a:lnTo>
+                    <a:pt x="5627559" y="743279"/>
+                  </a:lnTo>
+                  <a:lnTo>
+                    <a:pt x="5697903" y="743713"/>
+                  </a:lnTo>
+                  <a:lnTo>
+                    <a:pt x="5768248" y="744146"/>
+                  </a:lnTo>
+                  <a:lnTo>
+                    <a:pt x="5838592" y="744579"/>
+                  </a:lnTo>
+                  <a:lnTo>
+                    <a:pt x="5908937" y="745011"/>
+                  </a:lnTo>
+                  <a:lnTo>
+                    <a:pt x="5979281" y="745442"/>
+                  </a:lnTo>
+                  <a:lnTo>
+                    <a:pt x="6049626" y="745872"/>
+                  </a:lnTo>
+                  <a:lnTo>
+                    <a:pt x="6119970" y="746302"/>
+                  </a:lnTo>
+                  <a:lnTo>
+                    <a:pt x="6190315" y="746732"/>
+                  </a:lnTo>
+                  <a:lnTo>
+                    <a:pt x="6260659" y="747160"/>
+                  </a:lnTo>
+                  <a:lnTo>
+                    <a:pt x="6331004" y="747588"/>
+                  </a:lnTo>
+                  <a:lnTo>
+                    <a:pt x="6401348" y="748016"/>
+                  </a:lnTo>
+                  <a:lnTo>
+                    <a:pt x="6471693" y="748442"/>
+                  </a:lnTo>
+                  <a:lnTo>
+                    <a:pt x="6542037" y="748868"/>
+                  </a:lnTo>
+                  <a:lnTo>
+                    <a:pt x="6612382" y="749294"/>
+                  </a:lnTo>
+                  <a:lnTo>
+                    <a:pt x="6682726" y="749718"/>
+                  </a:lnTo>
+                  <a:lnTo>
+                    <a:pt x="6753071" y="750142"/>
+                  </a:lnTo>
+                  <a:lnTo>
+                    <a:pt x="6823415" y="750566"/>
+                  </a:lnTo>
+                  <a:lnTo>
+                    <a:pt x="6893760" y="750989"/>
+                  </a:lnTo>
+                  <a:lnTo>
+                    <a:pt x="6964104" y="751411"/>
+                  </a:lnTo>
+                </a:path>
+              </a:pathLst>
+            </a:custGeom>
+          </p:spPr>
+          <p:txBody>
+            <a:bodyPr/>
+            <a:lstStyle/>
+            <a:p/>
+          </p:txBody>
+        </p:sp>
+        <p:sp>
+          <p:nvSpPr>
+            <p:cNvPr id="73" name="pl73"/>
+            <p:cNvSpPr/>
+            <p:nvPr/>
+          </p:nvSpPr>
+          <p:spPr>
+            <a:xfrm>
+              <a:off x="1235312" y="5273710"/>
+              <a:ext cx="6964104" cy="257988"/>
+            </a:xfrm>
+            <a:custGeom>
+              <a:avLst/>
+              <a:pathLst>
+                <a:path w="6964104" h="257988">
+                  <a:moveTo>
+                    <a:pt x="6964104" y="257988"/>
+                  </a:moveTo>
+                  <a:lnTo>
+                    <a:pt x="6893760" y="256205"/>
+                  </a:lnTo>
+                  <a:lnTo>
+                    <a:pt x="6823415" y="254371"/>
+                  </a:lnTo>
+                  <a:lnTo>
+                    <a:pt x="6753071" y="252485"/>
+                  </a:lnTo>
+                  <a:lnTo>
+                    <a:pt x="6682726" y="250544"/>
+                  </a:lnTo>
+                  <a:lnTo>
+                    <a:pt x="6612382" y="248547"/>
+                  </a:lnTo>
+                  <a:lnTo>
+                    <a:pt x="6542037" y="246493"/>
+                  </a:lnTo>
+                  <a:lnTo>
+                    <a:pt x="6471693" y="244380"/>
+                  </a:lnTo>
+                  <a:lnTo>
+                    <a:pt x="6401348" y="242206"/>
+                  </a:lnTo>
+                  <a:lnTo>
+                    <a:pt x="6331004" y="239970"/>
+                  </a:lnTo>
+                  <a:lnTo>
+                    <a:pt x="6260659" y="237669"/>
+                  </a:lnTo>
+                  <a:lnTo>
+                    <a:pt x="6190315" y="235302"/>
+                  </a:lnTo>
+                  <a:lnTo>
+                    <a:pt x="6119970" y="232867"/>
+                  </a:lnTo>
+                  <a:lnTo>
+                    <a:pt x="6049626" y="230362"/>
+                  </a:lnTo>
+                  <a:lnTo>
+                    <a:pt x="5979281" y="227785"/>
+                  </a:lnTo>
+                  <a:lnTo>
+                    <a:pt x="5908937" y="225134"/>
+                  </a:lnTo>
+                  <a:lnTo>
+                    <a:pt x="5838592" y="222407"/>
+                  </a:lnTo>
+                  <a:lnTo>
+                    <a:pt x="5768248" y="219601"/>
+                  </a:lnTo>
+                  <a:lnTo>
+                    <a:pt x="5697903" y="216714"/>
+                  </a:lnTo>
+                  <a:lnTo>
+                    <a:pt x="5627559" y="213745"/>
+                  </a:lnTo>
+                  <a:lnTo>
+                    <a:pt x="5557214" y="210690"/>
+                  </a:lnTo>
+                  <a:lnTo>
+                    <a:pt x="5486870" y="207547"/>
+                  </a:lnTo>
+                  <a:lnTo>
+                    <a:pt x="5416525" y="204314"/>
+                  </a:lnTo>
+                  <a:lnTo>
+                    <a:pt x="5346181" y="200988"/>
+                  </a:lnTo>
+                  <a:lnTo>
+                    <a:pt x="5275836" y="197566"/>
+                  </a:lnTo>
+                  <a:lnTo>
+                    <a:pt x="5205492" y="194046"/>
+                  </a:lnTo>
+                  <a:lnTo>
+                    <a:pt x="5135147" y="190425"/>
+                  </a:lnTo>
+                  <a:lnTo>
+                    <a:pt x="5064803" y="186699"/>
+                  </a:lnTo>
+                  <a:lnTo>
+                    <a:pt x="4994458" y="182867"/>
+                  </a:lnTo>
+                  <a:lnTo>
+                    <a:pt x="4924114" y="178924"/>
+                  </a:lnTo>
+                  <a:lnTo>
+                    <a:pt x="4853769" y="174868"/>
+                  </a:lnTo>
+                  <a:lnTo>
+                    <a:pt x="4783425" y="170695"/>
+                  </a:lnTo>
+                  <a:lnTo>
+                    <a:pt x="4713080" y="166402"/>
+                  </a:lnTo>
+                  <a:lnTo>
+                    <a:pt x="4642736" y="161986"/>
+                  </a:lnTo>
+                  <a:lnTo>
+                    <a:pt x="4572391" y="157443"/>
+                  </a:lnTo>
+                  <a:lnTo>
+                    <a:pt x="4502047" y="152769"/>
+                  </a:lnTo>
+                  <a:lnTo>
+                    <a:pt x="4431702" y="147960"/>
+                  </a:lnTo>
+                  <a:lnTo>
+                    <a:pt x="4361358" y="143014"/>
+                  </a:lnTo>
+                  <a:lnTo>
+                    <a:pt x="4291013" y="137925"/>
+                  </a:lnTo>
+                  <a:lnTo>
+                    <a:pt x="4220669" y="132689"/>
+                  </a:lnTo>
+                  <a:lnTo>
+                    <a:pt x="4150324" y="127304"/>
+                  </a:lnTo>
+                  <a:lnTo>
+                    <a:pt x="4079980" y="121763"/>
+                  </a:lnTo>
+                  <a:lnTo>
+                    <a:pt x="4009635" y="116063"/>
+                  </a:lnTo>
+                  <a:lnTo>
+                    <a:pt x="3939291" y="110199"/>
+                  </a:lnTo>
+                  <a:lnTo>
+                    <a:pt x="3868946" y="104167"/>
+                  </a:lnTo>
+                  <a:lnTo>
+                    <a:pt x="3798602" y="97961"/>
+                  </a:lnTo>
+                  <a:lnTo>
+                    <a:pt x="3728257" y="91576"/>
+                  </a:lnTo>
+                  <a:lnTo>
+                    <a:pt x="3657913" y="85008"/>
+                  </a:lnTo>
+                  <a:lnTo>
+                    <a:pt x="3587569" y="78251"/>
+                  </a:lnTo>
+                  <a:lnTo>
+                    <a:pt x="3517224" y="71300"/>
+                  </a:lnTo>
+                  <a:lnTo>
+                    <a:pt x="3446880" y="64149"/>
+                  </a:lnTo>
+                  <a:lnTo>
+                    <a:pt x="3376535" y="56792"/>
+                  </a:lnTo>
+                  <a:lnTo>
+                    <a:pt x="3306191" y="49224"/>
+                  </a:lnTo>
+                  <a:lnTo>
+                    <a:pt x="3235846" y="41438"/>
+                  </a:lnTo>
+                  <a:lnTo>
+                    <a:pt x="3165502" y="33428"/>
+                  </a:lnTo>
+                  <a:lnTo>
+                    <a:pt x="3095157" y="25188"/>
+                  </a:lnTo>
+                  <a:lnTo>
+                    <a:pt x="3024813" y="20430"/>
+                  </a:lnTo>
+                  <a:lnTo>
+                    <a:pt x="2954468" y="19970"/>
+                  </a:lnTo>
+                  <a:lnTo>
+                    <a:pt x="2884124" y="19510"/>
+                  </a:lnTo>
+                  <a:lnTo>
+                    <a:pt x="2813779" y="19048"/>
+                  </a:lnTo>
+                  <a:lnTo>
+                    <a:pt x="2743435" y="18586"/>
+                  </a:lnTo>
+                  <a:lnTo>
+                    <a:pt x="2673090" y="18123"/>
+                  </a:lnTo>
+                  <a:lnTo>
+                    <a:pt x="2602746" y="17660"/>
+                  </a:lnTo>
+                  <a:lnTo>
+                    <a:pt x="2532401" y="17196"/>
+                  </a:lnTo>
+                  <a:lnTo>
+                    <a:pt x="2462057" y="16731"/>
+                  </a:lnTo>
+                  <a:lnTo>
+                    <a:pt x="2391712" y="16265"/>
+                  </a:lnTo>
+                  <a:lnTo>
+                    <a:pt x="2321368" y="15799"/>
+                  </a:lnTo>
+                  <a:lnTo>
+                    <a:pt x="2251023" y="15332"/>
+                  </a:lnTo>
+                  <a:lnTo>
+                    <a:pt x="2180679" y="14864"/>
+                  </a:lnTo>
+                  <a:lnTo>
+                    <a:pt x="2110334" y="14395"/>
+                  </a:lnTo>
+                  <a:lnTo>
+                    <a:pt x="2039990" y="13926"/>
+                  </a:lnTo>
+                  <a:lnTo>
+                    <a:pt x="1969645" y="13456"/>
+                  </a:lnTo>
+                  <a:lnTo>
+                    <a:pt x="1899301" y="12985"/>
+                  </a:lnTo>
+                  <a:lnTo>
+                    <a:pt x="1828956" y="12514"/>
+                  </a:lnTo>
+                  <a:lnTo>
+                    <a:pt x="1758612" y="12042"/>
+                  </a:lnTo>
+                  <a:lnTo>
+                    <a:pt x="1688267" y="11569"/>
+                  </a:lnTo>
+                  <a:lnTo>
+                    <a:pt x="1617923" y="11095"/>
+                  </a:lnTo>
+                  <a:lnTo>
+                    <a:pt x="1547578" y="10621"/>
+                  </a:lnTo>
+                  <a:lnTo>
+                    <a:pt x="1477234" y="10146"/>
+                  </a:lnTo>
+                  <a:lnTo>
+                    <a:pt x="1406889" y="9670"/>
+                  </a:lnTo>
+                  <a:lnTo>
+                    <a:pt x="1336545" y="9194"/>
+                  </a:lnTo>
+                  <a:lnTo>
+                    <a:pt x="1266200" y="8716"/>
+                  </a:lnTo>
+                  <a:lnTo>
+                    <a:pt x="1195856" y="8238"/>
+                  </a:lnTo>
+                  <a:lnTo>
+                    <a:pt x="1125511" y="7760"/>
+                  </a:lnTo>
+                  <a:lnTo>
+                    <a:pt x="1055167" y="7280"/>
+                  </a:lnTo>
+                  <a:lnTo>
+                    <a:pt x="984822" y="6800"/>
+                  </a:lnTo>
+                  <a:lnTo>
+                    <a:pt x="914478" y="6319"/>
+                  </a:lnTo>
+                  <a:lnTo>
+                    <a:pt x="844133" y="5837"/>
+                  </a:lnTo>
+                  <a:lnTo>
+                    <a:pt x="773789" y="5355"/>
+                  </a:lnTo>
+                  <a:lnTo>
+                    <a:pt x="703444" y="4872"/>
+                  </a:lnTo>
+                  <a:lnTo>
+                    <a:pt x="633100" y="4388"/>
+                  </a:lnTo>
+                  <a:lnTo>
+                    <a:pt x="562755" y="3903"/>
+                  </a:lnTo>
+                  <a:lnTo>
+                    <a:pt x="492411" y="3418"/>
+                  </a:lnTo>
+                  <a:lnTo>
+                    <a:pt x="422066" y="2932"/>
+                  </a:lnTo>
+                  <a:lnTo>
+                    <a:pt x="351722" y="2445"/>
+                  </a:lnTo>
+                  <a:lnTo>
+                    <a:pt x="281377" y="1957"/>
+                  </a:lnTo>
+                  <a:lnTo>
+                    <a:pt x="211033" y="1469"/>
+                  </a:lnTo>
+                  <a:lnTo>
+                    <a:pt x="140688" y="980"/>
+                  </a:lnTo>
+                  <a:lnTo>
+                    <a:pt x="70344" y="490"/>
+                  </a:lnTo>
+                  <a:lnTo>
+                    <a:pt x="0" y="0"/>
+                  </a:lnTo>
+                </a:path>
+              </a:pathLst>
+            </a:custGeom>
+          </p:spPr>
+          <p:txBody>
+            <a:bodyPr/>
+            <a:lstStyle/>
+            <a:p/>
+          </p:txBody>
+        </p:sp>
+        <p:sp>
+          <p:nvSpPr>
+            <p:cNvPr id="74" name="pl74"/>
+            <p:cNvSpPr/>
+            <p:nvPr/>
+          </p:nvSpPr>
+          <p:spPr>
+            <a:xfrm>
+              <a:off x="1235312" y="5020634"/>
+              <a:ext cx="6964104" cy="442517"/>
+            </a:xfrm>
+            <a:custGeom>
+              <a:avLst/>
+              <a:pathLst>
+                <a:path w="6964104" h="442517">
+                  <a:moveTo>
+                    <a:pt x="0" y="0"/>
+                  </a:moveTo>
+                  <a:lnTo>
+                    <a:pt x="70344" y="8499"/>
+                  </a:lnTo>
+                  <a:lnTo>
+                    <a:pt x="140688" y="16872"/>
+                  </a:lnTo>
+                  <a:lnTo>
+                    <a:pt x="211033" y="25121"/>
+                  </a:lnTo>
+                  <a:lnTo>
+                    <a:pt x="281377" y="33248"/>
+                  </a:lnTo>
+                  <a:lnTo>
+                    <a:pt x="351722" y="41254"/>
+                  </a:lnTo>
+                  <a:lnTo>
+                    <a:pt x="422066" y="49142"/>
+                  </a:lnTo>
+                  <a:lnTo>
+                    <a:pt x="492411" y="56912"/>
+                  </a:lnTo>
+                  <a:lnTo>
+                    <a:pt x="562755" y="64567"/>
+                  </a:lnTo>
+                  <a:lnTo>
+                    <a:pt x="633100" y="72109"/>
+                  </a:lnTo>
+                  <a:lnTo>
+                    <a:pt x="703444" y="79539"/>
+                  </a:lnTo>
+                  <a:lnTo>
+                    <a:pt x="773789" y="86859"/>
+                  </a:lnTo>
+                  <a:lnTo>
+                    <a:pt x="844133" y="94070"/>
+                  </a:lnTo>
+                  <a:lnTo>
+                    <a:pt x="914478" y="101174"/>
+                  </a:lnTo>
+                  <a:lnTo>
+                    <a:pt x="984822" y="108173"/>
+                  </a:lnTo>
+                  <a:lnTo>
+                    <a:pt x="1055167" y="115067"/>
+                  </a:lnTo>
+                  <a:lnTo>
+                    <a:pt x="1125511" y="121860"/>
+                  </a:lnTo>
+                  <a:lnTo>
+                    <a:pt x="1195856" y="128552"/>
+                  </a:lnTo>
+                  <a:lnTo>
+                    <a:pt x="1266200" y="135145"/>
+                  </a:lnTo>
+                  <a:lnTo>
+                    <a:pt x="1336545" y="141640"/>
+                  </a:lnTo>
+                  <a:lnTo>
+                    <a:pt x="1406889" y="148038"/>
+                  </a:lnTo>
+                  <a:lnTo>
+                    <a:pt x="1477234" y="154342"/>
+                  </a:lnTo>
+                  <a:lnTo>
+                    <a:pt x="1547578" y="160552"/>
+                  </a:lnTo>
+                  <a:lnTo>
+                    <a:pt x="1617923" y="166670"/>
+                  </a:lnTo>
+                  <a:lnTo>
+                    <a:pt x="1688267" y="172698"/>
+                  </a:lnTo>
+                  <a:lnTo>
+                    <a:pt x="1758612" y="178635"/>
+                  </a:lnTo>
+                  <a:lnTo>
+                    <a:pt x="1828956" y="184485"/>
+                  </a:lnTo>
+                  <a:lnTo>
+                    <a:pt x="1899301" y="190248"/>
+                  </a:lnTo>
+                  <a:lnTo>
+                    <a:pt x="1969645" y="195926"/>
+                  </a:lnTo>
+                  <a:lnTo>
+                    <a:pt x="2039990" y="201520"/>
+                  </a:lnTo>
+                  <a:lnTo>
+                    <a:pt x="2110334" y="207030"/>
+                  </a:lnTo>
+                  <a:lnTo>
+                    <a:pt x="2180679" y="212459"/>
+                  </a:lnTo>
+                  <a:lnTo>
+                    <a:pt x="2251023" y="217807"/>
+                  </a:lnTo>
+                  <a:lnTo>
+                    <a:pt x="2321368" y="223076"/>
+                  </a:lnTo>
+                  <a:lnTo>
+                    <a:pt x="2391712" y="228267"/>
+                  </a:lnTo>
+                  <a:lnTo>
+                    <a:pt x="2462057" y="233380"/>
+                  </a:lnTo>
+                  <a:lnTo>
+                    <a:pt x="2532401" y="238418"/>
+                  </a:lnTo>
+                  <a:lnTo>
+                    <a:pt x="2602746" y="243381"/>
+                  </a:lnTo>
+                  <a:lnTo>
+                    <a:pt x="2673090" y="248271"/>
+                  </a:lnTo>
+                  <a:lnTo>
+                    <a:pt x="2743435" y="253088"/>
+                  </a:lnTo>
+                  <a:lnTo>
+                    <a:pt x="2813779" y="257834"/>
+                  </a:lnTo>
+                  <a:lnTo>
+                    <a:pt x="2884124" y="262509"/>
+                  </a:lnTo>
+                  <a:lnTo>
+                    <a:pt x="2954468" y="267115"/>
+                  </a:lnTo>
+                  <a:lnTo>
+                    <a:pt x="3024813" y="271652"/>
+                  </a:lnTo>
+                  <a:lnTo>
+                    <a:pt x="3095157" y="276123"/>
+                  </a:lnTo>
+                  <a:lnTo>
+                    <a:pt x="3165502" y="280527"/>
+                  </a:lnTo>
+                  <a:lnTo>
+                    <a:pt x="3235846" y="284865"/>
+                  </a:lnTo>
+                  <a:lnTo>
+                    <a:pt x="3306191" y="289140"/>
+                  </a:lnTo>
+                  <a:lnTo>
+                    <a:pt x="3376535" y="293350"/>
+                  </a:lnTo>
+                  <a:lnTo>
+                    <a:pt x="3446880" y="297499"/>
+                  </a:lnTo>
+                  <a:lnTo>
+                    <a:pt x="3517224" y="301586"/>
+                  </a:lnTo>
+                  <a:lnTo>
+                    <a:pt x="3587569" y="305612"/>
+                  </a:lnTo>
+                  <a:lnTo>
+                    <a:pt x="3657913" y="309579"/>
+                  </a:lnTo>
+                  <a:lnTo>
+                    <a:pt x="3728257" y="313486"/>
+                  </a:lnTo>
+                  <a:lnTo>
+                    <a:pt x="3798602" y="317336"/>
+                  </a:lnTo>
+                  <a:lnTo>
+                    <a:pt x="3868946" y="321129"/>
+                  </a:lnTo>
+                  <a:lnTo>
+                    <a:pt x="3939291" y="324865"/>
+                  </a:lnTo>
+                  <a:lnTo>
+                    <a:pt x="4009635" y="328546"/>
+                  </a:lnTo>
+                  <a:lnTo>
+                    <a:pt x="4079980" y="332173"/>
+                  </a:lnTo>
+                  <a:lnTo>
+                    <a:pt x="4150324" y="335746"/>
+                  </a:lnTo>
+                  <a:lnTo>
+                    <a:pt x="4220669" y="339265"/>
+                  </a:lnTo>
+                  <a:lnTo>
+                    <a:pt x="4291013" y="342733"/>
+                  </a:lnTo>
+                  <a:lnTo>
+                    <a:pt x="4361358" y="346149"/>
+                  </a:lnTo>
+                  <a:lnTo>
+                    <a:pt x="4431702" y="349514"/>
+                  </a:lnTo>
+                  <a:lnTo>
+                    <a:pt x="4502047" y="352829"/>
+                  </a:lnTo>
+                  <a:lnTo>
+                    <a:pt x="4572391" y="356096"/>
+                  </a:lnTo>
+                  <a:lnTo>
+                    <a:pt x="4642736" y="359314"/>
+                  </a:lnTo>
+                  <a:lnTo>
+                    <a:pt x="4713080" y="362484"/>
+                  </a:lnTo>
+                  <a:lnTo>
+                    <a:pt x="4783425" y="365607"/>
+                  </a:lnTo>
+                  <a:lnTo>
+                    <a:pt x="4853769" y="368684"/>
+                  </a:lnTo>
+                  <a:lnTo>
+                    <a:pt x="4924114" y="371715"/>
+                  </a:lnTo>
+                  <a:lnTo>
+                    <a:pt x="4994458" y="374701"/>
+                  </a:lnTo>
+                  <a:lnTo>
+                    <a:pt x="5064803" y="377643"/>
+                  </a:lnTo>
+                  <a:lnTo>
+                    <a:pt x="5135147" y="380541"/>
+                  </a:lnTo>
+                  <a:lnTo>
+                    <a:pt x="5205492" y="383396"/>
+                  </a:lnTo>
+                  <a:lnTo>
+                    <a:pt x="5275836" y="386209"/>
+                  </a:lnTo>
+                  <a:lnTo>
+                    <a:pt x="5346181" y="388980"/>
+                  </a:lnTo>
+                  <a:lnTo>
+                    <a:pt x="5416525" y="391710"/>
+                  </a:lnTo>
+                  <a:lnTo>
+                    <a:pt x="5486870" y="394400"/>
+                  </a:lnTo>
+                  <a:lnTo>
+                    <a:pt x="5557214" y="397050"/>
+                  </a:lnTo>
+                  <a:lnTo>
+                    <a:pt x="5627559" y="399660"/>
+                  </a:lnTo>
+                  <a:lnTo>
+                    <a:pt x="5697903" y="402232"/>
+                  </a:lnTo>
+                  <a:lnTo>
+                    <a:pt x="5768248" y="404765"/>
+                  </a:lnTo>
+                  <a:lnTo>
+                    <a:pt x="5838592" y="407261"/>
+                  </a:lnTo>
+                  <a:lnTo>
+                    <a:pt x="5908937" y="409720"/>
+                  </a:lnTo>
+                  <a:lnTo>
+                    <a:pt x="5979281" y="412143"/>
+                  </a:lnTo>
+                  <a:lnTo>
+                    <a:pt x="6049626" y="414529"/>
+                  </a:lnTo>
+                  <a:lnTo>
+                    <a:pt x="6119970" y="416881"/>
+                  </a:lnTo>
+                  <a:lnTo>
+                    <a:pt x="6190315" y="419197"/>
+                  </a:lnTo>
+                  <a:lnTo>
+                    <a:pt x="6260659" y="421479"/>
+                  </a:lnTo>
+                  <a:lnTo>
+                    <a:pt x="6331004" y="423727"/>
+                  </a:lnTo>
+                  <a:lnTo>
+                    <a:pt x="6401348" y="425942"/>
+                  </a:lnTo>
+                  <a:lnTo>
+                    <a:pt x="6471693" y="428124"/>
+                  </a:lnTo>
+                  <a:lnTo>
+                    <a:pt x="6542037" y="430273"/>
+                  </a:lnTo>
+                  <a:lnTo>
+                    <a:pt x="6612382" y="432391"/>
+                  </a:lnTo>
+                  <a:lnTo>
+                    <a:pt x="6682726" y="434477"/>
+                  </a:lnTo>
+                  <a:lnTo>
+                    <a:pt x="6753071" y="436532"/>
+                  </a:lnTo>
+                  <a:lnTo>
+                    <a:pt x="6823415" y="438557"/>
+                  </a:lnTo>
+                  <a:lnTo>
+                    <a:pt x="6893760" y="440552"/>
+                  </a:lnTo>
+                  <a:lnTo>
+                    <a:pt x="6964104" y="442517"/>
+                  </a:lnTo>
+                </a:path>
+              </a:pathLst>
+            </a:custGeom>
+            <a:ln w="27101" cap="flat">
+              <a:solidFill>
+                <a:srgbClr val="FF8C00">
+                  <a:alpha val="100000"/>
+                </a:srgbClr>
+              </a:solidFill>
+              <a:prstDash val="solid"/>
+              <a:round/>
+            </a:ln>
+          </p:spPr>
+          <p:txBody>
+            <a:bodyPr/>
+            <a:lstStyle/>
+            <a:p/>
+          </p:txBody>
+        </p:sp>
+        <p:sp>
+          <p:nvSpPr>
+            <p:cNvPr id="75" name="pl75"/>
+            <p:cNvSpPr/>
+            <p:nvPr/>
+          </p:nvSpPr>
+          <p:spPr>
+            <a:xfrm>
+              <a:off x="887106" y="5294352"/>
+              <a:ext cx="7660515" cy="0"/>
+            </a:xfrm>
+            <a:custGeom>
+              <a:avLst/>
+              <a:pathLst>
+                <a:path w="7660515" h="0">
+                  <a:moveTo>
+                    <a:pt x="0" y="0"/>
+                  </a:moveTo>
+                  <a:lnTo>
+                    <a:pt x="7660515" y="0"/>
+                  </a:lnTo>
+                  <a:lnTo>
+                    <a:pt x="7660515" y="0"/>
+                  </a:lnTo>
+                </a:path>
+              </a:pathLst>
+            </a:custGeom>
+            <a:ln w="13550" cap="flat">
+              <a:solidFill>
+                <a:srgbClr val="7F7F7F">
+                  <a:alpha val="100000"/>
+                </a:srgbClr>
+              </a:solidFill>
+              <a:prstDash val="dash"/>
+              <a:round/>
+            </a:ln>
+          </p:spPr>
+          <p:txBody>
+            <a:bodyPr/>
+            <a:lstStyle/>
+            <a:p/>
+          </p:txBody>
+        </p:sp>
+        <p:sp>
+          <p:nvSpPr>
+            <p:cNvPr id="76" name="pl76"/>
+            <p:cNvSpPr/>
+            <p:nvPr/>
+          </p:nvSpPr>
+          <p:spPr>
+            <a:xfrm>
+              <a:off x="4292500" y="4336484"/>
+              <a:ext cx="0" cy="1317069"/>
+            </a:xfrm>
+            <a:custGeom>
+              <a:avLst/>
+              <a:pathLst>
+                <a:path w="0" h="1317069">
+                  <a:moveTo>
+                    <a:pt x="0" y="1317069"/>
+                  </a:moveTo>
+                  <a:lnTo>
+                    <a:pt x="0" y="0"/>
+                  </a:lnTo>
+                  <a:lnTo>
+                    <a:pt x="0" y="0"/>
+                  </a:lnTo>
+                </a:path>
+              </a:pathLst>
+            </a:custGeom>
+            <a:ln w="13550" cap="flat">
+              <a:solidFill>
+                <a:srgbClr val="666666">
+                  <a:alpha val="100000"/>
+                </a:srgbClr>
+              </a:solidFill>
+              <a:prstDash val="dot"/>
+              <a:round/>
+            </a:ln>
+          </p:spPr>
+          <p:txBody>
+            <a:bodyPr/>
+            <a:lstStyle/>
+            <a:p/>
+          </p:txBody>
+        </p:sp>
+        <p:sp>
+          <p:nvSpPr>
+            <p:cNvPr id="77" name="pl77"/>
+            <p:cNvSpPr/>
+            <p:nvPr/>
+          </p:nvSpPr>
+          <p:spPr>
+            <a:xfrm>
+              <a:off x="3124839" y="4336484"/>
+              <a:ext cx="0" cy="1317069"/>
+            </a:xfrm>
+            <a:custGeom>
+              <a:avLst/>
+              <a:pathLst>
+                <a:path w="0" h="1317069">
+                  <a:moveTo>
+                    <a:pt x="0" y="1317069"/>
+                  </a:moveTo>
+                  <a:lnTo>
+                    <a:pt x="0" y="0"/>
+                  </a:lnTo>
+                  <a:lnTo>
+                    <a:pt x="0" y="0"/>
+                  </a:lnTo>
+                </a:path>
+              </a:pathLst>
+            </a:custGeom>
+            <a:ln w="13550" cap="flat">
+              <a:solidFill>
+                <a:srgbClr val="4682B4">
+                  <a:alpha val="69803"/>
+                </a:srgbClr>
+              </a:solidFill>
+              <a:prstDash val="dash"/>
+              <a:round/>
+            </a:ln>
+          </p:spPr>
+          <p:txBody>
+            <a:bodyPr/>
+            <a:lstStyle/>
+            <a:p/>
+          </p:txBody>
+        </p:sp>
+        <p:sp>
+          <p:nvSpPr>
+            <p:cNvPr id="78" name="pl78"/>
+            <p:cNvSpPr/>
+            <p:nvPr/>
+          </p:nvSpPr>
+          <p:spPr>
+            <a:xfrm>
+              <a:off x="5508592" y="4336484"/>
+              <a:ext cx="0" cy="1317069"/>
+            </a:xfrm>
+            <a:custGeom>
+              <a:avLst/>
+              <a:pathLst>
+                <a:path w="0" h="1317069">
+                  <a:moveTo>
+                    <a:pt x="0" y="1317069"/>
+                  </a:moveTo>
+                  <a:lnTo>
+                    <a:pt x="0" y="0"/>
+                  </a:lnTo>
+                  <a:lnTo>
+                    <a:pt x="0" y="0"/>
+                  </a:lnTo>
+                </a:path>
+              </a:pathLst>
+            </a:custGeom>
+            <a:ln w="13550" cap="flat">
+              <a:solidFill>
+                <a:srgbClr val="4682B4">
+                  <a:alpha val="69803"/>
+                </a:srgbClr>
+              </a:solidFill>
+              <a:prstDash val="dash"/>
+              <a:round/>
+            </a:ln>
+          </p:spPr>
+          <p:txBody>
+            <a:bodyPr/>
+            <a:lstStyle/>
+            <a:p/>
+          </p:txBody>
+        </p:sp>
+        <p:sp>
+          <p:nvSpPr>
+            <p:cNvPr id="79" name="tx79"/>
+            <p:cNvSpPr/>
+            <p:nvPr/>
+          </p:nvSpPr>
+          <p:spPr>
+            <a:xfrm>
+              <a:off x="762297" y="5553636"/>
+              <a:ext cx="62179" cy="80101"/>
+            </a:xfrm>
+            <a:prstGeom prst="rect">
+              <a:avLst/>
+            </a:prstGeom>
+            <a:noFill/>
+          </p:spPr>
+          <p:txBody>
+            <a:bodyPr lIns="0" rIns="0" tIns="0" bIns="0" anchorCtr="1" anchor="ctr" wrap="none"/>
+            <a:lstStyle/>
+            <a:p>
+              <a:pPr algn="l" marL="0" marR="0" indent="0">
+                <a:lnSpc>
+                  <a:spcPts val="880"/>
+                </a:lnSpc>
+                <a:spcBef>
+                  <a:spcPts val="0"/>
+                </a:spcBef>
+                <a:spcAft>
+                  <a:spcPts val="0"/>
+                </a:spcAft>
+              </a:pPr>
+              <a:r>
+                <a:rPr sz="880">
+                  <a:solidFill>
+                    <a:srgbClr val="4D4D4D">
+                      <a:alpha val="100000"/>
+                    </a:srgbClr>
+                  </a:solidFill>
+                  <a:latin typeface="Helvetica"/>
+                  <a:cs typeface="Helvetica"/>
+                </a:rPr>
+                <a:t>0</a:t>
+              </a:r>
+            </a:p>
+          </p:txBody>
+        </p:sp>
+        <p:sp>
+          <p:nvSpPr>
+            <p:cNvPr id="80" name="tx80"/>
+            <p:cNvSpPr/>
+            <p:nvPr/>
+          </p:nvSpPr>
+          <p:spPr>
+            <a:xfrm>
+              <a:off x="762297" y="5254302"/>
+              <a:ext cx="62179" cy="80101"/>
+            </a:xfrm>
+            <a:prstGeom prst="rect">
+              <a:avLst/>
+            </a:prstGeom>
+            <a:noFill/>
+          </p:spPr>
+          <p:txBody>
+            <a:bodyPr lIns="0" rIns="0" tIns="0" bIns="0" anchorCtr="1" anchor="ctr" wrap="none"/>
+            <a:lstStyle/>
+            <a:p>
+              <a:pPr algn="l" marL="0" marR="0" indent="0">
+                <a:lnSpc>
+                  <a:spcPts val="880"/>
+                </a:lnSpc>
+                <a:spcBef>
+                  <a:spcPts val="0"/>
+                </a:spcBef>
+                <a:spcAft>
+                  <a:spcPts val="0"/>
+                </a:spcAft>
+              </a:pPr>
+              <a:r>
+                <a:rPr sz="880">
+                  <a:solidFill>
+                    <a:srgbClr val="4D4D4D">
+                      <a:alpha val="100000"/>
+                    </a:srgbClr>
+                  </a:solidFill>
+                  <a:latin typeface="Helvetica"/>
+                  <a:cs typeface="Helvetica"/>
+                </a:rPr>
+                <a:t>1</a:t>
+              </a:r>
+            </a:p>
+          </p:txBody>
+        </p:sp>
+        <p:sp>
+          <p:nvSpPr>
+            <p:cNvPr id="81" name="tx81"/>
+            <p:cNvSpPr/>
+            <p:nvPr/>
+          </p:nvSpPr>
+          <p:spPr>
+            <a:xfrm>
+              <a:off x="762297" y="4954968"/>
+              <a:ext cx="62179" cy="80101"/>
+            </a:xfrm>
+            <a:prstGeom prst="rect">
+              <a:avLst/>
+            </a:prstGeom>
+            <a:noFill/>
+          </p:spPr>
+          <p:txBody>
+            <a:bodyPr lIns="0" rIns="0" tIns="0" bIns="0" anchorCtr="1" anchor="ctr" wrap="none"/>
+            <a:lstStyle/>
+            <a:p>
+              <a:pPr algn="l" marL="0" marR="0" indent="0">
+                <a:lnSpc>
+                  <a:spcPts val="880"/>
+                </a:lnSpc>
+                <a:spcBef>
+                  <a:spcPts val="0"/>
+                </a:spcBef>
+                <a:spcAft>
+                  <a:spcPts val="0"/>
+                </a:spcAft>
+              </a:pPr>
+              <a:r>
+                <a:rPr sz="880">
+                  <a:solidFill>
+                    <a:srgbClr val="4D4D4D">
+                      <a:alpha val="100000"/>
+                    </a:srgbClr>
+                  </a:solidFill>
+                  <a:latin typeface="Helvetica"/>
+                  <a:cs typeface="Helvetica"/>
+                </a:rPr>
+                <a:t>2</a:t>
+              </a:r>
+            </a:p>
+          </p:txBody>
+        </p:sp>
+        <p:sp>
+          <p:nvSpPr>
+            <p:cNvPr id="82" name="tx82"/>
+            <p:cNvSpPr/>
+            <p:nvPr/>
+          </p:nvSpPr>
+          <p:spPr>
+            <a:xfrm>
+              <a:off x="762297" y="4655634"/>
+              <a:ext cx="62179" cy="80101"/>
+            </a:xfrm>
+            <a:prstGeom prst="rect">
+              <a:avLst/>
+            </a:prstGeom>
+            <a:noFill/>
+          </p:spPr>
+          <p:txBody>
+            <a:bodyPr lIns="0" rIns="0" tIns="0" bIns="0" anchorCtr="1" anchor="ctr" wrap="none"/>
+            <a:lstStyle/>
+            <a:p>
+              <a:pPr algn="l" marL="0" marR="0" indent="0">
+                <a:lnSpc>
+                  <a:spcPts val="880"/>
+                </a:lnSpc>
+                <a:spcBef>
+                  <a:spcPts val="0"/>
+                </a:spcBef>
+                <a:spcAft>
+                  <a:spcPts val="0"/>
+                </a:spcAft>
+              </a:pPr>
+              <a:r>
+                <a:rPr sz="880">
+                  <a:solidFill>
+                    <a:srgbClr val="4D4D4D">
+                      <a:alpha val="100000"/>
+                    </a:srgbClr>
+                  </a:solidFill>
+                  <a:latin typeface="Helvetica"/>
+                  <a:cs typeface="Helvetica"/>
+                </a:rPr>
+                <a:t>3</a:t>
+              </a:r>
+            </a:p>
+          </p:txBody>
+        </p:sp>
+        <p:sp>
+          <p:nvSpPr>
+            <p:cNvPr id="83" name="tx83"/>
+            <p:cNvSpPr/>
+            <p:nvPr/>
+          </p:nvSpPr>
+          <p:spPr>
+            <a:xfrm>
+              <a:off x="762297" y="4356300"/>
+              <a:ext cx="62179" cy="80101"/>
+            </a:xfrm>
+            <a:prstGeom prst="rect">
+              <a:avLst/>
+            </a:prstGeom>
+            <a:noFill/>
+          </p:spPr>
+          <p:txBody>
+            <a:bodyPr lIns="0" rIns="0" tIns="0" bIns="0" anchorCtr="1" anchor="ctr" wrap="none"/>
+            <a:lstStyle/>
+            <a:p>
+              <a:pPr algn="l" marL="0" marR="0" indent="0">
+                <a:lnSpc>
+                  <a:spcPts val="880"/>
+                </a:lnSpc>
+                <a:spcBef>
+                  <a:spcPts val="0"/>
+                </a:spcBef>
+                <a:spcAft>
+                  <a:spcPts val="0"/>
+                </a:spcAft>
+              </a:pPr>
+              <a:r>
+                <a:rPr sz="880">
+                  <a:solidFill>
+                    <a:srgbClr val="4D4D4D">
+                      <a:alpha val="100000"/>
+                    </a:srgbClr>
+                  </a:solidFill>
+                  <a:latin typeface="Helvetica"/>
+                  <a:cs typeface="Helvetica"/>
+                </a:rPr>
+                <a:t>4</a:t>
+              </a:r>
+            </a:p>
+          </p:txBody>
+        </p:sp>
+        <p:sp>
+          <p:nvSpPr>
+            <p:cNvPr id="84" name="tx84"/>
+            <p:cNvSpPr/>
+            <p:nvPr/>
+          </p:nvSpPr>
+          <p:spPr>
+            <a:xfrm>
+              <a:off x="1346003" y="5716183"/>
+              <a:ext cx="161574" cy="80101"/>
+            </a:xfrm>
+            <a:prstGeom prst="rect">
+              <a:avLst/>
+            </a:prstGeom>
+            <a:noFill/>
+          </p:spPr>
+          <p:txBody>
+            <a:bodyPr lIns="0" rIns="0" tIns="0" bIns="0" anchorCtr="1" anchor="ctr" wrap="none"/>
+            <a:lstStyle/>
+            <a:p>
+              <a:pPr algn="l" marL="0" marR="0" indent="0">
+                <a:lnSpc>
+                  <a:spcPts val="880"/>
+                </a:lnSpc>
+                <a:spcBef>
+                  <a:spcPts val="0"/>
+                </a:spcBef>
+                <a:spcAft>
+                  <a:spcPts val="0"/>
+                </a:spcAft>
+              </a:pPr>
+              <a:r>
+                <a:rPr sz="880">
+                  <a:solidFill>
+                    <a:srgbClr val="4D4D4D">
+                      <a:alpha val="100000"/>
+                    </a:srgbClr>
+                  </a:solidFill>
+                  <a:latin typeface="Helvetica"/>
+                  <a:cs typeface="Helvetica"/>
+                </a:rPr>
+                <a:t>-50</a:t>
+              </a:r>
+            </a:p>
+          </p:txBody>
+        </p:sp>
+        <p:sp>
+          <p:nvSpPr>
+            <p:cNvPr id="85" name="tx85"/>
+            <p:cNvSpPr/>
+            <p:nvPr/>
+          </p:nvSpPr>
+          <p:spPr>
+            <a:xfrm>
+              <a:off x="2196512" y="5716183"/>
+              <a:ext cx="161574" cy="80101"/>
+            </a:xfrm>
+            <a:prstGeom prst="rect">
+              <a:avLst/>
+            </a:prstGeom>
+            <a:noFill/>
+          </p:spPr>
+          <p:txBody>
+            <a:bodyPr lIns="0" rIns="0" tIns="0" bIns="0" anchorCtr="1" anchor="ctr" wrap="none"/>
+            <a:lstStyle/>
+            <a:p>
+              <a:pPr algn="l" marL="0" marR="0" indent="0">
+                <a:lnSpc>
+                  <a:spcPts val="880"/>
+                </a:lnSpc>
+                <a:spcBef>
+                  <a:spcPts val="0"/>
+                </a:spcBef>
+                <a:spcAft>
+                  <a:spcPts val="0"/>
+                </a:spcAft>
+              </a:pPr>
+              <a:r>
+                <a:rPr sz="880">
+                  <a:solidFill>
+                    <a:srgbClr val="4D4D4D">
+                      <a:alpha val="100000"/>
+                    </a:srgbClr>
+                  </a:solidFill>
+                  <a:latin typeface="Helvetica"/>
+                  <a:cs typeface="Helvetica"/>
+                </a:rPr>
+                <a:t>-40</a:t>
+              </a:r>
+            </a:p>
+          </p:txBody>
+        </p:sp>
+        <p:sp>
+          <p:nvSpPr>
+            <p:cNvPr id="86" name="tx86"/>
+            <p:cNvSpPr/>
+            <p:nvPr/>
+          </p:nvSpPr>
+          <p:spPr>
+            <a:xfrm>
+              <a:off x="3047022" y="5716183"/>
+              <a:ext cx="161574" cy="80101"/>
+            </a:xfrm>
+            <a:prstGeom prst="rect">
+              <a:avLst/>
+            </a:prstGeom>
+            <a:noFill/>
+          </p:spPr>
+          <p:txBody>
+            <a:bodyPr lIns="0" rIns="0" tIns="0" bIns="0" anchorCtr="1" anchor="ctr" wrap="none"/>
+            <a:lstStyle/>
+            <a:p>
+              <a:pPr algn="l" marL="0" marR="0" indent="0">
+                <a:lnSpc>
+                  <a:spcPts val="880"/>
+                </a:lnSpc>
+                <a:spcBef>
+                  <a:spcPts val="0"/>
+                </a:spcBef>
+                <a:spcAft>
+                  <a:spcPts val="0"/>
+                </a:spcAft>
+              </a:pPr>
+              <a:r>
+                <a:rPr sz="880">
+                  <a:solidFill>
+                    <a:srgbClr val="4D4D4D">
+                      <a:alpha val="100000"/>
+                    </a:srgbClr>
+                  </a:solidFill>
+                  <a:latin typeface="Helvetica"/>
+                  <a:cs typeface="Helvetica"/>
+                </a:rPr>
+                <a:t>-30</a:t>
+              </a:r>
+            </a:p>
+          </p:txBody>
+        </p:sp>
+        <p:sp>
+          <p:nvSpPr>
+            <p:cNvPr id="87" name="tx87"/>
+            <p:cNvSpPr/>
+            <p:nvPr/>
+          </p:nvSpPr>
+          <p:spPr>
+            <a:xfrm>
+              <a:off x="3897531" y="5716183"/>
+              <a:ext cx="161574" cy="80101"/>
+            </a:xfrm>
+            <a:prstGeom prst="rect">
+              <a:avLst/>
+            </a:prstGeom>
+            <a:noFill/>
+          </p:spPr>
+          <p:txBody>
+            <a:bodyPr lIns="0" rIns="0" tIns="0" bIns="0" anchorCtr="1" anchor="ctr" wrap="none"/>
+            <a:lstStyle/>
+            <a:p>
+              <a:pPr algn="l" marL="0" marR="0" indent="0">
+                <a:lnSpc>
+                  <a:spcPts val="880"/>
+                </a:lnSpc>
+                <a:spcBef>
+                  <a:spcPts val="0"/>
+                </a:spcBef>
+                <a:spcAft>
+                  <a:spcPts val="0"/>
+                </a:spcAft>
+              </a:pPr>
+              <a:r>
+                <a:rPr sz="880">
+                  <a:solidFill>
+                    <a:srgbClr val="4D4D4D">
+                      <a:alpha val="100000"/>
+                    </a:srgbClr>
+                  </a:solidFill>
+                  <a:latin typeface="Helvetica"/>
+                  <a:cs typeface="Helvetica"/>
+                </a:rPr>
+                <a:t>-20</a:t>
+              </a:r>
+            </a:p>
+          </p:txBody>
+        </p:sp>
+        <p:sp>
+          <p:nvSpPr>
+            <p:cNvPr id="88" name="tx88"/>
+            <p:cNvSpPr/>
+            <p:nvPr/>
+          </p:nvSpPr>
+          <p:spPr>
+            <a:xfrm>
+              <a:off x="4748041" y="5716183"/>
+              <a:ext cx="161574" cy="80101"/>
+            </a:xfrm>
+            <a:prstGeom prst="rect">
+              <a:avLst/>
+            </a:prstGeom>
+            <a:noFill/>
+          </p:spPr>
+          <p:txBody>
+            <a:bodyPr lIns="0" rIns="0" tIns="0" bIns="0" anchorCtr="1" anchor="ctr" wrap="none"/>
+            <a:lstStyle/>
+            <a:p>
+              <a:pPr algn="l" marL="0" marR="0" indent="0">
+                <a:lnSpc>
+                  <a:spcPts val="880"/>
+                </a:lnSpc>
+                <a:spcBef>
+                  <a:spcPts val="0"/>
+                </a:spcBef>
+                <a:spcAft>
+                  <a:spcPts val="0"/>
+                </a:spcAft>
+              </a:pPr>
+              <a:r>
+                <a:rPr sz="880">
+                  <a:solidFill>
+                    <a:srgbClr val="4D4D4D">
+                      <a:alpha val="100000"/>
+                    </a:srgbClr>
+                  </a:solidFill>
+                  <a:latin typeface="Helvetica"/>
+                  <a:cs typeface="Helvetica"/>
+                </a:rPr>
+                <a:t>-10</a:t>
+              </a:r>
+            </a:p>
+          </p:txBody>
+        </p:sp>
+        <p:sp>
+          <p:nvSpPr>
+            <p:cNvPr id="89" name="tx89"/>
+            <p:cNvSpPr/>
+            <p:nvPr/>
+          </p:nvSpPr>
+          <p:spPr>
+            <a:xfrm>
+              <a:off x="5648248" y="5716183"/>
+              <a:ext cx="62179" cy="80101"/>
+            </a:xfrm>
+            <a:prstGeom prst="rect">
+              <a:avLst/>
+            </a:prstGeom>
+            <a:noFill/>
+          </p:spPr>
+          <p:txBody>
+            <a:bodyPr lIns="0" rIns="0" tIns="0" bIns="0" anchorCtr="1" anchor="ctr" wrap="none"/>
+            <a:lstStyle/>
+            <a:p>
+              <a:pPr algn="l" marL="0" marR="0" indent="0">
+                <a:lnSpc>
+                  <a:spcPts val="880"/>
+                </a:lnSpc>
+                <a:spcBef>
+                  <a:spcPts val="0"/>
+                </a:spcBef>
+                <a:spcAft>
+                  <a:spcPts val="0"/>
+                </a:spcAft>
+              </a:pPr>
+              <a:r>
+                <a:rPr sz="880">
+                  <a:solidFill>
+                    <a:srgbClr val="4D4D4D">
+                      <a:alpha val="100000"/>
+                    </a:srgbClr>
+                  </a:solidFill>
+                  <a:latin typeface="Helvetica"/>
+                  <a:cs typeface="Helvetica"/>
+                </a:rPr>
+                <a:t>0</a:t>
+              </a:r>
+            </a:p>
+          </p:txBody>
+        </p:sp>
+        <p:sp>
+          <p:nvSpPr>
+            <p:cNvPr id="90" name="tx90"/>
+            <p:cNvSpPr/>
+            <p:nvPr/>
+          </p:nvSpPr>
+          <p:spPr>
+            <a:xfrm>
+              <a:off x="6467667" y="5716183"/>
+              <a:ext cx="124358" cy="80101"/>
+            </a:xfrm>
+            <a:prstGeom prst="rect">
+              <a:avLst/>
+            </a:prstGeom>
+            <a:noFill/>
+          </p:spPr>
+          <p:txBody>
+            <a:bodyPr lIns="0" rIns="0" tIns="0" bIns="0" anchorCtr="1" anchor="ctr" wrap="none"/>
+            <a:lstStyle/>
+            <a:p>
+              <a:pPr algn="l" marL="0" marR="0" indent="0">
+                <a:lnSpc>
+                  <a:spcPts val="880"/>
+                </a:lnSpc>
+                <a:spcBef>
+                  <a:spcPts val="0"/>
+                </a:spcBef>
+                <a:spcAft>
+                  <a:spcPts val="0"/>
+                </a:spcAft>
+              </a:pPr>
+              <a:r>
+                <a:rPr sz="880">
+                  <a:solidFill>
+                    <a:srgbClr val="4D4D4D">
+                      <a:alpha val="100000"/>
+                    </a:srgbClr>
+                  </a:solidFill>
+                  <a:latin typeface="Helvetica"/>
+                  <a:cs typeface="Helvetica"/>
+                </a:rPr>
+                <a:t>10</a:t>
+              </a:r>
+            </a:p>
+          </p:txBody>
+        </p:sp>
+        <p:sp>
+          <p:nvSpPr>
+            <p:cNvPr id="91" name="tx91"/>
+            <p:cNvSpPr/>
+            <p:nvPr/>
+          </p:nvSpPr>
+          <p:spPr>
+            <a:xfrm>
+              <a:off x="7318177" y="5716183"/>
+              <a:ext cx="124358" cy="80101"/>
+            </a:xfrm>
+            <a:prstGeom prst="rect">
+              <a:avLst/>
+            </a:prstGeom>
+            <a:noFill/>
+          </p:spPr>
+          <p:txBody>
+            <a:bodyPr lIns="0" rIns="0" tIns="0" bIns="0" anchorCtr="1" anchor="ctr" wrap="none"/>
+            <a:lstStyle/>
+            <a:p>
+              <a:pPr algn="l" marL="0" marR="0" indent="0">
+                <a:lnSpc>
+                  <a:spcPts val="880"/>
+                </a:lnSpc>
+                <a:spcBef>
+                  <a:spcPts val="0"/>
+                </a:spcBef>
+                <a:spcAft>
+                  <a:spcPts val="0"/>
+                </a:spcAft>
+              </a:pPr>
+              <a:r>
+                <a:rPr sz="880">
+                  <a:solidFill>
+                    <a:srgbClr val="4D4D4D">
+                      <a:alpha val="100000"/>
+                    </a:srgbClr>
+                  </a:solidFill>
+                  <a:latin typeface="Helvetica"/>
+                  <a:cs typeface="Helvetica"/>
+                </a:rPr>
+                <a:t>20</a:t>
+              </a:r>
+            </a:p>
+          </p:txBody>
+        </p:sp>
+        <p:sp>
+          <p:nvSpPr>
+            <p:cNvPr id="92" name="tx92"/>
+            <p:cNvSpPr/>
+            <p:nvPr/>
+          </p:nvSpPr>
+          <p:spPr>
+            <a:xfrm>
+              <a:off x="8168686" y="5716183"/>
+              <a:ext cx="124358" cy="80101"/>
+            </a:xfrm>
+            <a:prstGeom prst="rect">
+              <a:avLst/>
+            </a:prstGeom>
+            <a:noFill/>
+          </p:spPr>
+          <p:txBody>
+            <a:bodyPr lIns="0" rIns="0" tIns="0" bIns="0" anchorCtr="1" anchor="ctr" wrap="none"/>
+            <a:lstStyle/>
+            <a:p>
+              <a:pPr algn="l" marL="0" marR="0" indent="0">
+                <a:lnSpc>
+                  <a:spcPts val="880"/>
+                </a:lnSpc>
+                <a:spcBef>
+                  <a:spcPts val="0"/>
+                </a:spcBef>
+                <a:spcAft>
+                  <a:spcPts val="0"/>
+                </a:spcAft>
+              </a:pPr>
+              <a:r>
+                <a:rPr sz="880">
+                  <a:solidFill>
+                    <a:srgbClr val="4D4D4D">
+                      <a:alpha val="100000"/>
+                    </a:srgbClr>
+                  </a:solidFill>
+                  <a:latin typeface="Helvetica"/>
+                  <a:cs typeface="Helvetica"/>
+                </a:rPr>
+                <a:t>30</a:t>
+              </a:r>
+            </a:p>
+          </p:txBody>
+        </p:sp>
+        <p:sp>
+          <p:nvSpPr>
+            <p:cNvPr id="93" name="tx93"/>
+            <p:cNvSpPr/>
+            <p:nvPr/>
+          </p:nvSpPr>
+          <p:spPr>
+            <a:xfrm>
+              <a:off x="1561815" y="5855859"/>
+              <a:ext cx="6311097" cy="100218"/>
+            </a:xfrm>
+            <a:prstGeom prst="rect">
+              <a:avLst/>
+            </a:prstGeom>
+            <a:noFill/>
+          </p:spPr>
+          <p:txBody>
+            <a:bodyPr lIns="0" rIns="0" tIns="0" bIns="0" anchorCtr="1" anchor="ctr" wrap="none"/>
+            <a:lstStyle/>
+            <a:p>
+              <a:pPr algn="l" marL="0" marR="0" indent="0">
+                <a:lnSpc>
+                  <a:spcPts val="1100"/>
+                </a:lnSpc>
+                <a:spcBef>
+                  <a:spcPts val="0"/>
+                </a:spcBef>
+                <a:spcAft>
+                  <a:spcPts val="0"/>
+                </a:spcAft>
+              </a:pPr>
+              <a:r>
+                <a:rPr sz="1100">
+                  <a:solidFill>
+                    <a:srgbClr val="000000">
+                      <a:alpha val="100000"/>
+                    </a:srgbClr>
+                  </a:solidFill>
+                  <a:latin typeface="Helvetica"/>
+                  <a:cs typeface="Helvetica"/>
+                </a:rPr>
+                <a:t>Sensitivity eGFR Difference (%): 100 × (CKD-EPI 2012 CysC − CKD-EPI 2021 Cr) / CKD-EPI 2021 Cr</a:t>
+              </a:r>
+            </a:p>
+          </p:txBody>
+        </p:sp>
+        <p:sp>
+          <p:nvSpPr>
+            <p:cNvPr id="94" name="tx94"/>
+            <p:cNvSpPr/>
+            <p:nvPr/>
+          </p:nvSpPr>
+          <p:spPr>
+            <a:xfrm rot="-5400000">
+              <a:off x="138035" y="4944909"/>
+              <a:ext cx="1016904" cy="100218"/>
+            </a:xfrm>
+            <a:prstGeom prst="rect">
+              <a:avLst/>
+            </a:prstGeom>
+            <a:noFill/>
+          </p:spPr>
+          <p:txBody>
+            <a:bodyPr lIns="0" rIns="0" tIns="0" bIns="0" anchorCtr="1" anchor="ctr" wrap="none"/>
+            <a:lstStyle/>
+            <a:p>
+              <a:pPr algn="l" marL="0" marR="0" indent="0">
+                <a:lnSpc>
+                  <a:spcPts val="1100"/>
+                </a:lnSpc>
+                <a:spcBef>
+                  <a:spcPts val="0"/>
+                </a:spcBef>
+                <a:spcAft>
+                  <a:spcPts val="0"/>
+                </a:spcAft>
+              </a:pPr>
+              <a:r>
+                <a:rPr sz="1100">
+                  <a:solidFill>
+                    <a:srgbClr val="000000">
+                      <a:alpha val="100000"/>
+                    </a:srgbClr>
+                  </a:solidFill>
+                  <a:latin typeface="Helvetica"/>
+                  <a:cs typeface="Helvetica"/>
+                </a:rPr>
+                <a:t>subHR (95% CI)</a:t>
+              </a:r>
+            </a:p>
+          </p:txBody>
+        </p:sp>
+        <p:sp>
+          <p:nvSpPr>
+            <p:cNvPr id="95" name="tx95"/>
+            <p:cNvSpPr/>
+            <p:nvPr/>
+          </p:nvSpPr>
+          <p:spPr>
+            <a:xfrm>
+              <a:off x="887106" y="4159544"/>
+              <a:ext cx="6959864" cy="82021"/>
+            </a:xfrm>
+            <a:prstGeom prst="rect">
+              <a:avLst/>
+            </a:prstGeom>
+            <a:noFill/>
+          </p:spPr>
+          <p:txBody>
+            <a:bodyPr lIns="0" rIns="0" tIns="0" bIns="0" anchorCtr="1" anchor="ctr" wrap="none"/>
+            <a:lstStyle/>
+            <a:p>
+              <a:pPr algn="l" marL="0" marR="0" indent="0">
+                <a:lnSpc>
+                  <a:spcPts val="900"/>
+                </a:lnSpc>
+                <a:spcBef>
+                  <a:spcPts val="0"/>
+                </a:spcBef>
+                <a:spcAft>
+                  <a:spcPts val="0"/>
+                </a:spcAft>
+              </a:pPr>
+              <a:r>
+                <a:rPr sz="900">
+                  <a:solidFill>
+                    <a:srgbClr val="404040">
+                      <a:alpha val="100000"/>
+                    </a:srgbClr>
+                  </a:solidFill>
+                  <a:latin typeface="Helvetica"/>
+                  <a:cs typeface="Helvetica"/>
+                </a:rPr>
+                <a:t>subHR per 10 % decline: 1.20 (1.02-1.41), p_Bonf = 0.174 (n = 6)  |  per IQR decline (Δ = 28.0 %): 1.66 (1.05-2.61)  |  IQR: [-30.0, -2.0] %</a:t>
+              </a:r>
+            </a:p>
+          </p:txBody>
+        </p:sp>
+        <p:sp>
+          <p:nvSpPr>
+            <p:cNvPr id="96" name="tx96"/>
+            <p:cNvSpPr/>
+            <p:nvPr/>
+          </p:nvSpPr>
+          <p:spPr>
+            <a:xfrm>
+              <a:off x="887106" y="3932770"/>
               <a:ext cx="2783982" cy="120152"/>
             </a:xfrm>
             <a:prstGeom prst="rect">
